--- a/Presentacion_ElMembrillo.pptx
+++ b/Presentacion_ElMembrillo.pptx
@@ -4,6 +4,9 @@
   <p:sldMasterIdLst>
     <p:sldMasterId id="2147483648" r:id="rId1"/>
   </p:sldMasterIdLst>
+  <p:notesMasterIdLst>
+    <p:notesMasterId r:id="rId13"/>
+  </p:notesMasterIdLst>
   <p:sldIdLst>
     <p:sldId id="256" r:id="rId2"/>
     <p:sldId id="257" r:id="rId3"/>
@@ -15,11 +18,8 @@
     <p:sldId id="263" r:id="rId9"/>
     <p:sldId id="264" r:id="rId10"/>
     <p:sldId id="265" r:id="rId11"/>
-    <p:sldId id="266" r:id="rId12"/>
+    <p:sldId id="267" r:id="rId12"/>
   </p:sldIdLst>
-  <p:notesMasterIdLst>
-    <p:notesMasterId r:id="rId13"/>
-  </p:notesMasterIdLst>
   <p:sldSz cx="12192000" cy="6858000"/>
   <p:notesSz cx="6858000" cy="12192000"/>
   <p:defaultTextStyle>
@@ -114,6 +114,11 @@
       </a:defRPr>
     </a:lvl9pPr>
   </p:defaultTextStyle>
+  <p:extLst>
+    <p:ext uri="{EFAFB233-063F-42B5-8137-9DF3F51BA10A}">
+      <p15:sldGuideLst xmlns:p15="http://schemas.microsoft.com/office/powerpoint/2012/main"/>
+    </p:ext>
+  </p:extLst>
 </p:presentation>
 </file>
 
@@ -139,234 +144,10 @@
           <a:chExt cx="0" cy="0"/>
         </a:xfrm>
       </p:grpSpPr>
-      <p:sp>
-        <p:nvSpPr>
-          <p:cNvPr id="2" name="Header Placeholder 1"/>
-          <p:cNvSpPr>
-            <a:spLocks noGrp="1"/>
-          </p:cNvSpPr>
-          <p:nvPr>
-            <p:ph type="hdr" sz="quarter"/>
-          </p:nvPr>
-        </p:nvSpPr>
-        <p:spPr>
-          <a:xfrm>
-            <a:off x="0" y="0"/>
-            <a:ext cx="2971800" cy="458788"/>
-          </a:xfrm>
-          <a:prstGeom prst="rect">
-            <a:avLst/>
-          </a:prstGeom>
-        </p:spPr>
-        <p:txBody>
-          <a:bodyPr vert="horz" lIns="91440" tIns="45720" rIns="91440" bIns="45720" rtlCol="0"/>
-          <a:lstStyle>
-            <a:lvl1pPr algn="l">
-              <a:defRPr sz="1200"/>
-            </a:lvl1pPr>
-          </a:lstStyle>
-          <a:p>
-            <a:endParaRPr lang="en-US"/>
-          </a:p>
-        </p:txBody>
-      </p:sp>
-      <p:sp>
-        <p:nvSpPr>
-          <p:cNvPr id="3" name="Date Placeholder 2"/>
-          <p:cNvSpPr>
-            <a:spLocks noGrp="1"/>
-          </p:cNvSpPr>
-          <p:nvPr>
-            <p:ph type="dt" idx="1"/>
-          </p:nvPr>
-        </p:nvSpPr>
-        <p:spPr>
-          <a:xfrm>
-            <a:off x="3884613" y="0"/>
-            <a:ext cx="2971800" cy="458788"/>
-          </a:xfrm>
-          <a:prstGeom prst="rect">
-            <a:avLst/>
-          </a:prstGeom>
-        </p:spPr>
-        <p:txBody>
-          <a:bodyPr vert="horz" lIns="91440" tIns="45720" rIns="91440" bIns="45720" rtlCol="0"/>
-          <a:lstStyle>
-            <a:lvl1pPr algn="r">
-              <a:defRPr sz="1200"/>
-            </a:lvl1pPr>
-          </a:lstStyle>
-          <a:p>
-            <a:fld id="{5282F153-3F37-0F45-9E97-73ACFA13230C}" type="datetimeFigureOut">
-              <a:rPr lang="en-US"/>
-              <a:t>7/23/19</a:t>
-            </a:fld>
-            <a:endParaRPr lang="en-US"/>
-          </a:p>
-        </p:txBody>
-      </p:sp>
-      <p:sp>
-        <p:nvSpPr>
-          <p:cNvPr id="4" name="Slide Image Placeholder 3"/>
-          <p:cNvSpPr>
-            <a:spLocks noGrp="1" noRot="1" noChangeAspect="1"/>
-          </p:cNvSpPr>
-          <p:nvPr>
-            <p:ph type="sldImg" idx="2"/>
-          </p:nvPr>
-        </p:nvSpPr>
-        <p:spPr>
-          <a:xfrm>
-            <a:off x="685800" y="1143000"/>
-            <a:ext cx="5486400" cy="3086100"/>
-          </a:xfrm>
-          <a:prstGeom prst="rect">
-            <a:avLst/>
-          </a:prstGeom>
-          <a:noFill/>
-          <a:ln w="12700">
-            <a:solidFill>
-              <a:prstClr val="black"/>
-            </a:solidFill>
-          </a:ln>
-        </p:spPr>
-        <p:txBody>
-          <a:bodyPr vert="horz" lIns="91440" tIns="45720" rIns="91440" bIns="45720" rtlCol="0" anchor="ctr"/>
-          <a:lstStyle/>
-          <a:p>
-            <a:endParaRPr lang="en-US"/>
-          </a:p>
-        </p:txBody>
-      </p:sp>
-      <p:sp>
-        <p:nvSpPr>
-          <p:cNvPr id="5" name="Notes Placeholder 4"/>
-          <p:cNvSpPr>
-            <a:spLocks noGrp="1"/>
-          </p:cNvSpPr>
-          <p:nvPr>
-            <p:ph type="body" sz="quarter" idx="3"/>
-          </p:nvPr>
-        </p:nvSpPr>
-        <p:spPr>
-          <a:xfrm>
-            <a:off x="685800" y="4400550"/>
-            <a:ext cx="5486400" cy="3600450"/>
-          </a:xfrm>
-          <a:prstGeom prst="rect">
-            <a:avLst/>
-          </a:prstGeom>
-        </p:spPr>
-        <p:txBody>
-          <a:bodyPr vert="horz" lIns="91440" tIns="45720" rIns="91440" bIns="45720" rtlCol="0"/>
-          <a:lstStyle/>
-          <a:p>
-            <a:pPr lvl="0"/>
-            <a:r>
-              <a:rPr lang="en-US"/>
-              <a:t>Click to edit Master text styles</a:t>
-            </a:r>
-          </a:p>
-          <a:p>
-            <a:pPr lvl="1"/>
-            <a:r>
-              <a:rPr lang="en-US"/>
-              <a:t>Second level</a:t>
-            </a:r>
-          </a:p>
-          <a:p>
-            <a:pPr lvl="2"/>
-            <a:r>
-              <a:rPr lang="en-US"/>
-              <a:t>Third level</a:t>
-            </a:r>
-          </a:p>
-          <a:p>
-            <a:pPr lvl="3"/>
-            <a:r>
-              <a:rPr lang="en-US"/>
-              <a:t>Fourth level</a:t>
-            </a:r>
-          </a:p>
-          <a:p>
-            <a:pPr lvl="4"/>
-            <a:r>
-              <a:rPr lang="en-US"/>
-              <a:t>Fifth level</a:t>
-            </a:r>
-          </a:p>
-        </p:txBody>
-      </p:sp>
-      <p:sp>
-        <p:nvSpPr>
-          <p:cNvPr id="6" name="Footer Placeholder 5"/>
-          <p:cNvSpPr>
-            <a:spLocks noGrp="1"/>
-          </p:cNvSpPr>
-          <p:nvPr>
-            <p:ph type="ftr" sz="quarter" idx="4"/>
-          </p:nvPr>
-        </p:nvSpPr>
-        <p:spPr>
-          <a:xfrm>
-            <a:off x="0" y="8685213"/>
-            <a:ext cx="2971800" cy="458787"/>
-          </a:xfrm>
-          <a:prstGeom prst="rect">
-            <a:avLst/>
-          </a:prstGeom>
-        </p:spPr>
-        <p:txBody>
-          <a:bodyPr vert="horz" lIns="91440" tIns="45720" rIns="91440" bIns="45720" rtlCol="0" anchor="b"/>
-          <a:lstStyle>
-            <a:lvl1pPr algn="l">
-              <a:defRPr sz="1200"/>
-            </a:lvl1pPr>
-          </a:lstStyle>
-          <a:p>
-            <a:endParaRPr lang="en-US"/>
-          </a:p>
-        </p:txBody>
-      </p:sp>
-      <p:sp>
-        <p:nvSpPr>
-          <p:cNvPr id="7" name="Slide Number Placeholder 6"/>
-          <p:cNvSpPr>
-            <a:spLocks noGrp="1"/>
-          </p:cNvSpPr>
-          <p:nvPr>
-            <p:ph type="sldNum" sz="quarter" idx="5"/>
-          </p:nvPr>
-        </p:nvSpPr>
-        <p:spPr>
-          <a:xfrm>
-            <a:off x="3884613" y="8685213"/>
-            <a:ext cx="2971800" cy="458787"/>
-          </a:xfrm>
-          <a:prstGeom prst="rect">
-            <a:avLst/>
-          </a:prstGeom>
-        </p:spPr>
-        <p:txBody>
-          <a:bodyPr vert="horz" lIns="91440" tIns="45720" rIns="91440" bIns="45720" rtlCol="0" anchor="b"/>
-          <a:lstStyle>
-            <a:lvl1pPr algn="r">
-              <a:defRPr sz="1200"/>
-            </a:lvl1pPr>
-          </a:lstStyle>
-          <a:p>
-            <a:fld id="{CE5E9CC1-C706-0F49-92D6-E571CC5EEA8F}" type="slidenum">
-              <a:rPr lang="en-US"/>
-              <a:t>‹#›</a:t>
-            </a:fld>
-            <a:endParaRPr lang="en-US"/>
-          </a:p>
-        </p:txBody>
-      </p:sp>
     </p:spTree>
     <p:extLst>
       <p:ext uri="{BB962C8B-B14F-4D97-AF65-F5344CB8AC3E}">
-        <p14:creationId xmlns:p14="http://schemas.microsoft.com/office/powerpoint/2010/main" val="1024086991"/>
+        <p14:creationId xmlns:p14="http://schemas.microsoft.com/office/powerpoint/2010/main" val="4017769245"/>
       </p:ext>
     </p:extLst>
   </p:cSld>
@@ -510,10 +291,6 @@
           <a:bodyPr/>
           <a:lstStyle/>
           <a:p>
-            <a:r>
-              <a:rPr lang="en-US" dirty="0"/>
-              <a:t/>
-            </a:r>
             <a:endParaRPr lang="en-US" dirty="0"/>
           </a:p>
         </p:txBody>
@@ -598,10 +375,6 @@
           <a:bodyPr/>
           <a:lstStyle/>
           <a:p>
-            <a:r>
-              <a:rPr lang="en-US" dirty="0"/>
-              <a:t/>
-            </a:r>
             <a:endParaRPr lang="en-US" dirty="0"/>
           </a:p>
         </p:txBody>
@@ -686,10 +459,6 @@
           <a:bodyPr/>
           <a:lstStyle/>
           <a:p>
-            <a:r>
-              <a:rPr lang="en-US" dirty="0"/>
-              <a:t/>
-            </a:r>
             <a:endParaRPr lang="en-US" dirty="0"/>
           </a:p>
         </p:txBody>
@@ -774,10 +543,6 @@
           <a:bodyPr/>
           <a:lstStyle/>
           <a:p>
-            <a:r>
-              <a:rPr lang="en-US" dirty="0"/>
-              <a:t/>
-            </a:r>
             <a:endParaRPr lang="en-US" dirty="0"/>
           </a:p>
         </p:txBody>
@@ -862,10 +627,6 @@
           <a:bodyPr/>
           <a:lstStyle/>
           <a:p>
-            <a:r>
-              <a:rPr lang="en-US" dirty="0"/>
-              <a:t/>
-            </a:r>
             <a:endParaRPr lang="en-US" dirty="0"/>
           </a:p>
         </p:txBody>
@@ -950,10 +711,6 @@
           <a:bodyPr/>
           <a:lstStyle/>
           <a:p>
-            <a:r>
-              <a:rPr lang="en-US" dirty="0"/>
-              <a:t/>
-            </a:r>
             <a:endParaRPr lang="en-US" dirty="0"/>
           </a:p>
         </p:txBody>
@@ -1038,10 +795,6 @@
           <a:bodyPr/>
           <a:lstStyle/>
           <a:p>
-            <a:r>
-              <a:rPr lang="en-US" dirty="0"/>
-              <a:t/>
-            </a:r>
             <a:endParaRPr lang="en-US" dirty="0"/>
           </a:p>
         </p:txBody>
@@ -1126,10 +879,6 @@
           <a:bodyPr/>
           <a:lstStyle/>
           <a:p>
-            <a:r>
-              <a:rPr lang="en-US" dirty="0"/>
-              <a:t/>
-            </a:r>
             <a:endParaRPr lang="en-US" dirty="0"/>
           </a:p>
         </p:txBody>
@@ -1214,10 +963,6 @@
           <a:bodyPr/>
           <a:lstStyle/>
           <a:p>
-            <a:r>
-              <a:rPr lang="en-US" dirty="0"/>
-              <a:t/>
-            </a:r>
             <a:endParaRPr lang="en-US" dirty="0"/>
           </a:p>
         </p:txBody>
@@ -1302,10 +1047,6 @@
           <a:bodyPr/>
           <a:lstStyle/>
           <a:p>
-            <a:r>
-              <a:rPr lang="en-US" dirty="0"/>
-              <a:t/>
-            </a:r>
             <a:endParaRPr lang="en-US" dirty="0"/>
           </a:p>
         </p:txBody>
@@ -1390,10 +1131,6 @@
           <a:bodyPr/>
           <a:lstStyle/>
           <a:p>
-            <a:r>
-              <a:rPr lang="en-US" dirty="0"/>
-              <a:t/>
-            </a:r>
             <a:endParaRPr lang="en-US" dirty="0"/>
           </a:p>
         </p:txBody>
@@ -1467,6 +1204,11 @@
 <file path=ppt/slideMasters/slideMaster1.xml><?xml version="1.0" encoding="utf-8"?>
 <p:sldMaster xmlns:a="http://schemas.openxmlformats.org/drawingml/2006/main" xmlns:r="http://schemas.openxmlformats.org/officeDocument/2006/relationships" xmlns:p="http://schemas.openxmlformats.org/presentationml/2006/main">
   <p:cSld>
+    <p:bg>
+      <p:bgRef idx="1001">
+        <a:schemeClr val="bg1"/>
+      </p:bgRef>
+    </p:bg>
     <p:spTree>
       <p:nvGrpSpPr>
         <p:cNvPr id="1" name=""/>
@@ -1749,6 +1491,7 @@
         <a:solidFill>
           <a:srgbClr val="1F2937"/>
         </a:solidFill>
+        <a:effectLst/>
       </p:bgPr>
     </p:bg>
     <p:spTree>
@@ -1789,6 +1532,13 @@
             <a:prstDash val="solid"/>
           </a:ln>
         </p:spPr>
+        <p:txBody>
+          <a:bodyPr/>
+          <a:lstStyle/>
+          <a:p>
+            <a:endParaRPr lang="es-GT"/>
+          </a:p>
+        </p:txBody>
       </p:sp>
       <p:sp>
         <p:nvSpPr>
@@ -1811,11 +1561,11 @@
           <a:bodyPr wrap="square" rtlCol="0" anchor="ctr"/>
           <a:lstStyle/>
           <a:p>
-            <a:pPr indent="0" marL="0">
-              <a:buNone/>
-            </a:pPr>
-            <a:r>
-              <a:rPr lang="en-US" sz="1300" b="1" spc="600" kern="0" dirty="0">
+            <a:pPr marL="0" indent="0">
+              <a:buNone/>
+            </a:pPr>
+            <a:r>
+              <a:rPr lang="en-US" sz="1300" b="1" kern="0" spc="600" dirty="0">
                 <a:solidFill>
                   <a:srgbClr val="D4A574"/>
                 </a:solidFill>
@@ -1850,7 +1600,7 @@
           <a:bodyPr wrap="square" lIns="0" tIns="0" rIns="0" bIns="0" rtlCol="0" anchor="ctr"/>
           <a:lstStyle/>
           <a:p>
-            <a:pPr indent="0" marL="0">
+            <a:pPr marL="0" indent="0">
               <a:buNone/>
             </a:pPr>
             <a:r>
@@ -1889,7 +1639,7 @@
           <a:bodyPr wrap="square" lIns="0" tIns="0" rIns="0" bIns="0" rtlCol="0" anchor="ctr"/>
           <a:lstStyle/>
           <a:p>
-            <a:pPr indent="0" marL="0">
+            <a:pPr marL="0" indent="0">
               <a:buNone/>
             </a:pPr>
             <a:r>
@@ -1931,6 +1681,13 @@
             <a:prstDash val="solid"/>
           </a:ln>
         </p:spPr>
+        <p:txBody>
+          <a:bodyPr/>
+          <a:lstStyle/>
+          <a:p>
+            <a:endParaRPr lang="es-GT"/>
+          </a:p>
+        </p:txBody>
       </p:sp>
       <p:sp>
         <p:nvSpPr>
@@ -1953,7 +1710,7 @@
           <a:bodyPr wrap="square" rtlCol="0" anchor="ctr"/>
           <a:lstStyle/>
           <a:p>
-            <a:pPr indent="0" marL="0">
+            <a:pPr marL="0" indent="0">
               <a:buNone/>
             </a:pPr>
             <a:r>
@@ -1992,11 +1749,11 @@
           <a:bodyPr wrap="square" rtlCol="0" anchor="ctr"/>
           <a:lstStyle/>
           <a:p>
-            <a:pPr indent="0" marL="0">
-              <a:buNone/>
-            </a:pPr>
-            <a:r>
-              <a:rPr lang="en-US" sz="1000" b="1" spc="400" kern="0" dirty="0">
+            <a:pPr marL="0" indent="0">
+              <a:buNone/>
+            </a:pPr>
+            <a:r>
+              <a:rPr lang="en-US" sz="1000" b="1" kern="0" spc="400" dirty="0">
                 <a:solidFill>
                   <a:srgbClr val="9CA3AF"/>
                 </a:solidFill>
@@ -2031,7 +1788,7 @@
           <a:bodyPr wrap="square" rtlCol="0" anchor="ctr"/>
           <a:lstStyle/>
           <a:p>
-            <a:pPr indent="0" marL="0">
+            <a:pPr marL="0" indent="0">
               <a:buNone/>
             </a:pPr>
             <a:r>
@@ -2070,7 +1827,7 @@
           <a:bodyPr wrap="square" rtlCol="0" anchor="ctr"/>
           <a:lstStyle/>
           <a:p>
-            <a:pPr indent="0" marL="0">
+            <a:pPr marL="0" indent="0">
               <a:buNone/>
             </a:pPr>
             <a:r>
@@ -2109,11 +1866,11 @@
           <a:bodyPr wrap="square" rtlCol="0" anchor="ctr"/>
           <a:lstStyle/>
           <a:p>
-            <a:pPr indent="0" marL="0">
-              <a:buNone/>
-            </a:pPr>
-            <a:r>
-              <a:rPr lang="en-US" sz="1000" b="1" spc="400" kern="0" dirty="0">
+            <a:pPr marL="0" indent="0">
+              <a:buNone/>
+            </a:pPr>
+            <a:r>
+              <a:rPr lang="en-US" sz="1000" b="1" kern="0" spc="400" dirty="0">
                 <a:solidFill>
                   <a:srgbClr val="9CA3AF"/>
                 </a:solidFill>
@@ -2148,7 +1905,7 @@
           <a:bodyPr wrap="square" rtlCol="0" anchor="ctr"/>
           <a:lstStyle/>
           <a:p>
-            <a:pPr indent="0" marL="0">
+            <a:pPr marL="0" indent="0">
               <a:buNone/>
             </a:pPr>
             <a:r>
@@ -2187,7 +1944,7 @@
           <a:bodyPr wrap="square" rtlCol="0" anchor="ctr"/>
           <a:lstStyle/>
           <a:p>
-            <a:pPr indent="0" marL="0">
+            <a:pPr marL="0" indent="0">
               <a:buNone/>
             </a:pPr>
             <a:r>
@@ -2226,7 +1983,7 @@
           <a:bodyPr wrap="square" rtlCol="0" anchor="ctr"/>
           <a:lstStyle/>
           <a:p>
-            <a:pPr algn="r" indent="0" marL="0">
+            <a:pPr marL="0" indent="0" algn="r">
               <a:buNone/>
             </a:pPr>
             <a:r>
@@ -2260,6 +2017,7 @@
         <a:solidFill>
           <a:srgbClr val="FFFFFF"/>
         </a:solidFill>
+        <a:effectLst/>
       </p:bgPr>
     </p:bg>
     <p:spTree>
@@ -2297,11 +2055,11 @@
           <a:bodyPr wrap="square" rtlCol="0" anchor="ctr"/>
           <a:lstStyle/>
           <a:p>
-            <a:pPr indent="0" marL="0">
-              <a:buNone/>
-            </a:pPr>
-            <a:r>
-              <a:rPr lang="en-US" sz="1100" b="1" spc="400" kern="0" dirty="0">
+            <a:pPr marL="0" indent="0">
+              <a:buNone/>
+            </a:pPr>
+            <a:r>
+              <a:rPr lang="en-US" sz="1100" b="1" kern="0" spc="400" dirty="0">
                 <a:solidFill>
                   <a:srgbClr val="8B0000"/>
                 </a:solidFill>
@@ -2336,7 +2094,7 @@
           <a:bodyPr wrap="square" lIns="0" tIns="0" rIns="0" bIns="0" rtlCol="0" anchor="ctr"/>
           <a:lstStyle/>
           <a:p>
-            <a:pPr indent="0" marL="0">
+            <a:pPr marL="0" indent="0">
               <a:buNone/>
             </a:pPr>
             <a:r>
@@ -2370,16 +2128,34 @@
         </p:nvGraphicFramePr>
         <p:xfrm>
           <a:off x="548640" y="1828800"/>
-          <a:ext cx="11064240" cy="914400"/>
+          <a:ext cx="11064240" cy="3017520"/>
         </p:xfrm>
         <a:graphic>
           <a:graphicData uri="http://schemas.openxmlformats.org/drawingml/2006/table">
             <a:tbl>
               <a:tblPr/>
               <a:tblGrid>
-                <a:gridCol w="3200400"/>
-                <a:gridCol w="3657600"/>
-                <a:gridCol w="4206240"/>
+                <a:gridCol w="3200400">
+                  <a:extLst>
+                    <a:ext uri="{9D8B030D-6E8A-4147-A177-3AD203B41FA5}">
+                      <a16:colId xmlns:a16="http://schemas.microsoft.com/office/drawing/2014/main" val="20000"/>
+                    </a:ext>
+                  </a:extLst>
+                </a:gridCol>
+                <a:gridCol w="3657600">
+                  <a:extLst>
+                    <a:ext uri="{9D8B030D-6E8A-4147-A177-3AD203B41FA5}">
+                      <a16:colId xmlns:a16="http://schemas.microsoft.com/office/drawing/2014/main" val="20001"/>
+                    </a:ext>
+                  </a:extLst>
+                </a:gridCol>
+                <a:gridCol w="4206240">
+                  <a:extLst>
+                    <a:ext uri="{9D8B030D-6E8A-4147-A177-3AD203B41FA5}">
+                      <a16:colId xmlns:a16="http://schemas.microsoft.com/office/drawing/2014/main" val="20002"/>
+                    </a:ext>
+                  </a:extLst>
+                </a:gridCol>
               </a:tblGrid>
               <a:tr h="502920">
                 <a:tc>
@@ -2387,7 +2163,7 @@
                     <a:bodyPr/>
                     <a:lstStyle/>
                     <a:p>
-                      <a:pPr indent="0" marL="0">
+                      <a:pPr marL="0" indent="0">
                         <a:buNone/>
                       </a:pPr>
                       <a:r>
@@ -2408,7 +2184,7 @@
                       </a:endParaRPr>
                     </a:p>
                   </a:txBody>
-                  <a:tcPr marL="91440" marR="91440" marT="45720" marB="45720" anchor="ctr">
+                  <a:tcPr anchor="ctr">
                     <a:lnL w="6350" cap="flat" cmpd="sng" algn="ctr">
                       <a:solidFill>
                         <a:srgbClr val="E5E7EB"/>
@@ -2455,7 +2231,7 @@
                     <a:bodyPr/>
                     <a:lstStyle/>
                     <a:p>
-                      <a:pPr indent="0" marL="0">
+                      <a:pPr marL="0" indent="0">
                         <a:buNone/>
                       </a:pPr>
                       <a:r>
@@ -2476,7 +2252,7 @@
                       </a:endParaRPr>
                     </a:p>
                   </a:txBody>
-                  <a:tcPr marL="91440" marR="91440" marT="45720" marB="45720" anchor="ctr">
+                  <a:tcPr anchor="ctr">
                     <a:lnL w="6350" cap="flat" cmpd="sng" algn="ctr">
                       <a:solidFill>
                         <a:srgbClr val="E5E7EB"/>
@@ -2523,7 +2299,7 @@
                     <a:bodyPr/>
                     <a:lstStyle/>
                     <a:p>
-                      <a:pPr indent="0" marL="0">
+                      <a:pPr marL="0" indent="0">
                         <a:buNone/>
                       </a:pPr>
                       <a:r>
@@ -2544,7 +2320,7 @@
                       </a:endParaRPr>
                     </a:p>
                   </a:txBody>
-                  <a:tcPr marL="91440" marR="91440" marT="45720" marB="45720" anchor="ctr">
+                  <a:tcPr anchor="ctr">
                     <a:lnL w="6350" cap="flat" cmpd="sng" algn="ctr">
                       <a:solidFill>
                         <a:srgbClr val="E5E7EB"/>
@@ -2586,6 +2362,11 @@
                     </a:solidFill>
                   </a:tcPr>
                 </a:tc>
+                <a:extLst>
+                  <a:ext uri="{0D108BD9-81ED-4DB2-BD59-A6C34878D82A}">
+                    <a16:rowId xmlns:a16="http://schemas.microsoft.com/office/drawing/2014/main" val="10000"/>
+                  </a:ext>
+                </a:extLst>
               </a:tr>
               <a:tr h="502920">
                 <a:tc>
@@ -2593,7 +2374,7 @@
                     <a:bodyPr/>
                     <a:lstStyle/>
                     <a:p>
-                      <a:pPr indent="0" marL="0">
+                      <a:pPr marL="0" indent="0">
                         <a:buNone/>
                       </a:pPr>
                       <a:r>
@@ -2614,7 +2395,7 @@
                       </a:endParaRPr>
                     </a:p>
                   </a:txBody>
-                  <a:tcPr marL="91440" marR="91440" marT="45720" marB="45720" anchor="ctr">
+                  <a:tcPr anchor="ctr">
                     <a:lnL w="6350" cap="flat" cmpd="sng" algn="ctr">
                       <a:solidFill>
                         <a:srgbClr val="E5E7EB"/>
@@ -2661,7 +2442,7 @@
                     <a:bodyPr/>
                     <a:lstStyle/>
                     <a:p>
-                      <a:pPr indent="0" marL="0">
+                      <a:pPr marL="0" indent="0">
                         <a:buNone/>
                       </a:pPr>
                       <a:r>
@@ -2682,7 +2463,7 @@
                       </a:endParaRPr>
                     </a:p>
                   </a:txBody>
-                  <a:tcPr marL="91440" marR="91440" marT="45720" marB="45720" anchor="ctr">
+                  <a:tcPr anchor="ctr">
                     <a:lnL w="6350" cap="flat" cmpd="sng" algn="ctr">
                       <a:solidFill>
                         <a:srgbClr val="E5E7EB"/>
@@ -2729,7 +2510,7 @@
                     <a:bodyPr/>
                     <a:lstStyle/>
                     <a:p>
-                      <a:pPr indent="0" marL="0">
+                      <a:pPr marL="0" indent="0">
                         <a:buNone/>
                       </a:pPr>
                       <a:r>
@@ -2750,7 +2531,7 @@
                       </a:endParaRPr>
                     </a:p>
                   </a:txBody>
-                  <a:tcPr marL="91440" marR="91440" marT="45720" marB="45720" anchor="ctr">
+                  <a:tcPr anchor="ctr">
                     <a:lnL w="6350" cap="flat" cmpd="sng" algn="ctr">
                       <a:solidFill>
                         <a:srgbClr val="E5E7EB"/>
@@ -2792,6 +2573,11 @@
                     </a:solidFill>
                   </a:tcPr>
                 </a:tc>
+                <a:extLst>
+                  <a:ext uri="{0D108BD9-81ED-4DB2-BD59-A6C34878D82A}">
+                    <a16:rowId xmlns:a16="http://schemas.microsoft.com/office/drawing/2014/main" val="10001"/>
+                  </a:ext>
+                </a:extLst>
               </a:tr>
               <a:tr h="502920">
                 <a:tc>
@@ -2799,7 +2585,7 @@
                     <a:bodyPr/>
                     <a:lstStyle/>
                     <a:p>
-                      <a:pPr indent="0" marL="0">
+                      <a:pPr marL="0" indent="0">
                         <a:buNone/>
                       </a:pPr>
                       <a:r>
@@ -2820,7 +2606,7 @@
                       </a:endParaRPr>
                     </a:p>
                   </a:txBody>
-                  <a:tcPr marL="91440" marR="91440" marT="45720" marB="45720" anchor="ctr">
+                  <a:tcPr anchor="ctr">
                     <a:lnL w="6350" cap="flat" cmpd="sng" algn="ctr">
                       <a:solidFill>
                         <a:srgbClr val="E5E7EB"/>
@@ -2864,7 +2650,7 @@
                     <a:bodyPr/>
                     <a:lstStyle/>
                     <a:p>
-                      <a:pPr indent="0" marL="0">
+                      <a:pPr marL="0" indent="0">
                         <a:buNone/>
                       </a:pPr>
                       <a:r>
@@ -2885,7 +2671,7 @@
                       </a:endParaRPr>
                     </a:p>
                   </a:txBody>
-                  <a:tcPr marL="91440" marR="91440" marT="45720" marB="45720" anchor="ctr">
+                  <a:tcPr anchor="ctr">
                     <a:lnL w="6350" cap="flat" cmpd="sng" algn="ctr">
                       <a:solidFill>
                         <a:srgbClr val="E5E7EB"/>
@@ -2929,7 +2715,7 @@
                     <a:bodyPr/>
                     <a:lstStyle/>
                     <a:p>
-                      <a:pPr indent="0" marL="0">
+                      <a:pPr marL="0" indent="0">
                         <a:buNone/>
                       </a:pPr>
                       <a:r>
@@ -2950,7 +2736,7 @@
                       </a:endParaRPr>
                     </a:p>
                   </a:txBody>
-                  <a:tcPr marL="91440" marR="91440" marT="45720" marB="45720" anchor="ctr">
+                  <a:tcPr anchor="ctr">
                     <a:lnL w="6350" cap="flat" cmpd="sng" algn="ctr">
                       <a:solidFill>
                         <a:srgbClr val="E5E7EB"/>
@@ -2989,6 +2775,11 @@
                     </a:lnB>
                   </a:tcPr>
                 </a:tc>
+                <a:extLst>
+                  <a:ext uri="{0D108BD9-81ED-4DB2-BD59-A6C34878D82A}">
+                    <a16:rowId xmlns:a16="http://schemas.microsoft.com/office/drawing/2014/main" val="10002"/>
+                  </a:ext>
+                </a:extLst>
               </a:tr>
               <a:tr h="502920">
                 <a:tc>
@@ -2996,7 +2787,7 @@
                     <a:bodyPr/>
                     <a:lstStyle/>
                     <a:p>
-                      <a:pPr indent="0" marL="0">
+                      <a:pPr marL="0" indent="0">
                         <a:buNone/>
                       </a:pPr>
                       <a:r>
@@ -3017,7 +2808,7 @@
                       </a:endParaRPr>
                     </a:p>
                   </a:txBody>
-                  <a:tcPr marL="91440" marR="91440" marT="45720" marB="45720" anchor="ctr">
+                  <a:tcPr anchor="ctr">
                     <a:lnL w="6350" cap="flat" cmpd="sng" algn="ctr">
                       <a:solidFill>
                         <a:srgbClr val="E5E7EB"/>
@@ -3064,7 +2855,7 @@
                     <a:bodyPr/>
                     <a:lstStyle/>
                     <a:p>
-                      <a:pPr indent="0" marL="0">
+                      <a:pPr marL="0" indent="0">
                         <a:buNone/>
                       </a:pPr>
                       <a:r>
@@ -3085,7 +2876,7 @@
                       </a:endParaRPr>
                     </a:p>
                   </a:txBody>
-                  <a:tcPr marL="91440" marR="91440" marT="45720" marB="45720" anchor="ctr">
+                  <a:tcPr anchor="ctr">
                     <a:lnL w="6350" cap="flat" cmpd="sng" algn="ctr">
                       <a:solidFill>
                         <a:srgbClr val="E5E7EB"/>
@@ -3132,7 +2923,7 @@
                     <a:bodyPr/>
                     <a:lstStyle/>
                     <a:p>
-                      <a:pPr indent="0" marL="0">
+                      <a:pPr marL="0" indent="0">
                         <a:buNone/>
                       </a:pPr>
                       <a:r>
@@ -3153,7 +2944,7 @@
                       </a:endParaRPr>
                     </a:p>
                   </a:txBody>
-                  <a:tcPr marL="91440" marR="91440" marT="45720" marB="45720" anchor="ctr">
+                  <a:tcPr anchor="ctr">
                     <a:lnL w="6350" cap="flat" cmpd="sng" algn="ctr">
                       <a:solidFill>
                         <a:srgbClr val="E5E7EB"/>
@@ -3195,6 +2986,11 @@
                     </a:solidFill>
                   </a:tcPr>
                 </a:tc>
+                <a:extLst>
+                  <a:ext uri="{0D108BD9-81ED-4DB2-BD59-A6C34878D82A}">
+                    <a16:rowId xmlns:a16="http://schemas.microsoft.com/office/drawing/2014/main" val="10003"/>
+                  </a:ext>
+                </a:extLst>
               </a:tr>
               <a:tr h="502920">
                 <a:tc>
@@ -3202,7 +2998,7 @@
                     <a:bodyPr/>
                     <a:lstStyle/>
                     <a:p>
-                      <a:pPr indent="0" marL="0">
+                      <a:pPr marL="0" indent="0">
                         <a:buNone/>
                       </a:pPr>
                       <a:r>
@@ -3223,7 +3019,7 @@
                       </a:endParaRPr>
                     </a:p>
                   </a:txBody>
-                  <a:tcPr marL="91440" marR="91440" marT="45720" marB="45720" anchor="ctr">
+                  <a:tcPr anchor="ctr">
                     <a:lnL w="6350" cap="flat" cmpd="sng" algn="ctr">
                       <a:solidFill>
                         <a:srgbClr val="E5E7EB"/>
@@ -3267,7 +3063,7 @@
                     <a:bodyPr/>
                     <a:lstStyle/>
                     <a:p>
-                      <a:pPr indent="0" marL="0">
+                      <a:pPr marL="0" indent="0">
                         <a:buNone/>
                       </a:pPr>
                       <a:r>
@@ -3288,7 +3084,7 @@
                       </a:endParaRPr>
                     </a:p>
                   </a:txBody>
-                  <a:tcPr marL="91440" marR="91440" marT="45720" marB="45720" anchor="ctr">
+                  <a:tcPr anchor="ctr">
                     <a:lnL w="6350" cap="flat" cmpd="sng" algn="ctr">
                       <a:solidFill>
                         <a:srgbClr val="E5E7EB"/>
@@ -3332,7 +3128,7 @@
                     <a:bodyPr/>
                     <a:lstStyle/>
                     <a:p>
-                      <a:pPr indent="0" marL="0">
+                      <a:pPr marL="0" indent="0">
                         <a:buNone/>
                       </a:pPr>
                       <a:r>
@@ -3353,7 +3149,7 @@
                       </a:endParaRPr>
                     </a:p>
                   </a:txBody>
-                  <a:tcPr marL="91440" marR="91440" marT="45720" marB="45720" anchor="ctr">
+                  <a:tcPr anchor="ctr">
                     <a:lnL w="6350" cap="flat" cmpd="sng" algn="ctr">
                       <a:solidFill>
                         <a:srgbClr val="E5E7EB"/>
@@ -3392,6 +3188,11 @@
                     </a:lnB>
                   </a:tcPr>
                 </a:tc>
+                <a:extLst>
+                  <a:ext uri="{0D108BD9-81ED-4DB2-BD59-A6C34878D82A}">
+                    <a16:rowId xmlns:a16="http://schemas.microsoft.com/office/drawing/2014/main" val="10004"/>
+                  </a:ext>
+                </a:extLst>
               </a:tr>
               <a:tr h="502920">
                 <a:tc>
@@ -3399,7 +3200,7 @@
                     <a:bodyPr/>
                     <a:lstStyle/>
                     <a:p>
-                      <a:pPr indent="0" marL="0">
+                      <a:pPr marL="0" indent="0">
                         <a:buNone/>
                       </a:pPr>
                       <a:r>
@@ -3420,7 +3221,7 @@
                       </a:endParaRPr>
                     </a:p>
                   </a:txBody>
-                  <a:tcPr marL="91440" marR="91440" marT="45720" marB="45720" anchor="ctr">
+                  <a:tcPr anchor="ctr">
                     <a:lnL w="6350" cap="flat" cmpd="sng" algn="ctr">
                       <a:solidFill>
                         <a:srgbClr val="E5E7EB"/>
@@ -3467,7 +3268,7 @@
                     <a:bodyPr/>
                     <a:lstStyle/>
                     <a:p>
-                      <a:pPr indent="0" marL="0">
+                      <a:pPr marL="0" indent="0">
                         <a:buNone/>
                       </a:pPr>
                       <a:r>
@@ -3488,7 +3289,7 @@
                       </a:endParaRPr>
                     </a:p>
                   </a:txBody>
-                  <a:tcPr marL="91440" marR="91440" marT="45720" marB="45720" anchor="ctr">
+                  <a:tcPr anchor="ctr">
                     <a:lnL w="6350" cap="flat" cmpd="sng" algn="ctr">
                       <a:solidFill>
                         <a:srgbClr val="E5E7EB"/>
@@ -3535,7 +3336,7 @@
                     <a:bodyPr/>
                     <a:lstStyle/>
                     <a:p>
-                      <a:pPr indent="0" marL="0">
+                      <a:pPr marL="0" indent="0">
                         <a:buNone/>
                       </a:pPr>
                       <a:r>
@@ -3556,7 +3357,7 @@
                       </a:endParaRPr>
                     </a:p>
                   </a:txBody>
-                  <a:tcPr marL="91440" marR="91440" marT="45720" marB="45720" anchor="ctr">
+                  <a:tcPr anchor="ctr">
                     <a:lnL w="6350" cap="flat" cmpd="sng" algn="ctr">
                       <a:solidFill>
                         <a:srgbClr val="E5E7EB"/>
@@ -3598,6 +3399,11 @@
                     </a:solidFill>
                   </a:tcPr>
                 </a:tc>
+                <a:extLst>
+                  <a:ext uri="{0D108BD9-81ED-4DB2-BD59-A6C34878D82A}">
+                    <a16:rowId xmlns:a16="http://schemas.microsoft.com/office/drawing/2014/main" val="10005"/>
+                  </a:ext>
+                </a:extLst>
               </a:tr>
             </a:tbl>
           </a:graphicData>
@@ -3627,6 +3433,13 @@
             <a:prstDash val="solid"/>
           </a:ln>
         </p:spPr>
+        <p:txBody>
+          <a:bodyPr/>
+          <a:lstStyle/>
+          <a:p>
+            <a:endParaRPr lang="es-GT"/>
+          </a:p>
+        </p:txBody>
       </p:sp>
       <p:sp>
         <p:nvSpPr>
@@ -3649,7 +3462,7 @@
           <a:bodyPr wrap="square" rtlCol="0" anchor="ctr"/>
           <a:lstStyle/>
           <a:p>
-            <a:pPr algn="ctr" indent="0" marL="0">
+            <a:pPr marL="0" indent="0" algn="ctr">
               <a:buNone/>
             </a:pPr>
             <a:r>
@@ -3691,6 +3504,13 @@
             <a:prstDash val="solid"/>
           </a:ln>
         </p:spPr>
+        <p:txBody>
+          <a:bodyPr/>
+          <a:lstStyle/>
+          <a:p>
+            <a:endParaRPr lang="es-GT"/>
+          </a:p>
+        </p:txBody>
       </p:sp>
       <p:sp>
         <p:nvSpPr>
@@ -3713,7 +3533,7 @@
           <a:bodyPr wrap="square" rtlCol="0" anchor="ctr"/>
           <a:lstStyle/>
           <a:p>
-            <a:pPr algn="l" indent="0" marL="0">
+            <a:pPr marL="0" indent="0" algn="l">
               <a:buNone/>
             </a:pPr>
             <a:r>
@@ -3752,7 +3572,7 @@
           <a:bodyPr wrap="square" rtlCol="0" anchor="ctr"/>
           <a:lstStyle/>
           <a:p>
-            <a:pPr algn="r" indent="0" marL="0">
+            <a:pPr marL="0" indent="0" algn="r">
               <a:buNone/>
             </a:pPr>
             <a:r>
@@ -3786,6 +3606,7 @@
         <a:solidFill>
           <a:srgbClr val="1F2937"/>
         </a:solidFill>
+        <a:effectLst/>
       </p:bgPr>
     </p:bg>
     <p:spTree>
@@ -3826,17 +3647,24 @@
             <a:prstDash val="solid"/>
           </a:ln>
         </p:spPr>
-      </p:sp>
-      <p:sp>
-        <p:nvSpPr>
-          <p:cNvPr id="3" name="Text 1"/>
-          <p:cNvSpPr/>
-          <p:nvPr/>
-        </p:nvSpPr>
-        <p:spPr>
-          <a:xfrm>
-            <a:off x="822960" y="822960"/>
-            <a:ext cx="10972800" cy="365760"/>
+        <p:txBody>
+          <a:bodyPr/>
+          <a:lstStyle/>
+          <a:p>
+            <a:endParaRPr lang="es-GT"/>
+          </a:p>
+        </p:txBody>
+      </p:sp>
+      <p:sp>
+        <p:nvSpPr>
+          <p:cNvPr id="28" name="Text 26"/>
+          <p:cNvSpPr/>
+          <p:nvPr/>
+        </p:nvSpPr>
+        <p:spPr>
+          <a:xfrm>
+            <a:off x="10607040" y="6537960"/>
+            <a:ext cx="1371600" cy="274320"/>
           </a:xfrm>
           <a:prstGeom prst="rect">
             <a:avLst/>
@@ -3848,930 +3676,1591 @@
           <a:bodyPr wrap="square" rtlCol="0" anchor="ctr"/>
           <a:lstStyle/>
           <a:p>
-            <a:pPr indent="0" marL="0">
-              <a:buNone/>
-            </a:pPr>
-            <a:r>
-              <a:rPr lang="en-US" sz="1200" b="1" spc="500" kern="0" dirty="0">
-                <a:solidFill>
-                  <a:srgbClr val="D4A574"/>
+            <a:pPr marL="0" indent="0" algn="r">
+              <a:buNone/>
+            </a:pPr>
+            <a:r>
+              <a:rPr lang="en-US" sz="900" dirty="0">
+                <a:solidFill>
+                  <a:srgbClr val="9CA3AF"/>
                 </a:solidFill>
                 <a:latin typeface="Calibri" pitchFamily="34" charset="0"/>
                 <a:ea typeface="Calibri" pitchFamily="34" charset="-122"/>
                 <a:cs typeface="Calibri" pitchFamily="34" charset="-120"/>
               </a:rPr>
-              <a:t>PRÓXIMOS PASOS</a:t>
-            </a:r>
-            <a:endParaRPr lang="en-US" sz="1200" dirty="0"/>
-          </a:p>
-        </p:txBody>
-      </p:sp>
-      <p:sp>
-        <p:nvSpPr>
-          <p:cNvPr id="4" name="Text 2"/>
-          <p:cNvSpPr/>
-          <p:nvPr/>
-        </p:nvSpPr>
-        <p:spPr>
-          <a:xfrm>
-            <a:off x="822960" y="1188720"/>
-            <a:ext cx="10972800" cy="777240"/>
-          </a:xfrm>
-          <a:prstGeom prst="rect">
-            <a:avLst/>
-          </a:prstGeom>
-          <a:noFill/>
-          <a:ln/>
-        </p:spPr>
-        <p:txBody>
-          <a:bodyPr wrap="square" lIns="0" tIns="0" rIns="0" bIns="0" rtlCol="0" anchor="ctr"/>
-          <a:lstStyle/>
-          <a:p>
-            <a:pPr indent="0" marL="0">
-              <a:buNone/>
-            </a:pPr>
-            <a:r>
-              <a:rPr lang="en-US" sz="3200" b="1" dirty="0">
+              <a:t>11 / 11</a:t>
+            </a:r>
+            <a:endParaRPr lang="en-US" sz="900" dirty="0"/>
+          </a:p>
+        </p:txBody>
+      </p:sp>
+      <p:sp>
+        <p:nvSpPr>
+          <p:cNvPr id="50" name="Label"/>
+          <p:cNvSpPr/>
+          <p:nvPr/>
+        </p:nvSpPr>
+        <p:spPr>
+          <a:xfrm>
+            <a:off x="825500" y="508000"/>
+            <a:ext cx="10972800" cy="279400"/>
+          </a:xfrm>
+          <a:prstGeom prst="rect">
+            <a:avLst/>
+          </a:prstGeom>
+          <a:noFill/>
+          <a:ln>
+            <a:noFill/>
+          </a:ln>
+        </p:spPr>
+        <p:txBody>
+          <a:bodyPr wrap="square" lIns="0" tIns="0" rIns="0" bIns="0" anchor="t"/>
+          <a:lstStyle/>
+          <a:p>
+            <a:pPr marL="0" indent="0">
+              <a:buNone/>
+            </a:pPr>
+            <a:r>
+              <a:rPr lang="es-ES" sz="1200" b="1" kern="0" spc="500" dirty="0">
+                <a:solidFill>
+                  <a:srgbClr val="D4A574"/>
+                </a:solidFill>
+                <a:latin typeface="Calibri" pitchFamily="34" charset="0"/>
+              </a:rPr>
+              <a:t>CRONOGRAMA DE IMPLEMENTACIÓN</a:t>
+            </a:r>
+          </a:p>
+        </p:txBody>
+      </p:sp>
+      <p:sp>
+        <p:nvSpPr>
+          <p:cNvPr id="51" name="Title"/>
+          <p:cNvSpPr/>
+          <p:nvPr/>
+        </p:nvSpPr>
+        <p:spPr>
+          <a:xfrm>
+            <a:off x="825500" y="787400"/>
+            <a:ext cx="10972800" cy="635000"/>
+          </a:xfrm>
+          <a:prstGeom prst="rect">
+            <a:avLst/>
+          </a:prstGeom>
+          <a:noFill/>
+          <a:ln>
+            <a:noFill/>
+          </a:ln>
+        </p:spPr>
+        <p:txBody>
+          <a:bodyPr wrap="square" lIns="0" tIns="0" rIns="0" bIns="0" anchor="t"/>
+          <a:lstStyle/>
+          <a:p>
+            <a:pPr marL="0" indent="0">
+              <a:buNone/>
+            </a:pPr>
+            <a:r>
+              <a:rPr lang="es-ES" sz="3200" b="1" dirty="0">
                 <a:solidFill>
                   <a:srgbClr val="FFFFFF"/>
                 </a:solidFill>
                 <a:latin typeface="Calibri" pitchFamily="34" charset="0"/>
-                <a:ea typeface="Calibri" pitchFamily="34" charset="-122"/>
-                <a:cs typeface="Calibri" pitchFamily="34" charset="-120"/>
-              </a:rPr>
-              <a:t>Hoja de ruta hacia la operación digital plena</a:t>
-            </a:r>
-            <a:endParaRPr lang="en-US" sz="3200" dirty="0"/>
-          </a:p>
-        </p:txBody>
-      </p:sp>
-      <p:sp>
-        <p:nvSpPr>
-          <p:cNvPr id="5" name="Shape 3"/>
-          <p:cNvSpPr/>
-          <p:nvPr/>
-        </p:nvSpPr>
-        <p:spPr>
-          <a:xfrm>
-            <a:off x="822960" y="2194560"/>
-            <a:ext cx="2103120" cy="2377440"/>
-          </a:xfrm>
-          <a:prstGeom prst="rect">
-            <a:avLst/>
+              </a:rPr>
+              <a:t>De cero a producción en 12 días con vibe coding</a:t>
+            </a:r>
+          </a:p>
+        </p:txBody>
+      </p:sp>
+      <p:sp>
+        <p:nvSpPr>
+          <p:cNvPr id="52" name="BarBg"/>
+          <p:cNvSpPr/>
+          <p:nvPr/>
+        </p:nvSpPr>
+        <p:spPr>
+          <a:xfrm>
+            <a:off x="825500" y="1841500"/>
+            <a:ext cx="10604500" cy="76200"/>
+          </a:xfrm>
+          <a:prstGeom prst="roundRect">
+            <a:avLst>
+              <a:gd name="adj" fmla="val 50000"/>
+            </a:avLst>
           </a:prstGeom>
           <a:solidFill>
-            <a:srgbClr val="374151"/>
+            <a:srgbClr val="2A2A2E"/>
           </a:solidFill>
-          <a:ln w="12700">
+          <a:ln>
+            <a:noFill/>
+          </a:ln>
+        </p:spPr>
+        <p:txBody>
+          <a:bodyPr/>
+          <a:lstStyle/>
+          <a:p>
+            <a:endParaRPr lang="es-ES"/>
+          </a:p>
+        </p:txBody>
+      </p:sp>
+      <p:sp>
+        <p:nvSpPr>
+          <p:cNvPr id="53" name="BarFill"/>
+          <p:cNvSpPr/>
+          <p:nvPr/>
+        </p:nvSpPr>
+        <p:spPr>
+          <a:xfrm>
+            <a:off x="825500" y="1841500"/>
+            <a:ext cx="10604500" cy="76200"/>
+          </a:xfrm>
+          <a:prstGeom prst="roundRect">
+            <a:avLst>
+              <a:gd name="adj" fmla="val 50000"/>
+            </a:avLst>
+          </a:prstGeom>
+          <a:gradFill>
+            <a:gsLst>
+              <a:gs pos="0">
+                <a:srgbClr val="D4A574"/>
+              </a:gs>
+              <a:gs pos="100000">
+                <a:srgbClr val="845542"/>
+              </a:gs>
+            </a:gsLst>
+            <a:lin ang="0" scaled="1"/>
+          </a:gradFill>
+          <a:ln>
+            <a:noFill/>
+          </a:ln>
+        </p:spPr>
+        <p:txBody>
+          <a:bodyPr/>
+          <a:lstStyle/>
+          <a:p>
+            <a:endParaRPr lang="es-ES"/>
+          </a:p>
+        </p:txBody>
+      </p:sp>
+      <p:sp>
+        <p:nvSpPr>
+          <p:cNvPr id="60" name="Dot0"/>
+          <p:cNvSpPr/>
+          <p:nvPr/>
+        </p:nvSpPr>
+        <p:spPr>
+          <a:xfrm>
+            <a:off x="1645708" y="1816100"/>
+            <a:ext cx="127000" cy="127000"/>
+          </a:xfrm>
+          <a:prstGeom prst="ellipse">
+            <a:avLst/>
+          </a:prstGeom>
+          <a:solidFill>
+            <a:srgbClr val="D4A574"/>
+          </a:solidFill>
+          <a:ln w="19050">
             <a:solidFill>
-              <a:srgbClr val="4B5563"/>
+              <a:srgbClr val="1A1A1E"/>
             </a:solidFill>
-            <a:prstDash val="solid"/>
           </a:ln>
         </p:spPr>
-      </p:sp>
-      <p:sp>
-        <p:nvSpPr>
-          <p:cNvPr id="6" name="Text 4"/>
-          <p:cNvSpPr/>
-          <p:nvPr/>
-        </p:nvSpPr>
-        <p:spPr>
-          <a:xfrm>
-            <a:off x="1005840" y="2331720"/>
-            <a:ext cx="1828800" cy="457200"/>
-          </a:xfrm>
-          <a:prstGeom prst="rect">
-            <a:avLst/>
-          </a:prstGeom>
-          <a:noFill/>
-          <a:ln/>
-        </p:spPr>
-        <p:txBody>
-          <a:bodyPr wrap="square" lIns="0" tIns="0" rIns="0" bIns="0" rtlCol="0" anchor="ctr"/>
-          <a:lstStyle/>
-          <a:p>
-            <a:pPr indent="0" marL="0">
-              <a:buNone/>
-            </a:pPr>
-            <a:r>
-              <a:rPr lang="en-US" sz="2200" b="1" dirty="0">
+        <p:txBody>
+          <a:bodyPr/>
+          <a:lstStyle/>
+          <a:p>
+            <a:endParaRPr lang="es-ES"/>
+          </a:p>
+        </p:txBody>
+      </p:sp>
+      <p:sp>
+        <p:nvSpPr>
+          <p:cNvPr id="61" name="Dot1"/>
+          <p:cNvSpPr/>
+          <p:nvPr/>
+        </p:nvSpPr>
+        <p:spPr>
+          <a:xfrm>
+            <a:off x="3413125" y="1816100"/>
+            <a:ext cx="127000" cy="127000"/>
+          </a:xfrm>
+          <a:prstGeom prst="ellipse">
+            <a:avLst/>
+          </a:prstGeom>
+          <a:solidFill>
+            <a:srgbClr val="C4956A"/>
+          </a:solidFill>
+          <a:ln w="19050">
+            <a:solidFill>
+              <a:srgbClr val="1A1A1E"/>
+            </a:solidFill>
+          </a:ln>
+        </p:spPr>
+        <p:txBody>
+          <a:bodyPr/>
+          <a:lstStyle/>
+          <a:p>
+            <a:endParaRPr lang="es-ES"/>
+          </a:p>
+        </p:txBody>
+      </p:sp>
+      <p:sp>
+        <p:nvSpPr>
+          <p:cNvPr id="62" name="Dot2"/>
+          <p:cNvSpPr/>
+          <p:nvPr/>
+        </p:nvSpPr>
+        <p:spPr>
+          <a:xfrm>
+            <a:off x="5180542" y="1816100"/>
+            <a:ext cx="127000" cy="127000"/>
+          </a:xfrm>
+          <a:prstGeom prst="ellipse">
+            <a:avLst/>
+          </a:prstGeom>
+          <a:solidFill>
+            <a:srgbClr val="B48560"/>
+          </a:solidFill>
+          <a:ln w="19050">
+            <a:solidFill>
+              <a:srgbClr val="1A1A1E"/>
+            </a:solidFill>
+          </a:ln>
+        </p:spPr>
+        <p:txBody>
+          <a:bodyPr/>
+          <a:lstStyle/>
+          <a:p>
+            <a:endParaRPr lang="es-ES"/>
+          </a:p>
+        </p:txBody>
+      </p:sp>
+      <p:sp>
+        <p:nvSpPr>
+          <p:cNvPr id="63" name="Dot3"/>
+          <p:cNvSpPr/>
+          <p:nvPr/>
+        </p:nvSpPr>
+        <p:spPr>
+          <a:xfrm>
+            <a:off x="6947958" y="1816100"/>
+            <a:ext cx="127000" cy="127000"/>
+          </a:xfrm>
+          <a:prstGeom prst="ellipse">
+            <a:avLst/>
+          </a:prstGeom>
+          <a:solidFill>
+            <a:srgbClr val="A47556"/>
+          </a:solidFill>
+          <a:ln w="19050">
+            <a:solidFill>
+              <a:srgbClr val="1A1A1E"/>
+            </a:solidFill>
+          </a:ln>
+        </p:spPr>
+        <p:txBody>
+          <a:bodyPr/>
+          <a:lstStyle/>
+          <a:p>
+            <a:endParaRPr lang="es-ES"/>
+          </a:p>
+        </p:txBody>
+      </p:sp>
+      <p:sp>
+        <p:nvSpPr>
+          <p:cNvPr id="64" name="Dot4"/>
+          <p:cNvSpPr/>
+          <p:nvPr/>
+        </p:nvSpPr>
+        <p:spPr>
+          <a:xfrm>
+            <a:off x="8715375" y="1816100"/>
+            <a:ext cx="127000" cy="127000"/>
+          </a:xfrm>
+          <a:prstGeom prst="ellipse">
+            <a:avLst/>
+          </a:prstGeom>
+          <a:solidFill>
+            <a:srgbClr val="94654C"/>
+          </a:solidFill>
+          <a:ln w="19050">
+            <a:solidFill>
+              <a:srgbClr val="1A1A1E"/>
+            </a:solidFill>
+          </a:ln>
+        </p:spPr>
+        <p:txBody>
+          <a:bodyPr/>
+          <a:lstStyle/>
+          <a:p>
+            <a:endParaRPr lang="es-ES"/>
+          </a:p>
+        </p:txBody>
+      </p:sp>
+      <p:sp>
+        <p:nvSpPr>
+          <p:cNvPr id="65" name="Dot5"/>
+          <p:cNvSpPr/>
+          <p:nvPr/>
+        </p:nvSpPr>
+        <p:spPr>
+          <a:xfrm>
+            <a:off x="10482792" y="1816100"/>
+            <a:ext cx="127000" cy="127000"/>
+          </a:xfrm>
+          <a:prstGeom prst="ellipse">
+            <a:avLst/>
+          </a:prstGeom>
+          <a:solidFill>
+            <a:srgbClr val="845542"/>
+          </a:solidFill>
+          <a:ln w="19050">
+            <a:solidFill>
+              <a:srgbClr val="1A1A1E"/>
+            </a:solidFill>
+          </a:ln>
+        </p:spPr>
+        <p:txBody>
+          <a:bodyPr/>
+          <a:lstStyle/>
+          <a:p>
+            <a:endParaRPr lang="es-ES"/>
+          </a:p>
+        </p:txBody>
+      </p:sp>
+      <p:sp>
+        <p:nvSpPr>
+          <p:cNvPr id="70" name="Card0"/>
+          <p:cNvSpPr/>
+          <p:nvPr/>
+        </p:nvSpPr>
+        <p:spPr>
+          <a:xfrm>
+            <a:off x="889000" y="2159000"/>
+            <a:ext cx="1638300" cy="2222500"/>
+          </a:xfrm>
+          <a:prstGeom prst="roundRect">
+            <a:avLst>
+              <a:gd name="adj" fmla="val 8000"/>
+            </a:avLst>
+          </a:prstGeom>
+          <a:solidFill>
+            <a:srgbClr val="252529"/>
+          </a:solidFill>
+          <a:ln w="6350">
+            <a:solidFill>
+              <a:srgbClr val="D4A574">
+                <a:alpha val="40000"/>
+              </a:srgbClr>
+            </a:solidFill>
+          </a:ln>
+        </p:spPr>
+        <p:txBody>
+          <a:bodyPr/>
+          <a:lstStyle/>
+          <a:p>
+            <a:endParaRPr lang="es-ES"/>
+          </a:p>
+        </p:txBody>
+      </p:sp>
+      <p:sp>
+        <p:nvSpPr>
+          <p:cNvPr id="71" name="Day0"/>
+          <p:cNvSpPr/>
+          <p:nvPr/>
+        </p:nvSpPr>
+        <p:spPr>
+          <a:xfrm>
+            <a:off x="1016000" y="2311400"/>
+            <a:ext cx="1384300" cy="279400"/>
+          </a:xfrm>
+          <a:prstGeom prst="rect">
+            <a:avLst/>
+          </a:prstGeom>
+          <a:noFill/>
+          <a:ln>
+            <a:noFill/>
+          </a:ln>
+        </p:spPr>
+        <p:txBody>
+          <a:bodyPr wrap="square" lIns="0" tIns="0" rIns="0" bIns="0" anchor="t"/>
+          <a:lstStyle/>
+          <a:p>
+            <a:pPr marL="0" indent="0">
+              <a:buNone/>
+            </a:pPr>
+            <a:r>
+              <a:rPr lang="es-ES" sz="1100" b="1" dirty="0">
                 <a:solidFill>
                   <a:srgbClr val="D4A574"/>
                 </a:solidFill>
                 <a:latin typeface="Calibri" pitchFamily="34" charset="0"/>
-                <a:ea typeface="Calibri" pitchFamily="34" charset="-122"/>
-                <a:cs typeface="Calibri" pitchFamily="34" charset="-120"/>
-              </a:rPr>
-              <a:t>01</a:t>
-            </a:r>
-            <a:endParaRPr lang="en-US" sz="2200" dirty="0"/>
-          </a:p>
-        </p:txBody>
-      </p:sp>
-      <p:sp>
-        <p:nvSpPr>
-          <p:cNvPr id="7" name="Text 5"/>
-          <p:cNvSpPr/>
-          <p:nvPr/>
-        </p:nvSpPr>
-        <p:spPr>
-          <a:xfrm>
-            <a:off x="1005840" y="2788920"/>
-            <a:ext cx="1828800" cy="777240"/>
-          </a:xfrm>
-          <a:prstGeom prst="rect">
-            <a:avLst/>
-          </a:prstGeom>
-          <a:noFill/>
-          <a:ln/>
-        </p:spPr>
-        <p:txBody>
-          <a:bodyPr wrap="square" lIns="0" tIns="0" rIns="0" bIns="0" rtlCol="0" anchor="ctr"/>
-          <a:lstStyle/>
-          <a:p>
-            <a:pPr indent="0" marL="0">
-              <a:buNone/>
-            </a:pPr>
-            <a:r>
-              <a:rPr lang="en-US" sz="1300" b="1" dirty="0">
+              </a:rPr>
+              <a:t>Día 1-2</a:t>
+            </a:r>
+          </a:p>
+        </p:txBody>
+      </p:sp>
+      <p:sp>
+        <p:nvSpPr>
+          <p:cNvPr id="72" name="Line0"/>
+          <p:cNvSpPr/>
+          <p:nvPr/>
+        </p:nvSpPr>
+        <p:spPr>
+          <a:xfrm>
+            <a:off x="1016000" y="2641600"/>
+            <a:ext cx="381000" cy="25400"/>
+          </a:xfrm>
+          <a:prstGeom prst="rect">
+            <a:avLst/>
+          </a:prstGeom>
+          <a:solidFill>
+            <a:srgbClr val="D4A574"/>
+          </a:solidFill>
+          <a:ln>
+            <a:noFill/>
+          </a:ln>
+        </p:spPr>
+        <p:txBody>
+          <a:bodyPr/>
+          <a:lstStyle/>
+          <a:p>
+            <a:endParaRPr lang="es-ES"/>
+          </a:p>
+        </p:txBody>
+      </p:sp>
+      <p:sp>
+        <p:nvSpPr>
+          <p:cNvPr id="73" name="PTitle0"/>
+          <p:cNvSpPr/>
+          <p:nvPr/>
+        </p:nvSpPr>
+        <p:spPr>
+          <a:xfrm>
+            <a:off x="1016000" y="2743200"/>
+            <a:ext cx="1384300" cy="508000"/>
+          </a:xfrm>
+          <a:prstGeom prst="rect">
+            <a:avLst/>
+          </a:prstGeom>
+          <a:noFill/>
+          <a:ln>
+            <a:noFill/>
+          </a:ln>
+        </p:spPr>
+        <p:txBody>
+          <a:bodyPr wrap="square" lIns="0" tIns="0" rIns="0" bIns="0" anchor="t"/>
+          <a:lstStyle/>
+          <a:p>
+            <a:pPr marL="0" indent="0">
+              <a:buNone/>
+            </a:pPr>
+            <a:r>
+              <a:rPr lang="es-ES" sz="1400" b="1" dirty="0">
                 <a:solidFill>
                   <a:srgbClr val="FFFFFF"/>
                 </a:solidFill>
                 <a:latin typeface="Calibri" pitchFamily="34" charset="0"/>
-                <a:ea typeface="Calibri" pitchFamily="34" charset="-122"/>
-                <a:cs typeface="Calibri" pitchFamily="34" charset="-120"/>
-              </a:rPr>
-              <a:t>Pasarela de pagos en línea</a:t>
-            </a:r>
-            <a:endParaRPr lang="en-US" sz="1300" dirty="0"/>
-          </a:p>
-        </p:txBody>
-      </p:sp>
-      <p:sp>
-        <p:nvSpPr>
-          <p:cNvPr id="8" name="Text 6"/>
-          <p:cNvSpPr/>
-          <p:nvPr/>
-        </p:nvSpPr>
-        <p:spPr>
-          <a:xfrm>
-            <a:off x="1005840" y="3611880"/>
-            <a:ext cx="1828800" cy="868680"/>
-          </a:xfrm>
-          <a:prstGeom prst="rect">
-            <a:avLst/>
-          </a:prstGeom>
-          <a:noFill/>
-          <a:ln/>
-        </p:spPr>
-        <p:txBody>
-          <a:bodyPr wrap="square" lIns="0" tIns="0" rIns="0" bIns="0" rtlCol="0" anchor="ctr"/>
-          <a:lstStyle/>
-          <a:p>
-            <a:pPr indent="0" marL="0">
-              <a:buNone/>
-            </a:pPr>
-            <a:r>
-              <a:rPr lang="en-US" sz="1000" dirty="0">
+              </a:rPr>
+              <a:t>Setup &amp; Catálogo</a:t>
+            </a:r>
+          </a:p>
+        </p:txBody>
+      </p:sp>
+      <p:sp>
+        <p:nvSpPr>
+          <p:cNvPr id="74" name="Desc0"/>
+          <p:cNvSpPr/>
+          <p:nvPr/>
+        </p:nvSpPr>
+        <p:spPr>
+          <a:xfrm>
+            <a:off x="1016000" y="3302000"/>
+            <a:ext cx="1384300" cy="1016000"/>
+          </a:xfrm>
+          <a:prstGeom prst="rect">
+            <a:avLst/>
+          </a:prstGeom>
+          <a:noFill/>
+          <a:ln>
+            <a:noFill/>
+          </a:ln>
+        </p:spPr>
+        <p:txBody>
+          <a:bodyPr wrap="square" lIns="0" tIns="0" rIns="0" bIns="0" anchor="t"/>
+          <a:lstStyle/>
+          <a:p>
+            <a:pPr marL="0" indent="0">
+              <a:buNone/>
+            </a:pPr>
+            <a:r>
+              <a:rPr lang="es-ES" sz="1000" dirty="0">
                 <a:solidFill>
                   <a:srgbClr val="D1D5DB"/>
                 </a:solidFill>
                 <a:latin typeface="Calibri" pitchFamily="34" charset="0"/>
-                <a:ea typeface="Calibri" pitchFamily="34" charset="-122"/>
-                <a:cs typeface="Calibri" pitchFamily="34" charset="-120"/>
-              </a:rPr>
-              <a:t>Recurrente, NeoNet o Stripe.</a:t>
-            </a:r>
-            <a:endParaRPr lang="en-US" sz="1000" dirty="0"/>
-          </a:p>
-        </p:txBody>
-      </p:sp>
-      <p:sp>
-        <p:nvSpPr>
-          <p:cNvPr id="9" name="Shape 7"/>
-          <p:cNvSpPr/>
-          <p:nvPr/>
-        </p:nvSpPr>
-        <p:spPr>
-          <a:xfrm>
-            <a:off x="3035808" y="2194560"/>
-            <a:ext cx="2103120" cy="2377440"/>
-          </a:xfrm>
-          <a:prstGeom prst="rect">
-            <a:avLst/>
+              </a:rPr>
+              <a:t>Estructura del proyecto, base de datos, catálogo de productos con fotos y precios.</a:t>
+            </a:r>
+          </a:p>
+        </p:txBody>
+      </p:sp>
+      <p:sp>
+        <p:nvSpPr>
+          <p:cNvPr id="80" name="Card1"/>
+          <p:cNvSpPr/>
+          <p:nvPr/>
+        </p:nvSpPr>
+        <p:spPr>
+          <a:xfrm>
+            <a:off x="2656417" y="2159000"/>
+            <a:ext cx="1638300" cy="2222500"/>
+          </a:xfrm>
+          <a:prstGeom prst="roundRect">
+            <a:avLst>
+              <a:gd name="adj" fmla="val 8000"/>
+            </a:avLst>
           </a:prstGeom>
           <a:solidFill>
-            <a:srgbClr val="374151"/>
+            <a:srgbClr val="252529"/>
           </a:solidFill>
-          <a:ln w="12700">
+          <a:ln w="6350">
             <a:solidFill>
-              <a:srgbClr val="4B5563"/>
+              <a:srgbClr val="C4956A">
+                <a:alpha val="40000"/>
+              </a:srgbClr>
             </a:solidFill>
-            <a:prstDash val="solid"/>
           </a:ln>
         </p:spPr>
-      </p:sp>
-      <p:sp>
-        <p:nvSpPr>
-          <p:cNvPr id="10" name="Text 8"/>
-          <p:cNvSpPr/>
-          <p:nvPr/>
-        </p:nvSpPr>
-        <p:spPr>
-          <a:xfrm>
-            <a:off x="3218688" y="2331720"/>
-            <a:ext cx="1828800" cy="457200"/>
-          </a:xfrm>
-          <a:prstGeom prst="rect">
-            <a:avLst/>
-          </a:prstGeom>
-          <a:noFill/>
-          <a:ln/>
-        </p:spPr>
-        <p:txBody>
-          <a:bodyPr wrap="square" lIns="0" tIns="0" rIns="0" bIns="0" rtlCol="0" anchor="ctr"/>
-          <a:lstStyle/>
-          <a:p>
-            <a:pPr indent="0" marL="0">
-              <a:buNone/>
-            </a:pPr>
-            <a:r>
-              <a:rPr lang="en-US" sz="2200" b="1" dirty="0">
+        <p:txBody>
+          <a:bodyPr/>
+          <a:lstStyle/>
+          <a:p>
+            <a:endParaRPr lang="es-ES"/>
+          </a:p>
+        </p:txBody>
+      </p:sp>
+      <p:sp>
+        <p:nvSpPr>
+          <p:cNvPr id="81" name="Day1"/>
+          <p:cNvSpPr/>
+          <p:nvPr/>
+        </p:nvSpPr>
+        <p:spPr>
+          <a:xfrm>
+            <a:off x="2783417" y="2311400"/>
+            <a:ext cx="1384300" cy="279400"/>
+          </a:xfrm>
+          <a:prstGeom prst="rect">
+            <a:avLst/>
+          </a:prstGeom>
+          <a:noFill/>
+          <a:ln>
+            <a:noFill/>
+          </a:ln>
+        </p:spPr>
+        <p:txBody>
+          <a:bodyPr wrap="square" lIns="0" tIns="0" rIns="0" bIns="0" anchor="t"/>
+          <a:lstStyle/>
+          <a:p>
+            <a:pPr marL="0" indent="0">
+              <a:buNone/>
+            </a:pPr>
+            <a:r>
+              <a:rPr lang="es-ES" sz="1100" b="1" dirty="0">
+                <a:solidFill>
+                  <a:srgbClr val="C4956A"/>
+                </a:solidFill>
+                <a:latin typeface="Calibri" pitchFamily="34" charset="0"/>
+              </a:rPr>
+              <a:t>Día 3-4</a:t>
+            </a:r>
+          </a:p>
+        </p:txBody>
+      </p:sp>
+      <p:sp>
+        <p:nvSpPr>
+          <p:cNvPr id="82" name="Line1"/>
+          <p:cNvSpPr/>
+          <p:nvPr/>
+        </p:nvSpPr>
+        <p:spPr>
+          <a:xfrm>
+            <a:off x="2783417" y="2641600"/>
+            <a:ext cx="381000" cy="25400"/>
+          </a:xfrm>
+          <a:prstGeom prst="rect">
+            <a:avLst/>
+          </a:prstGeom>
+          <a:solidFill>
+            <a:srgbClr val="C4956A"/>
+          </a:solidFill>
+          <a:ln>
+            <a:noFill/>
+          </a:ln>
+        </p:spPr>
+        <p:txBody>
+          <a:bodyPr/>
+          <a:lstStyle/>
+          <a:p>
+            <a:endParaRPr lang="es-ES"/>
+          </a:p>
+        </p:txBody>
+      </p:sp>
+      <p:sp>
+        <p:nvSpPr>
+          <p:cNvPr id="83" name="PTitle1"/>
+          <p:cNvSpPr/>
+          <p:nvPr/>
+        </p:nvSpPr>
+        <p:spPr>
+          <a:xfrm>
+            <a:off x="2783417" y="2743200"/>
+            <a:ext cx="1384300" cy="508000"/>
+          </a:xfrm>
+          <a:prstGeom prst="rect">
+            <a:avLst/>
+          </a:prstGeom>
+          <a:noFill/>
+          <a:ln>
+            <a:noFill/>
+          </a:ln>
+        </p:spPr>
+        <p:txBody>
+          <a:bodyPr wrap="square" lIns="0" tIns="0" rIns="0" bIns="0" anchor="t"/>
+          <a:lstStyle/>
+          <a:p>
+            <a:pPr marL="0" indent="0">
+              <a:buNone/>
+            </a:pPr>
+            <a:r>
+              <a:rPr lang="es-ES" sz="1400" b="1" dirty="0">
+                <a:solidFill>
+                  <a:srgbClr val="FFFFFF"/>
+                </a:solidFill>
+                <a:latin typeface="Calibri" pitchFamily="34" charset="0"/>
+              </a:rPr>
+              <a:t>Carrito &amp; Checkout</a:t>
+            </a:r>
+          </a:p>
+        </p:txBody>
+      </p:sp>
+      <p:sp>
+        <p:nvSpPr>
+          <p:cNvPr id="84" name="Desc1"/>
+          <p:cNvSpPr/>
+          <p:nvPr/>
+        </p:nvSpPr>
+        <p:spPr>
+          <a:xfrm>
+            <a:off x="2783417" y="3302000"/>
+            <a:ext cx="1384300" cy="1016000"/>
+          </a:xfrm>
+          <a:prstGeom prst="rect">
+            <a:avLst/>
+          </a:prstGeom>
+          <a:noFill/>
+          <a:ln>
+            <a:noFill/>
+          </a:ln>
+        </p:spPr>
+        <p:txBody>
+          <a:bodyPr wrap="square" lIns="0" tIns="0" rIns="0" bIns="0" anchor="t"/>
+          <a:lstStyle/>
+          <a:p>
+            <a:pPr marL="0" indent="0">
+              <a:buNone/>
+            </a:pPr>
+            <a:r>
+              <a:rPr lang="es-ES" sz="1000" dirty="0">
+                <a:solidFill>
+                  <a:srgbClr val="D1D5DB"/>
+                </a:solidFill>
+                <a:latin typeface="Calibri" pitchFamily="34" charset="0"/>
+              </a:rPr>
+              <a:t>Carrito de compras, formulario de pedido, cálculo de totales automático.</a:t>
+            </a:r>
+          </a:p>
+        </p:txBody>
+      </p:sp>
+      <p:sp>
+        <p:nvSpPr>
+          <p:cNvPr id="90" name="Card2"/>
+          <p:cNvSpPr/>
+          <p:nvPr/>
+        </p:nvSpPr>
+        <p:spPr>
+          <a:xfrm>
+            <a:off x="4423833" y="2159000"/>
+            <a:ext cx="1638300" cy="2222500"/>
+          </a:xfrm>
+          <a:prstGeom prst="roundRect">
+            <a:avLst>
+              <a:gd name="adj" fmla="val 8000"/>
+            </a:avLst>
+          </a:prstGeom>
+          <a:solidFill>
+            <a:srgbClr val="252529"/>
+          </a:solidFill>
+          <a:ln w="6350">
+            <a:solidFill>
+              <a:srgbClr val="B48560">
+                <a:alpha val="40000"/>
+              </a:srgbClr>
+            </a:solidFill>
+          </a:ln>
+        </p:spPr>
+        <p:txBody>
+          <a:bodyPr/>
+          <a:lstStyle/>
+          <a:p>
+            <a:endParaRPr lang="es-ES"/>
+          </a:p>
+        </p:txBody>
+      </p:sp>
+      <p:sp>
+        <p:nvSpPr>
+          <p:cNvPr id="91" name="Day2"/>
+          <p:cNvSpPr/>
+          <p:nvPr/>
+        </p:nvSpPr>
+        <p:spPr>
+          <a:xfrm>
+            <a:off x="4550833" y="2311400"/>
+            <a:ext cx="1384300" cy="279400"/>
+          </a:xfrm>
+          <a:prstGeom prst="rect">
+            <a:avLst/>
+          </a:prstGeom>
+          <a:noFill/>
+          <a:ln>
+            <a:noFill/>
+          </a:ln>
+        </p:spPr>
+        <p:txBody>
+          <a:bodyPr wrap="square" lIns="0" tIns="0" rIns="0" bIns="0" anchor="t"/>
+          <a:lstStyle/>
+          <a:p>
+            <a:pPr marL="0" indent="0">
+              <a:buNone/>
+            </a:pPr>
+            <a:r>
+              <a:rPr lang="es-ES" sz="1100" b="1" dirty="0">
+                <a:solidFill>
+                  <a:srgbClr val="B48560"/>
+                </a:solidFill>
+                <a:latin typeface="Calibri" pitchFamily="34" charset="0"/>
+              </a:rPr>
+              <a:t>Día 5-6</a:t>
+            </a:r>
+          </a:p>
+        </p:txBody>
+      </p:sp>
+      <p:sp>
+        <p:nvSpPr>
+          <p:cNvPr id="92" name="Line2"/>
+          <p:cNvSpPr/>
+          <p:nvPr/>
+        </p:nvSpPr>
+        <p:spPr>
+          <a:xfrm>
+            <a:off x="4550833" y="2641600"/>
+            <a:ext cx="381000" cy="25400"/>
+          </a:xfrm>
+          <a:prstGeom prst="rect">
+            <a:avLst/>
+          </a:prstGeom>
+          <a:solidFill>
+            <a:srgbClr val="B48560"/>
+          </a:solidFill>
+          <a:ln>
+            <a:noFill/>
+          </a:ln>
+        </p:spPr>
+        <p:txBody>
+          <a:bodyPr/>
+          <a:lstStyle/>
+          <a:p>
+            <a:endParaRPr lang="es-ES"/>
+          </a:p>
+        </p:txBody>
+      </p:sp>
+      <p:sp>
+        <p:nvSpPr>
+          <p:cNvPr id="93" name="PTitle2"/>
+          <p:cNvSpPr/>
+          <p:nvPr/>
+        </p:nvSpPr>
+        <p:spPr>
+          <a:xfrm>
+            <a:off x="4550833" y="2743200"/>
+            <a:ext cx="1384300" cy="508000"/>
+          </a:xfrm>
+          <a:prstGeom prst="rect">
+            <a:avLst/>
+          </a:prstGeom>
+          <a:noFill/>
+          <a:ln>
+            <a:noFill/>
+          </a:ln>
+        </p:spPr>
+        <p:txBody>
+          <a:bodyPr wrap="square" lIns="0" tIns="0" rIns="0" bIns="0" anchor="t"/>
+          <a:lstStyle/>
+          <a:p>
+            <a:pPr marL="0" indent="0">
+              <a:buNone/>
+            </a:pPr>
+            <a:r>
+              <a:rPr lang="es-ES" sz="1400" b="1" dirty="0">
+                <a:solidFill>
+                  <a:srgbClr val="FFFFFF"/>
+                </a:solidFill>
+                <a:latin typeface="Calibri" pitchFamily="34" charset="0"/>
+              </a:rPr>
+              <a:t>Pagos &amp; Factura</a:t>
+            </a:r>
+          </a:p>
+        </p:txBody>
+      </p:sp>
+      <p:sp>
+        <p:nvSpPr>
+          <p:cNvPr id="94" name="Desc2"/>
+          <p:cNvSpPr/>
+          <p:nvPr/>
+        </p:nvSpPr>
+        <p:spPr>
+          <a:xfrm>
+            <a:off x="4550833" y="3302000"/>
+            <a:ext cx="1384300" cy="1016000"/>
+          </a:xfrm>
+          <a:prstGeom prst="rect">
+            <a:avLst/>
+          </a:prstGeom>
+          <a:noFill/>
+          <a:ln>
+            <a:noFill/>
+          </a:ln>
+        </p:spPr>
+        <p:txBody>
+          <a:bodyPr wrap="square" lIns="0" tIns="0" rIns="0" bIns="0" anchor="t"/>
+          <a:lstStyle/>
+          <a:p>
+            <a:pPr marL="0" indent="0">
+              <a:buNone/>
+            </a:pPr>
+            <a:r>
+              <a:rPr lang="es-ES" sz="1000" dirty="0">
+                <a:solidFill>
+                  <a:srgbClr val="D1D5DB"/>
+                </a:solidFill>
+                <a:latin typeface="Calibri" pitchFamily="34" charset="0"/>
+              </a:rPr>
+              <a:t>Integración pasarela de pagos, generación de factura PDF, confirmación por email.</a:t>
+            </a:r>
+          </a:p>
+        </p:txBody>
+      </p:sp>
+      <p:sp>
+        <p:nvSpPr>
+          <p:cNvPr id="100" name="Card3"/>
+          <p:cNvSpPr/>
+          <p:nvPr/>
+        </p:nvSpPr>
+        <p:spPr>
+          <a:xfrm>
+            <a:off x="6191250" y="2159000"/>
+            <a:ext cx="1638300" cy="2222500"/>
+          </a:xfrm>
+          <a:prstGeom prst="roundRect">
+            <a:avLst>
+              <a:gd name="adj" fmla="val 8000"/>
+            </a:avLst>
+          </a:prstGeom>
+          <a:solidFill>
+            <a:srgbClr val="252529"/>
+          </a:solidFill>
+          <a:ln w="6350">
+            <a:solidFill>
+              <a:srgbClr val="A47556">
+                <a:alpha val="40000"/>
+              </a:srgbClr>
+            </a:solidFill>
+          </a:ln>
+        </p:spPr>
+        <p:txBody>
+          <a:bodyPr/>
+          <a:lstStyle/>
+          <a:p>
+            <a:endParaRPr lang="es-ES"/>
+          </a:p>
+        </p:txBody>
+      </p:sp>
+      <p:sp>
+        <p:nvSpPr>
+          <p:cNvPr id="101" name="Day3"/>
+          <p:cNvSpPr/>
+          <p:nvPr/>
+        </p:nvSpPr>
+        <p:spPr>
+          <a:xfrm>
+            <a:off x="6318250" y="2311400"/>
+            <a:ext cx="1384300" cy="279400"/>
+          </a:xfrm>
+          <a:prstGeom prst="rect">
+            <a:avLst/>
+          </a:prstGeom>
+          <a:noFill/>
+          <a:ln>
+            <a:noFill/>
+          </a:ln>
+        </p:spPr>
+        <p:txBody>
+          <a:bodyPr wrap="square" lIns="0" tIns="0" rIns="0" bIns="0" anchor="t"/>
+          <a:lstStyle/>
+          <a:p>
+            <a:pPr marL="0" indent="0">
+              <a:buNone/>
+            </a:pPr>
+            <a:r>
+              <a:rPr lang="es-ES" sz="1100" b="1" dirty="0">
+                <a:solidFill>
+                  <a:srgbClr val="A47556"/>
+                </a:solidFill>
+                <a:latin typeface="Calibri" pitchFamily="34" charset="0"/>
+              </a:rPr>
+              <a:t>Día 7-8</a:t>
+            </a:r>
+          </a:p>
+        </p:txBody>
+      </p:sp>
+      <p:sp>
+        <p:nvSpPr>
+          <p:cNvPr id="102" name="Line3"/>
+          <p:cNvSpPr/>
+          <p:nvPr/>
+        </p:nvSpPr>
+        <p:spPr>
+          <a:xfrm>
+            <a:off x="6318250" y="2641600"/>
+            <a:ext cx="381000" cy="25400"/>
+          </a:xfrm>
+          <a:prstGeom prst="rect">
+            <a:avLst/>
+          </a:prstGeom>
+          <a:solidFill>
+            <a:srgbClr val="A47556"/>
+          </a:solidFill>
+          <a:ln>
+            <a:noFill/>
+          </a:ln>
+        </p:spPr>
+        <p:txBody>
+          <a:bodyPr/>
+          <a:lstStyle/>
+          <a:p>
+            <a:endParaRPr lang="es-ES"/>
+          </a:p>
+        </p:txBody>
+      </p:sp>
+      <p:sp>
+        <p:nvSpPr>
+          <p:cNvPr id="103" name="PTitle3"/>
+          <p:cNvSpPr/>
+          <p:nvPr/>
+        </p:nvSpPr>
+        <p:spPr>
+          <a:xfrm>
+            <a:off x="6318250" y="2743200"/>
+            <a:ext cx="1384300" cy="508000"/>
+          </a:xfrm>
+          <a:prstGeom prst="rect">
+            <a:avLst/>
+          </a:prstGeom>
+          <a:noFill/>
+          <a:ln>
+            <a:noFill/>
+          </a:ln>
+        </p:spPr>
+        <p:txBody>
+          <a:bodyPr wrap="square" lIns="0" tIns="0" rIns="0" bIns="0" anchor="t"/>
+          <a:lstStyle/>
+          <a:p>
+            <a:pPr marL="0" indent="0">
+              <a:buNone/>
+            </a:pPr>
+            <a:r>
+              <a:rPr lang="es-ES" sz="1400" b="1" dirty="0">
+                <a:solidFill>
+                  <a:srgbClr val="FFFFFF"/>
+                </a:solidFill>
+                <a:latin typeface="Calibri" pitchFamily="34" charset="0"/>
+              </a:rPr>
+              <a:t>Panel Admin</a:t>
+            </a:r>
+          </a:p>
+        </p:txBody>
+      </p:sp>
+      <p:sp>
+        <p:nvSpPr>
+          <p:cNvPr id="104" name="Desc3"/>
+          <p:cNvSpPr/>
+          <p:nvPr/>
+        </p:nvSpPr>
+        <p:spPr>
+          <a:xfrm>
+            <a:off x="6318250" y="3302000"/>
+            <a:ext cx="1384300" cy="1016000"/>
+          </a:xfrm>
+          <a:prstGeom prst="rect">
+            <a:avLst/>
+          </a:prstGeom>
+          <a:noFill/>
+          <a:ln>
+            <a:noFill/>
+          </a:ln>
+        </p:spPr>
+        <p:txBody>
+          <a:bodyPr wrap="square" lIns="0" tIns="0" rIns="0" bIns="0" anchor="t"/>
+          <a:lstStyle/>
+          <a:p>
+            <a:pPr marL="0" indent="0">
+              <a:buNone/>
+            </a:pPr>
+            <a:r>
+              <a:rPr lang="es-ES" sz="1000" dirty="0">
+                <a:solidFill>
+                  <a:srgbClr val="D1D5DB"/>
+                </a:solidFill>
+                <a:latin typeface="Calibri" pitchFamily="34" charset="0"/>
+              </a:rPr>
+              <a:t>Dashboard de pedidos, gestión de inventario en vivo, control de stock.</a:t>
+            </a:r>
+          </a:p>
+        </p:txBody>
+      </p:sp>
+      <p:sp>
+        <p:nvSpPr>
+          <p:cNvPr id="110" name="Card4"/>
+          <p:cNvSpPr/>
+          <p:nvPr/>
+        </p:nvSpPr>
+        <p:spPr>
+          <a:xfrm>
+            <a:off x="7958667" y="2159000"/>
+            <a:ext cx="1638300" cy="2222500"/>
+          </a:xfrm>
+          <a:prstGeom prst="roundRect">
+            <a:avLst>
+              <a:gd name="adj" fmla="val 8000"/>
+            </a:avLst>
+          </a:prstGeom>
+          <a:solidFill>
+            <a:srgbClr val="252529"/>
+          </a:solidFill>
+          <a:ln w="6350">
+            <a:solidFill>
+              <a:srgbClr val="94654C">
+                <a:alpha val="40000"/>
+              </a:srgbClr>
+            </a:solidFill>
+          </a:ln>
+        </p:spPr>
+        <p:txBody>
+          <a:bodyPr/>
+          <a:lstStyle/>
+          <a:p>
+            <a:endParaRPr lang="es-ES"/>
+          </a:p>
+        </p:txBody>
+      </p:sp>
+      <p:sp>
+        <p:nvSpPr>
+          <p:cNvPr id="111" name="Day4"/>
+          <p:cNvSpPr/>
+          <p:nvPr/>
+        </p:nvSpPr>
+        <p:spPr>
+          <a:xfrm>
+            <a:off x="8085667" y="2311400"/>
+            <a:ext cx="1384300" cy="279400"/>
+          </a:xfrm>
+          <a:prstGeom prst="rect">
+            <a:avLst/>
+          </a:prstGeom>
+          <a:noFill/>
+          <a:ln>
+            <a:noFill/>
+          </a:ln>
+        </p:spPr>
+        <p:txBody>
+          <a:bodyPr wrap="square" lIns="0" tIns="0" rIns="0" bIns="0" anchor="t"/>
+          <a:lstStyle/>
+          <a:p>
+            <a:pPr marL="0" indent="0">
+              <a:buNone/>
+            </a:pPr>
+            <a:r>
+              <a:rPr lang="es-ES" sz="1100" b="1" dirty="0">
+                <a:solidFill>
+                  <a:srgbClr val="94654C"/>
+                </a:solidFill>
+                <a:latin typeface="Calibri" pitchFamily="34" charset="0"/>
+              </a:rPr>
+              <a:t>Día 9-10</a:t>
+            </a:r>
+          </a:p>
+        </p:txBody>
+      </p:sp>
+      <p:sp>
+        <p:nvSpPr>
+          <p:cNvPr id="112" name="Line4"/>
+          <p:cNvSpPr/>
+          <p:nvPr/>
+        </p:nvSpPr>
+        <p:spPr>
+          <a:xfrm>
+            <a:off x="8085667" y="2641600"/>
+            <a:ext cx="381000" cy="25400"/>
+          </a:xfrm>
+          <a:prstGeom prst="rect">
+            <a:avLst/>
+          </a:prstGeom>
+          <a:solidFill>
+            <a:srgbClr val="94654C"/>
+          </a:solidFill>
+          <a:ln>
+            <a:noFill/>
+          </a:ln>
+        </p:spPr>
+        <p:txBody>
+          <a:bodyPr/>
+          <a:lstStyle/>
+          <a:p>
+            <a:endParaRPr lang="es-ES"/>
+          </a:p>
+        </p:txBody>
+      </p:sp>
+      <p:sp>
+        <p:nvSpPr>
+          <p:cNvPr id="113" name="PTitle4"/>
+          <p:cNvSpPr/>
+          <p:nvPr/>
+        </p:nvSpPr>
+        <p:spPr>
+          <a:xfrm>
+            <a:off x="8085667" y="2743200"/>
+            <a:ext cx="1384300" cy="508000"/>
+          </a:xfrm>
+          <a:prstGeom prst="rect">
+            <a:avLst/>
+          </a:prstGeom>
+          <a:noFill/>
+          <a:ln>
+            <a:noFill/>
+          </a:ln>
+        </p:spPr>
+        <p:txBody>
+          <a:bodyPr wrap="square" lIns="0" tIns="0" rIns="0" bIns="0" anchor="t"/>
+          <a:lstStyle/>
+          <a:p>
+            <a:pPr marL="0" indent="0">
+              <a:buNone/>
+            </a:pPr>
+            <a:r>
+              <a:rPr lang="es-ES" sz="1400" b="1" dirty="0">
+                <a:solidFill>
+                  <a:srgbClr val="FFFFFF"/>
+                </a:solidFill>
+                <a:latin typeface="Calibri" pitchFamily="34" charset="0"/>
+              </a:rPr>
+              <a:t>Login &amp; Fidelidad</a:t>
+            </a:r>
+          </a:p>
+        </p:txBody>
+      </p:sp>
+      <p:sp>
+        <p:nvSpPr>
+          <p:cNvPr id="114" name="Desc4"/>
+          <p:cNvSpPr/>
+          <p:nvPr/>
+        </p:nvSpPr>
+        <p:spPr>
+          <a:xfrm>
+            <a:off x="8085667" y="3302000"/>
+            <a:ext cx="1384300" cy="1016000"/>
+          </a:xfrm>
+          <a:prstGeom prst="rect">
+            <a:avLst/>
+          </a:prstGeom>
+          <a:noFill/>
+          <a:ln>
+            <a:noFill/>
+          </a:ln>
+        </p:spPr>
+        <p:txBody>
+          <a:bodyPr wrap="square" lIns="0" tIns="0" rIns="0" bIns="0" anchor="t"/>
+          <a:lstStyle/>
+          <a:p>
+            <a:pPr marL="0" indent="0">
+              <a:buNone/>
+            </a:pPr>
+            <a:r>
+              <a:rPr lang="es-ES" sz="1000" dirty="0">
+                <a:solidFill>
+                  <a:srgbClr val="D1D5DB"/>
+                </a:solidFill>
+                <a:latin typeface="Calibri" pitchFamily="34" charset="0"/>
+              </a:rPr>
+              <a:t>Registro de clientes, historial de pedidos, programa de puntos y promociones.</a:t>
+            </a:r>
+          </a:p>
+        </p:txBody>
+      </p:sp>
+      <p:sp>
+        <p:nvSpPr>
+          <p:cNvPr id="120" name="Card5"/>
+          <p:cNvSpPr/>
+          <p:nvPr/>
+        </p:nvSpPr>
+        <p:spPr>
+          <a:xfrm>
+            <a:off x="9726083" y="2159000"/>
+            <a:ext cx="1638300" cy="2222500"/>
+          </a:xfrm>
+          <a:prstGeom prst="roundRect">
+            <a:avLst>
+              <a:gd name="adj" fmla="val 8000"/>
+            </a:avLst>
+          </a:prstGeom>
+          <a:solidFill>
+            <a:srgbClr val="252529"/>
+          </a:solidFill>
+          <a:ln w="6350">
+            <a:solidFill>
+              <a:srgbClr val="845542">
+                <a:alpha val="40000"/>
+              </a:srgbClr>
+            </a:solidFill>
+          </a:ln>
+        </p:spPr>
+        <p:txBody>
+          <a:bodyPr/>
+          <a:lstStyle/>
+          <a:p>
+            <a:endParaRPr lang="es-ES"/>
+          </a:p>
+        </p:txBody>
+      </p:sp>
+      <p:sp>
+        <p:nvSpPr>
+          <p:cNvPr id="121" name="Day5"/>
+          <p:cNvSpPr/>
+          <p:nvPr/>
+        </p:nvSpPr>
+        <p:spPr>
+          <a:xfrm>
+            <a:off x="9853083" y="2311400"/>
+            <a:ext cx="1384300" cy="279400"/>
+          </a:xfrm>
+          <a:prstGeom prst="rect">
+            <a:avLst/>
+          </a:prstGeom>
+          <a:noFill/>
+          <a:ln>
+            <a:noFill/>
+          </a:ln>
+        </p:spPr>
+        <p:txBody>
+          <a:bodyPr wrap="square" lIns="0" tIns="0" rIns="0" bIns="0" anchor="t"/>
+          <a:lstStyle/>
+          <a:p>
+            <a:pPr marL="0" indent="0">
+              <a:buNone/>
+            </a:pPr>
+            <a:r>
+              <a:rPr lang="es-ES" sz="1100" b="1" dirty="0">
+                <a:solidFill>
+                  <a:srgbClr val="845542"/>
+                </a:solidFill>
+                <a:latin typeface="Calibri" pitchFamily="34" charset="0"/>
+              </a:rPr>
+              <a:t>Día 11-12</a:t>
+            </a:r>
+          </a:p>
+        </p:txBody>
+      </p:sp>
+      <p:sp>
+        <p:nvSpPr>
+          <p:cNvPr id="122" name="Line5"/>
+          <p:cNvSpPr/>
+          <p:nvPr/>
+        </p:nvSpPr>
+        <p:spPr>
+          <a:xfrm>
+            <a:off x="9853083" y="2641600"/>
+            <a:ext cx="381000" cy="25400"/>
+          </a:xfrm>
+          <a:prstGeom prst="rect">
+            <a:avLst/>
+          </a:prstGeom>
+          <a:solidFill>
+            <a:srgbClr val="845542"/>
+          </a:solidFill>
+          <a:ln>
+            <a:noFill/>
+          </a:ln>
+        </p:spPr>
+        <p:txBody>
+          <a:bodyPr/>
+          <a:lstStyle/>
+          <a:p>
+            <a:endParaRPr lang="es-ES"/>
+          </a:p>
+        </p:txBody>
+      </p:sp>
+      <p:sp>
+        <p:nvSpPr>
+          <p:cNvPr id="123" name="PTitle5"/>
+          <p:cNvSpPr/>
+          <p:nvPr/>
+        </p:nvSpPr>
+        <p:spPr>
+          <a:xfrm>
+            <a:off x="9853083" y="2743200"/>
+            <a:ext cx="1384300" cy="508000"/>
+          </a:xfrm>
+          <a:prstGeom prst="rect">
+            <a:avLst/>
+          </a:prstGeom>
+          <a:noFill/>
+          <a:ln>
+            <a:noFill/>
+          </a:ln>
+        </p:spPr>
+        <p:txBody>
+          <a:bodyPr wrap="square" lIns="0" tIns="0" rIns="0" bIns="0" anchor="t"/>
+          <a:lstStyle/>
+          <a:p>
+            <a:pPr marL="0" indent="0">
+              <a:buNone/>
+            </a:pPr>
+            <a:r>
+              <a:rPr lang="es-ES" sz="1400" b="1" dirty="0">
+                <a:solidFill>
+                  <a:srgbClr val="FFFFFF"/>
+                </a:solidFill>
+                <a:latin typeface="Calibri" pitchFamily="34" charset="0"/>
+              </a:rPr>
+              <a:t>Deploy &amp; QA</a:t>
+            </a:r>
+          </a:p>
+        </p:txBody>
+      </p:sp>
+      <p:sp>
+        <p:nvSpPr>
+          <p:cNvPr id="124" name="Desc5"/>
+          <p:cNvSpPr/>
+          <p:nvPr/>
+        </p:nvSpPr>
+        <p:spPr>
+          <a:xfrm>
+            <a:off x="9853083" y="3302000"/>
+            <a:ext cx="1384300" cy="1016000"/>
+          </a:xfrm>
+          <a:prstGeom prst="rect">
+            <a:avLst/>
+          </a:prstGeom>
+          <a:noFill/>
+          <a:ln>
+            <a:noFill/>
+          </a:ln>
+        </p:spPr>
+        <p:txBody>
+          <a:bodyPr wrap="square" lIns="0" tIns="0" rIns="0" bIns="0" anchor="t"/>
+          <a:lstStyle/>
+          <a:p>
+            <a:pPr marL="0" indent="0">
+              <a:buNone/>
+            </a:pPr>
+            <a:r>
+              <a:rPr lang="es-ES" sz="1000" dirty="0">
+                <a:solidFill>
+                  <a:srgbClr val="D1D5DB"/>
+                </a:solidFill>
+                <a:latin typeface="Calibri" pitchFamily="34" charset="0"/>
+              </a:rPr>
+              <a:t>Dominio propio, SSL, pruebas finales, capacitación del equipo, lanzamiento.</a:t>
+            </a:r>
+          </a:p>
+        </p:txBody>
+      </p:sp>
+      <p:sp>
+        <p:nvSpPr>
+          <p:cNvPr id="140" name="Summary"/>
+          <p:cNvSpPr/>
+          <p:nvPr/>
+        </p:nvSpPr>
+        <p:spPr>
+          <a:xfrm>
+            <a:off x="825500" y="4699000"/>
+            <a:ext cx="10604500" cy="317500"/>
+          </a:xfrm>
+          <a:prstGeom prst="rect">
+            <a:avLst/>
+          </a:prstGeom>
+          <a:noFill/>
+          <a:ln>
+            <a:noFill/>
+          </a:ln>
+        </p:spPr>
+        <p:txBody>
+          <a:bodyPr wrap="square" lIns="0" tIns="0" rIns="0" bIns="0" anchor="t"/>
+          <a:lstStyle/>
+          <a:p>
+            <a:pPr marL="0" indent="0">
+              <a:buNone/>
+            </a:pPr>
+            <a:r>
+              <a:rPr lang="es-ES" sz="1400" b="1" dirty="0">
                 <a:solidFill>
                   <a:srgbClr val="D4A574"/>
                 </a:solidFill>
                 <a:latin typeface="Calibri" pitchFamily="34" charset="0"/>
-                <a:ea typeface="Calibri" pitchFamily="34" charset="-122"/>
-                <a:cs typeface="Calibri" pitchFamily="34" charset="-120"/>
-              </a:rPr>
-              <a:t>02</a:t>
-            </a:r>
-            <a:endParaRPr lang="en-US" sz="2200" dirty="0"/>
-          </a:p>
-        </p:txBody>
-      </p:sp>
-      <p:sp>
-        <p:nvSpPr>
-          <p:cNvPr id="11" name="Text 9"/>
-          <p:cNvSpPr/>
-          <p:nvPr/>
-        </p:nvSpPr>
-        <p:spPr>
-          <a:xfrm>
-            <a:off x="3218688" y="2788920"/>
-            <a:ext cx="1828800" cy="777240"/>
-          </a:xfrm>
-          <a:prstGeom prst="rect">
-            <a:avLst/>
-          </a:prstGeom>
-          <a:noFill/>
-          <a:ln/>
-        </p:spPr>
-        <p:txBody>
-          <a:bodyPr wrap="square" lIns="0" tIns="0" rIns="0" bIns="0" rtlCol="0" anchor="ctr"/>
-          <a:lstStyle/>
-          <a:p>
-            <a:pPr indent="0" marL="0">
-              <a:buNone/>
-            </a:pPr>
-            <a:r>
-              <a:rPr lang="en-US" sz="1300" b="1" dirty="0">
+              </a:rPr>
+              <a:t>Total: 12 días hábiles</a:t>
+            </a:r>
+            <a:r>
+              <a:rPr lang="es-ES" sz="1400" dirty="0">
+                <a:solidFill>
+                  <a:srgbClr val="9CA3AF"/>
+                </a:solidFill>
+                <a:latin typeface="Calibri" pitchFamily="34" charset="0"/>
+              </a:rPr>
+              <a:t>  —  Desarrollo acelerado con IA generativa (vibe coding)</a:t>
+            </a:r>
+          </a:p>
+        </p:txBody>
+      </p:sp>
+      <p:sp>
+        <p:nvSpPr>
+          <p:cNvPr id="141" name="Quote"/>
+          <p:cNvSpPr/>
+          <p:nvPr/>
+        </p:nvSpPr>
+        <p:spPr>
+          <a:xfrm>
+            <a:off x="825500" y="5207000"/>
+            <a:ext cx="10604500" cy="635000"/>
+          </a:xfrm>
+          <a:prstGeom prst="rect">
+            <a:avLst/>
+          </a:prstGeom>
+          <a:noFill/>
+          <a:ln>
+            <a:noFill/>
+          </a:ln>
+        </p:spPr>
+        <p:txBody>
+          <a:bodyPr wrap="square" lIns="0" tIns="0" rIns="0" bIns="0" anchor="t"/>
+          <a:lstStyle/>
+          <a:p>
+            <a:pPr marL="0" indent="0" algn="ctr">
+              <a:buNone/>
+            </a:pPr>
+            <a:r>
+              <a:rPr lang="es-ES" sz="1600" i="1" dirty="0">
                 <a:solidFill>
                   <a:srgbClr val="FFFFFF"/>
                 </a:solidFill>
                 <a:latin typeface="Calibri" pitchFamily="34" charset="0"/>
-                <a:ea typeface="Calibri" pitchFamily="34" charset="-122"/>
-                <a:cs typeface="Calibri" pitchFamily="34" charset="-120"/>
-              </a:rPr>
-              <a:t>Dominio propio</a:t>
-            </a:r>
-            <a:endParaRPr lang="en-US" sz="1300" dirty="0"/>
-          </a:p>
-        </p:txBody>
-      </p:sp>
-      <p:sp>
-        <p:nvSpPr>
-          <p:cNvPr id="12" name="Text 10"/>
-          <p:cNvSpPr/>
-          <p:nvPr/>
-        </p:nvSpPr>
-        <p:spPr>
-          <a:xfrm>
-            <a:off x="3218688" y="3611880"/>
-            <a:ext cx="1828800" cy="868680"/>
-          </a:xfrm>
-          <a:prstGeom prst="rect">
-            <a:avLst/>
-          </a:prstGeom>
-          <a:noFill/>
-          <a:ln/>
-        </p:spPr>
-        <p:txBody>
-          <a:bodyPr wrap="square" lIns="0" tIns="0" rIns="0" bIns="0" rtlCol="0" anchor="ctr"/>
-          <a:lstStyle/>
-          <a:p>
-            <a:pPr indent="0" marL="0">
-              <a:buNone/>
-            </a:pPr>
-            <a:r>
-              <a:rPr lang="en-US" sz="1000" dirty="0">
-                <a:solidFill>
-                  <a:srgbClr val="D1D5DB"/>
+              </a:rPr>
+              <a:t>"Cada fase se valida antes de avanzar — entregas visibles cada 48 horas."</a:t>
+            </a:r>
+          </a:p>
+        </p:txBody>
+      </p:sp>
+      <p:sp>
+        <p:nvSpPr>
+          <p:cNvPr id="142" name="Gracias"/>
+          <p:cNvSpPr/>
+          <p:nvPr/>
+        </p:nvSpPr>
+        <p:spPr>
+          <a:xfrm>
+            <a:off x="825500" y="5905500"/>
+            <a:ext cx="10604500" cy="381000"/>
+          </a:xfrm>
+          <a:prstGeom prst="rect">
+            <a:avLst/>
+          </a:prstGeom>
+          <a:noFill/>
+          <a:ln>
+            <a:noFill/>
+          </a:ln>
+        </p:spPr>
+        <p:txBody>
+          <a:bodyPr wrap="square" lIns="0" tIns="0" rIns="0" bIns="0" anchor="t"/>
+          <a:lstStyle/>
+          <a:p>
+            <a:pPr marL="0" indent="0" algn="ctr">
+              <a:buNone/>
+            </a:pPr>
+            <a:r>
+              <a:rPr lang="es-ES" sz="1800" b="1" dirty="0">
+                <a:solidFill>
+                  <a:srgbClr val="D4A574"/>
                 </a:solidFill>
                 <a:latin typeface="Calibri" pitchFamily="34" charset="0"/>
-                <a:ea typeface="Calibri" pitchFamily="34" charset="-122"/>
-                <a:cs typeface="Calibri" pitchFamily="34" charset="-120"/>
-              </a:rPr>
-              <a:t>elmembrillo.com.gt y certificado SSL.</a:t>
-            </a:r>
-            <a:endParaRPr lang="en-US" sz="1000" dirty="0"/>
-          </a:p>
-        </p:txBody>
-      </p:sp>
-      <p:sp>
-        <p:nvSpPr>
-          <p:cNvPr id="13" name="Shape 11"/>
-          <p:cNvSpPr/>
-          <p:nvPr/>
-        </p:nvSpPr>
-        <p:spPr>
-          <a:xfrm>
-            <a:off x="5248656" y="2194560"/>
-            <a:ext cx="2103120" cy="2377440"/>
-          </a:xfrm>
-          <a:prstGeom prst="rect">
-            <a:avLst/>
-          </a:prstGeom>
-          <a:solidFill>
-            <a:srgbClr val="374151"/>
-          </a:solidFill>
-          <a:ln w="12700">
-            <a:solidFill>
-              <a:srgbClr val="4B5563"/>
-            </a:solidFill>
-            <a:prstDash val="solid"/>
+              </a:rPr>
+              <a:t>Gracias.</a:t>
+            </a:r>
+          </a:p>
+        </p:txBody>
+      </p:sp>
+      <p:sp>
+        <p:nvSpPr>
+          <p:cNvPr id="143" name="QA"/>
+          <p:cNvSpPr/>
+          <p:nvPr/>
+        </p:nvSpPr>
+        <p:spPr>
+          <a:xfrm>
+            <a:off x="825500" y="6261100"/>
+            <a:ext cx="10604500" cy="279400"/>
+          </a:xfrm>
+          <a:prstGeom prst="rect">
+            <a:avLst/>
+          </a:prstGeom>
+          <a:noFill/>
+          <a:ln>
+            <a:noFill/>
           </a:ln>
         </p:spPr>
-      </p:sp>
-      <p:sp>
-        <p:nvSpPr>
-          <p:cNvPr id="14" name="Text 12"/>
-          <p:cNvSpPr/>
-          <p:nvPr/>
-        </p:nvSpPr>
-        <p:spPr>
-          <a:xfrm>
-            <a:off x="5431536" y="2331720"/>
-            <a:ext cx="1828800" cy="457200"/>
-          </a:xfrm>
-          <a:prstGeom prst="rect">
-            <a:avLst/>
-          </a:prstGeom>
-          <a:noFill/>
-          <a:ln/>
-        </p:spPr>
-        <p:txBody>
-          <a:bodyPr wrap="square" lIns="0" tIns="0" rIns="0" bIns="0" rtlCol="0" anchor="ctr"/>
-          <a:lstStyle/>
-          <a:p>
-            <a:pPr indent="0" marL="0">
-              <a:buNone/>
-            </a:pPr>
-            <a:r>
-              <a:rPr lang="en-US" sz="2200" b="1" dirty="0">
-                <a:solidFill>
-                  <a:srgbClr val="D4A574"/>
+        <p:txBody>
+          <a:bodyPr wrap="square" lIns="0" tIns="0" rIns="0" bIns="0" anchor="t"/>
+          <a:lstStyle/>
+          <a:p>
+            <a:pPr marL="0" indent="0" algn="ctr">
+              <a:buNone/>
+            </a:pPr>
+            <a:r>
+              <a:rPr lang="es-ES" sz="1200" i="1" dirty="0">
+                <a:solidFill>
+                  <a:srgbClr val="9CA3AF"/>
                 </a:solidFill>
                 <a:latin typeface="Calibri" pitchFamily="34" charset="0"/>
-                <a:ea typeface="Calibri" pitchFamily="34" charset="-122"/>
-                <a:cs typeface="Calibri" pitchFamily="34" charset="-120"/>
-              </a:rPr>
-              <a:t>03</a:t>
-            </a:r>
-            <a:endParaRPr lang="en-US" sz="2200" dirty="0"/>
-          </a:p>
-        </p:txBody>
-      </p:sp>
-      <p:sp>
-        <p:nvSpPr>
-          <p:cNvPr id="15" name="Text 13"/>
-          <p:cNvSpPr/>
-          <p:nvPr/>
-        </p:nvSpPr>
-        <p:spPr>
-          <a:xfrm>
-            <a:off x="5431536" y="2788920"/>
-            <a:ext cx="1828800" cy="777240"/>
-          </a:xfrm>
-          <a:prstGeom prst="rect">
-            <a:avLst/>
-          </a:prstGeom>
-          <a:noFill/>
-          <a:ln/>
-        </p:spPr>
-        <p:txBody>
-          <a:bodyPr wrap="square" lIns="0" tIns="0" rIns="0" bIns="0" rtlCol="0" anchor="ctr"/>
-          <a:lstStyle/>
-          <a:p>
-            <a:pPr indent="0" marL="0">
-              <a:buNone/>
-            </a:pPr>
-            <a:r>
-              <a:rPr lang="en-US" sz="1300" b="1" dirty="0">
-                <a:solidFill>
-                  <a:srgbClr val="FFFFFF"/>
-                </a:solidFill>
-                <a:latin typeface="Calibri" pitchFamily="34" charset="0"/>
-                <a:ea typeface="Calibri" pitchFamily="34" charset="-122"/>
-                <a:cs typeface="Calibri" pitchFamily="34" charset="-120"/>
-              </a:rPr>
-              <a:t>Login y fidelidad</a:t>
-            </a:r>
-            <a:endParaRPr lang="en-US" sz="1300" dirty="0"/>
-          </a:p>
-        </p:txBody>
-      </p:sp>
-      <p:sp>
-        <p:nvSpPr>
-          <p:cNvPr id="16" name="Text 14"/>
-          <p:cNvSpPr/>
-          <p:nvPr/>
-        </p:nvSpPr>
-        <p:spPr>
-          <a:xfrm>
-            <a:off x="5431536" y="3611880"/>
-            <a:ext cx="1828800" cy="868680"/>
-          </a:xfrm>
-          <a:prstGeom prst="rect">
-            <a:avLst/>
-          </a:prstGeom>
-          <a:noFill/>
-          <a:ln/>
-        </p:spPr>
-        <p:txBody>
-          <a:bodyPr wrap="square" lIns="0" tIns="0" rIns="0" bIns="0" rtlCol="0" anchor="ctr"/>
-          <a:lstStyle/>
-          <a:p>
-            <a:pPr indent="0" marL="0">
-              <a:buNone/>
-            </a:pPr>
-            <a:r>
-              <a:rPr lang="en-US" sz="1000" dirty="0">
-                <a:solidFill>
-                  <a:srgbClr val="D1D5DB"/>
-                </a:solidFill>
-                <a:latin typeface="Calibri" pitchFamily="34" charset="0"/>
-                <a:ea typeface="Calibri" pitchFamily="34" charset="-122"/>
-                <a:cs typeface="Calibri" pitchFamily="34" charset="-120"/>
-              </a:rPr>
-              <a:t>Clientes recurrentes y promociones segmentadas.</a:t>
-            </a:r>
-            <a:endParaRPr lang="en-US" sz="1000" dirty="0"/>
-          </a:p>
-        </p:txBody>
-      </p:sp>
-      <p:sp>
-        <p:nvSpPr>
-          <p:cNvPr id="17" name="Shape 15"/>
-          <p:cNvSpPr/>
-          <p:nvPr/>
-        </p:nvSpPr>
-        <p:spPr>
-          <a:xfrm>
-            <a:off x="7461504" y="2194560"/>
-            <a:ext cx="2103120" cy="2377440"/>
-          </a:xfrm>
-          <a:prstGeom prst="rect">
-            <a:avLst/>
-          </a:prstGeom>
-          <a:solidFill>
-            <a:srgbClr val="374151"/>
-          </a:solidFill>
-          <a:ln w="12700">
-            <a:solidFill>
-              <a:srgbClr val="4B5563"/>
-            </a:solidFill>
-            <a:prstDash val="solid"/>
-          </a:ln>
-        </p:spPr>
-      </p:sp>
-      <p:sp>
-        <p:nvSpPr>
-          <p:cNvPr id="18" name="Text 16"/>
-          <p:cNvSpPr/>
-          <p:nvPr/>
-        </p:nvSpPr>
-        <p:spPr>
-          <a:xfrm>
-            <a:off x="7644384" y="2331720"/>
-            <a:ext cx="1828800" cy="457200"/>
-          </a:xfrm>
-          <a:prstGeom prst="rect">
-            <a:avLst/>
-          </a:prstGeom>
-          <a:noFill/>
-          <a:ln/>
-        </p:spPr>
-        <p:txBody>
-          <a:bodyPr wrap="square" lIns="0" tIns="0" rIns="0" bIns="0" rtlCol="0" anchor="ctr"/>
-          <a:lstStyle/>
-          <a:p>
-            <a:pPr indent="0" marL="0">
-              <a:buNone/>
-            </a:pPr>
-            <a:r>
-              <a:rPr lang="en-US" sz="2200" b="1" dirty="0">
-                <a:solidFill>
-                  <a:srgbClr val="D4A574"/>
-                </a:solidFill>
-                <a:latin typeface="Calibri" pitchFamily="34" charset="0"/>
-                <a:ea typeface="Calibri" pitchFamily="34" charset="-122"/>
-                <a:cs typeface="Calibri" pitchFamily="34" charset="-120"/>
-              </a:rPr>
-              <a:t>04</a:t>
-            </a:r>
-            <a:endParaRPr lang="en-US" sz="2200" dirty="0"/>
-          </a:p>
-        </p:txBody>
-      </p:sp>
-      <p:sp>
-        <p:nvSpPr>
-          <p:cNvPr id="19" name="Text 17"/>
-          <p:cNvSpPr/>
-          <p:nvPr/>
-        </p:nvSpPr>
-        <p:spPr>
-          <a:xfrm>
-            <a:off x="7644384" y="2788920"/>
-            <a:ext cx="1828800" cy="777240"/>
-          </a:xfrm>
-          <a:prstGeom prst="rect">
-            <a:avLst/>
-          </a:prstGeom>
-          <a:noFill/>
-          <a:ln/>
-        </p:spPr>
-        <p:txBody>
-          <a:bodyPr wrap="square" lIns="0" tIns="0" rIns="0" bIns="0" rtlCol="0" anchor="ctr"/>
-          <a:lstStyle/>
-          <a:p>
-            <a:pPr indent="0" marL="0">
-              <a:buNone/>
-            </a:pPr>
-            <a:r>
-              <a:rPr lang="en-US" sz="1300" b="1" dirty="0">
-                <a:solidFill>
-                  <a:srgbClr val="FFFFFF"/>
-                </a:solidFill>
-                <a:latin typeface="Calibri" pitchFamily="34" charset="0"/>
-                <a:ea typeface="Calibri" pitchFamily="34" charset="-122"/>
-                <a:cs typeface="Calibri" pitchFamily="34" charset="-120"/>
-              </a:rPr>
-              <a:t>Reportes ejecutivos</a:t>
-            </a:r>
-            <a:endParaRPr lang="en-US" sz="1300" dirty="0"/>
-          </a:p>
-        </p:txBody>
-      </p:sp>
-      <p:sp>
-        <p:nvSpPr>
-          <p:cNvPr id="20" name="Text 18"/>
-          <p:cNvSpPr/>
-          <p:nvPr/>
-        </p:nvSpPr>
-        <p:spPr>
-          <a:xfrm>
-            <a:off x="7644384" y="3611880"/>
-            <a:ext cx="1828800" cy="868680"/>
-          </a:xfrm>
-          <a:prstGeom prst="rect">
-            <a:avLst/>
-          </a:prstGeom>
-          <a:noFill/>
-          <a:ln/>
-        </p:spPr>
-        <p:txBody>
-          <a:bodyPr wrap="square" lIns="0" tIns="0" rIns="0" bIns="0" rtlCol="0" anchor="ctr"/>
-          <a:lstStyle/>
-          <a:p>
-            <a:pPr indent="0" marL="0">
-              <a:buNone/>
-            </a:pPr>
-            <a:r>
-              <a:rPr lang="en-US" sz="1000" dirty="0">
-                <a:solidFill>
-                  <a:srgbClr val="D1D5DB"/>
-                </a:solidFill>
-                <a:latin typeface="Calibri" pitchFamily="34" charset="0"/>
-                <a:ea typeface="Calibri" pitchFamily="34" charset="-122"/>
-                <a:cs typeface="Calibri" pitchFamily="34" charset="-120"/>
-              </a:rPr>
-              <a:t>Tablero de KPIs para la junta directiva.</a:t>
-            </a:r>
-            <a:endParaRPr lang="en-US" sz="1000" dirty="0"/>
-          </a:p>
-        </p:txBody>
-      </p:sp>
-      <p:sp>
-        <p:nvSpPr>
-          <p:cNvPr id="21" name="Shape 19"/>
-          <p:cNvSpPr/>
-          <p:nvPr/>
-        </p:nvSpPr>
-        <p:spPr>
-          <a:xfrm>
-            <a:off x="9674352" y="2194560"/>
-            <a:ext cx="2103120" cy="2377440"/>
-          </a:xfrm>
-          <a:prstGeom prst="rect">
-            <a:avLst/>
-          </a:prstGeom>
-          <a:solidFill>
-            <a:srgbClr val="374151"/>
-          </a:solidFill>
-          <a:ln w="12700">
-            <a:solidFill>
-              <a:srgbClr val="4B5563"/>
-            </a:solidFill>
-            <a:prstDash val="solid"/>
-          </a:ln>
-        </p:spPr>
-      </p:sp>
-      <p:sp>
-        <p:nvSpPr>
-          <p:cNvPr id="22" name="Text 20"/>
-          <p:cNvSpPr/>
-          <p:nvPr/>
-        </p:nvSpPr>
-        <p:spPr>
-          <a:xfrm>
-            <a:off x="9857232" y="2331720"/>
-            <a:ext cx="1828800" cy="457200"/>
-          </a:xfrm>
-          <a:prstGeom prst="rect">
-            <a:avLst/>
-          </a:prstGeom>
-          <a:noFill/>
-          <a:ln/>
-        </p:spPr>
-        <p:txBody>
-          <a:bodyPr wrap="square" lIns="0" tIns="0" rIns="0" bIns="0" rtlCol="0" anchor="ctr"/>
-          <a:lstStyle/>
-          <a:p>
-            <a:pPr indent="0" marL="0">
-              <a:buNone/>
-            </a:pPr>
-            <a:r>
-              <a:rPr lang="en-US" sz="2200" b="1" dirty="0">
-                <a:solidFill>
-                  <a:srgbClr val="D4A574"/>
-                </a:solidFill>
-                <a:latin typeface="Calibri" pitchFamily="34" charset="0"/>
-                <a:ea typeface="Calibri" pitchFamily="34" charset="-122"/>
-                <a:cs typeface="Calibri" pitchFamily="34" charset="-120"/>
-              </a:rPr>
-              <a:t>05</a:t>
-            </a:r>
-            <a:endParaRPr lang="en-US" sz="2200" dirty="0"/>
-          </a:p>
-        </p:txBody>
-      </p:sp>
-      <p:sp>
-        <p:nvSpPr>
-          <p:cNvPr id="23" name="Text 21"/>
-          <p:cNvSpPr/>
-          <p:nvPr/>
-        </p:nvSpPr>
-        <p:spPr>
-          <a:xfrm>
-            <a:off x="9857232" y="2788920"/>
-            <a:ext cx="1828800" cy="777240"/>
-          </a:xfrm>
-          <a:prstGeom prst="rect">
-            <a:avLst/>
-          </a:prstGeom>
-          <a:noFill/>
-          <a:ln/>
-        </p:spPr>
-        <p:txBody>
-          <a:bodyPr wrap="square" lIns="0" tIns="0" rIns="0" bIns="0" rtlCol="0" anchor="ctr"/>
-          <a:lstStyle/>
-          <a:p>
-            <a:pPr indent="0" marL="0">
-              <a:buNone/>
-            </a:pPr>
-            <a:r>
-              <a:rPr lang="en-US" sz="1300" b="1" dirty="0">
-                <a:solidFill>
-                  <a:srgbClr val="FFFFFF"/>
-                </a:solidFill>
-                <a:latin typeface="Calibri" pitchFamily="34" charset="0"/>
-                <a:ea typeface="Calibri" pitchFamily="34" charset="-122"/>
-                <a:cs typeface="Calibri" pitchFamily="34" charset="-120"/>
-              </a:rPr>
-              <a:t>Catálogo extendido + campañas</a:t>
-            </a:r>
-            <a:endParaRPr lang="en-US" sz="1300" dirty="0"/>
-          </a:p>
-        </p:txBody>
-      </p:sp>
-      <p:sp>
-        <p:nvSpPr>
-          <p:cNvPr id="24" name="Text 22"/>
-          <p:cNvSpPr/>
-          <p:nvPr/>
-        </p:nvSpPr>
-        <p:spPr>
-          <a:xfrm>
-            <a:off x="9857232" y="3611880"/>
-            <a:ext cx="1828800" cy="868680"/>
-          </a:xfrm>
-          <a:prstGeom prst="rect">
-            <a:avLst/>
-          </a:prstGeom>
-          <a:noFill/>
-          <a:ln/>
-        </p:spPr>
-        <p:txBody>
-          <a:bodyPr wrap="square" lIns="0" tIns="0" rIns="0" bIns="0" rtlCol="0" anchor="ctr"/>
-          <a:lstStyle/>
-          <a:p>
-            <a:pPr indent="0" marL="0">
-              <a:buNone/>
-            </a:pPr>
-            <a:r>
-              <a:rPr lang="en-US" sz="1000" dirty="0">
-                <a:solidFill>
-                  <a:srgbClr val="D1D5DB"/>
-                </a:solidFill>
-                <a:latin typeface="Calibri" pitchFamily="34" charset="0"/>
-                <a:ea typeface="Calibri" pitchFamily="34" charset="-122"/>
-                <a:cs typeface="Calibri" pitchFamily="34" charset="-120"/>
-              </a:rPr>
-              <a:t>Más fotografía profesional y marketing digital.</a:t>
-            </a:r>
-            <a:endParaRPr lang="en-US" sz="1000" dirty="0"/>
-          </a:p>
-        </p:txBody>
-      </p:sp>
-      <p:sp>
-        <p:nvSpPr>
-          <p:cNvPr id="25" name="Text 23"/>
-          <p:cNvSpPr/>
-          <p:nvPr/>
-        </p:nvSpPr>
-        <p:spPr>
-          <a:xfrm>
-            <a:off x="822960" y="4846320"/>
-            <a:ext cx="10424160" cy="640080"/>
-          </a:xfrm>
-          <a:prstGeom prst="rect">
-            <a:avLst/>
-          </a:prstGeom>
-          <a:noFill/>
-          <a:ln/>
-        </p:spPr>
-        <p:txBody>
-          <a:bodyPr wrap="square" rtlCol="0" anchor="ctr"/>
-          <a:lstStyle/>
-          <a:p>
-            <a:pPr algn="ctr" indent="0" marL="0">
-              <a:buNone/>
-            </a:pPr>
-            <a:r>
-              <a:rPr lang="en-US" sz="1800" i="1" dirty="0">
-                <a:solidFill>
-                  <a:srgbClr val="FFFFFF"/>
-                </a:solidFill>
-                <a:latin typeface="Calibri" pitchFamily="34" charset="0"/>
-                <a:ea typeface="Calibri" pitchFamily="34" charset="-122"/>
-                <a:cs typeface="Calibri" pitchFamily="34" charset="-120"/>
-              </a:rPr>
-              <a:t>“Con disciplina y herramientas correctas, una emergencia se resuelve en días, no en meses.”</a:t>
-            </a:r>
-            <a:endParaRPr lang="en-US" sz="1800" dirty="0"/>
-          </a:p>
-        </p:txBody>
-      </p:sp>
-      <p:sp>
-        <p:nvSpPr>
-          <p:cNvPr id="26" name="Text 24"/>
-          <p:cNvSpPr/>
-          <p:nvPr/>
-        </p:nvSpPr>
-        <p:spPr>
-          <a:xfrm>
-            <a:off x="822960" y="5577840"/>
-            <a:ext cx="10424160" cy="457200"/>
-          </a:xfrm>
-          <a:prstGeom prst="rect">
-            <a:avLst/>
-          </a:prstGeom>
-          <a:noFill/>
-          <a:ln/>
-        </p:spPr>
-        <p:txBody>
-          <a:bodyPr wrap="square" rtlCol="0" anchor="ctr"/>
-          <a:lstStyle/>
-          <a:p>
-            <a:pPr algn="ctr" indent="0" marL="0">
-              <a:buNone/>
-            </a:pPr>
-            <a:r>
-              <a:rPr lang="en-US" sz="2200" b="1" dirty="0">
-                <a:solidFill>
-                  <a:srgbClr val="D4A574"/>
-                </a:solidFill>
-                <a:latin typeface="Calibri" pitchFamily="34" charset="0"/>
-                <a:ea typeface="Calibri" pitchFamily="34" charset="-122"/>
-                <a:cs typeface="Calibri" pitchFamily="34" charset="-120"/>
-              </a:rPr>
-              <a:t>Gracias.</a:t>
-            </a:r>
-            <a:endParaRPr lang="en-US" sz="2200" dirty="0"/>
-          </a:p>
-        </p:txBody>
-      </p:sp>
-      <p:sp>
-        <p:nvSpPr>
-          <p:cNvPr id="27" name="Text 25"/>
-          <p:cNvSpPr/>
-          <p:nvPr/>
-        </p:nvSpPr>
-        <p:spPr>
-          <a:xfrm>
-            <a:off x="822960" y="5989320"/>
-            <a:ext cx="10424160" cy="365760"/>
-          </a:xfrm>
-          <a:prstGeom prst="rect">
-            <a:avLst/>
-          </a:prstGeom>
-          <a:noFill/>
-          <a:ln/>
-        </p:spPr>
-        <p:txBody>
-          <a:bodyPr wrap="square" rtlCol="0" anchor="ctr"/>
-          <a:lstStyle/>
-          <a:p>
-            <a:pPr algn="ctr" indent="0" marL="0">
-              <a:buNone/>
-            </a:pPr>
-            <a:r>
-              <a:rPr lang="en-US" sz="1300" i="1" dirty="0">
-                <a:solidFill>
-                  <a:srgbClr val="9CA3AF"/>
-                </a:solidFill>
-                <a:latin typeface="Calibri" pitchFamily="34" charset="0"/>
-                <a:ea typeface="Calibri" pitchFamily="34" charset="-122"/>
-                <a:cs typeface="Calibri" pitchFamily="34" charset="-120"/>
               </a:rPr>
               <a:t>Preguntas y respuestas.</a:t>
             </a:r>
-            <a:endParaRPr lang="en-US" sz="1300" dirty="0"/>
-          </a:p>
-        </p:txBody>
-      </p:sp>
-      <p:sp>
-        <p:nvSpPr>
-          <p:cNvPr id="28" name="Text 26"/>
-          <p:cNvSpPr/>
-          <p:nvPr/>
-        </p:nvSpPr>
-        <p:spPr>
-          <a:xfrm>
-            <a:off x="10607040" y="6537960"/>
-            <a:ext cx="1371600" cy="274320"/>
-          </a:xfrm>
-          <a:prstGeom prst="rect">
-            <a:avLst/>
-          </a:prstGeom>
-          <a:noFill/>
-          <a:ln/>
-        </p:spPr>
-        <p:txBody>
-          <a:bodyPr wrap="square" rtlCol="0" anchor="ctr"/>
-          <a:lstStyle/>
-          <a:p>
-            <a:pPr algn="r" indent="0" marL="0">
-              <a:buNone/>
-            </a:pPr>
-            <a:r>
-              <a:rPr lang="en-US" sz="900" dirty="0">
-                <a:solidFill>
-                  <a:srgbClr val="9CA3AF"/>
-                </a:solidFill>
-                <a:latin typeface="Calibri" pitchFamily="34" charset="0"/>
-                <a:ea typeface="Calibri" pitchFamily="34" charset="-122"/>
-                <a:cs typeface="Calibri" pitchFamily="34" charset="-120"/>
-              </a:rPr>
-              <a:t>11 / 11</a:t>
-            </a:r>
-            <a:endParaRPr lang="en-US" sz="900" dirty="0"/>
           </a:p>
         </p:txBody>
       </p:sp>
     </p:spTree>
+    <p:extLst>
+      <p:ext uri="{BB962C8B-B14F-4D97-AF65-F5344CB8AC3E}">
+        <p14:creationId xmlns:p14="http://schemas.microsoft.com/office/powerpoint/2010/main" val="2567576728"/>
+      </p:ext>
+    </p:extLst>
   </p:cSld>
   <p:clrMapOvr>
     <a:masterClrMapping/>
@@ -4787,6 +5276,7 @@
         <a:solidFill>
           <a:srgbClr val="FFFFFF"/>
         </a:solidFill>
+        <a:effectLst/>
       </p:bgPr>
     </p:bg>
     <p:spTree>
@@ -4824,11 +5314,11 @@
           <a:bodyPr wrap="square" rtlCol="0" anchor="ctr"/>
           <a:lstStyle/>
           <a:p>
-            <a:pPr indent="0" marL="0">
-              <a:buNone/>
-            </a:pPr>
-            <a:r>
-              <a:rPr lang="en-US" sz="1100" b="1" spc="400" kern="0" dirty="0">
+            <a:pPr marL="0" indent="0">
+              <a:buNone/>
+            </a:pPr>
+            <a:r>
+              <a:rPr lang="en-US" sz="1100" b="1" kern="0" spc="400" dirty="0">
                 <a:solidFill>
                   <a:srgbClr val="8B0000"/>
                 </a:solidFill>
@@ -4863,7 +5353,7 @@
           <a:bodyPr wrap="square" lIns="0" tIns="0" rIns="0" bIns="0" rtlCol="0" anchor="ctr"/>
           <a:lstStyle/>
           <a:p>
-            <a:pPr indent="0" marL="0">
+            <a:pPr marL="0" indent="0">
               <a:buNone/>
             </a:pPr>
             <a:r>
@@ -4905,17 +5395,24 @@
             <a:prstDash val="solid"/>
           </a:ln>
         </p:spPr>
+        <p:txBody>
+          <a:bodyPr/>
+          <a:lstStyle/>
+          <a:p>
+            <a:endParaRPr lang="es-GT"/>
+          </a:p>
+        </p:txBody>
       </p:sp>
       <p:pic>
         <p:nvPicPr>
-          <p:cNvPr id="5" name="Image 0" descr="preencoded.png">    </p:cNvPr>
+          <p:cNvPr id="5" name="Image 0" descr="preencoded.png"/>
           <p:cNvPicPr>
             <a:picLocks noChangeAspect="1"/>
           </p:cNvPicPr>
           <p:nvPr/>
         </p:nvPicPr>
         <p:blipFill>
-          <a:blip r:embed="rId1"/>
+          <a:blip r:embed="rId3"/>
           <a:stretch>
             <a:fillRect/>
           </a:stretch>
@@ -4951,7 +5448,7 @@
           <a:bodyPr wrap="square" lIns="0" tIns="0" rIns="0" bIns="0" rtlCol="0" anchor="ctr"/>
           <a:lstStyle/>
           <a:p>
-            <a:pPr algn="ctr" indent="0" marL="0">
+            <a:pPr marL="0" indent="0" algn="ctr">
               <a:buNone/>
             </a:pPr>
             <a:r>
@@ -4990,7 +5487,7 @@
           <a:bodyPr wrap="square" rtlCol="0" anchor="t"/>
           <a:lstStyle/>
           <a:p>
-            <a:pPr algn="ctr" indent="0" marL="0">
+            <a:pPr marL="0" indent="0" algn="ctr">
               <a:buNone/>
             </a:pPr>
             <a:r>
@@ -5032,17 +5529,24 @@
             <a:prstDash val="solid"/>
           </a:ln>
         </p:spPr>
+        <p:txBody>
+          <a:bodyPr/>
+          <a:lstStyle/>
+          <a:p>
+            <a:endParaRPr lang="es-GT"/>
+          </a:p>
+        </p:txBody>
       </p:sp>
       <p:pic>
         <p:nvPicPr>
-          <p:cNvPr id="9" name="Image 1" descr="preencoded.png">    </p:cNvPr>
+          <p:cNvPr id="9" name="Image 1" descr="preencoded.png"/>
           <p:cNvPicPr>
             <a:picLocks noChangeAspect="1"/>
           </p:cNvPicPr>
           <p:nvPr/>
         </p:nvPicPr>
         <p:blipFill>
-          <a:blip r:embed="rId2"/>
+          <a:blip r:embed="rId4"/>
           <a:stretch>
             <a:fillRect/>
           </a:stretch>
@@ -5078,7 +5582,7 @@
           <a:bodyPr wrap="square" lIns="0" tIns="0" rIns="0" bIns="0" rtlCol="0" anchor="ctr"/>
           <a:lstStyle/>
           <a:p>
-            <a:pPr algn="ctr" indent="0" marL="0">
+            <a:pPr marL="0" indent="0" algn="ctr">
               <a:buNone/>
             </a:pPr>
             <a:r>
@@ -5117,7 +5621,7 @@
           <a:bodyPr wrap="square" rtlCol="0" anchor="t"/>
           <a:lstStyle/>
           <a:p>
-            <a:pPr algn="ctr" indent="0" marL="0">
+            <a:pPr marL="0" indent="0" algn="ctr">
               <a:buNone/>
             </a:pPr>
             <a:r>
@@ -5159,17 +5663,24 @@
             <a:prstDash val="solid"/>
           </a:ln>
         </p:spPr>
+        <p:txBody>
+          <a:bodyPr/>
+          <a:lstStyle/>
+          <a:p>
+            <a:endParaRPr lang="es-GT"/>
+          </a:p>
+        </p:txBody>
       </p:sp>
       <p:pic>
         <p:nvPicPr>
-          <p:cNvPr id="13" name="Image 2" descr="preencoded.png">    </p:cNvPr>
+          <p:cNvPr id="13" name="Image 2" descr="preencoded.png"/>
           <p:cNvPicPr>
             <a:picLocks noChangeAspect="1"/>
           </p:cNvPicPr>
           <p:nvPr/>
         </p:nvPicPr>
         <p:blipFill>
-          <a:blip r:embed="rId3"/>
+          <a:blip r:embed="rId5"/>
           <a:stretch>
             <a:fillRect/>
           </a:stretch>
@@ -5205,7 +5716,7 @@
           <a:bodyPr wrap="square" lIns="0" tIns="0" rIns="0" bIns="0" rtlCol="0" anchor="ctr"/>
           <a:lstStyle/>
           <a:p>
-            <a:pPr algn="ctr" indent="0" marL="0">
+            <a:pPr marL="0" indent="0" algn="ctr">
               <a:buNone/>
             </a:pPr>
             <a:r>
@@ -5244,7 +5755,7 @@
           <a:bodyPr wrap="square" rtlCol="0" anchor="t"/>
           <a:lstStyle/>
           <a:p>
-            <a:pPr algn="ctr" indent="0" marL="0">
+            <a:pPr marL="0" indent="0" algn="ctr">
               <a:buNone/>
             </a:pPr>
             <a:r>
@@ -5283,7 +5794,7 @@
           <a:bodyPr wrap="square" rtlCol="0" anchor="ctr"/>
           <a:lstStyle/>
           <a:p>
-            <a:pPr algn="l" indent="0" marL="0">
+            <a:pPr marL="0" indent="0" algn="l">
               <a:buNone/>
             </a:pPr>
             <a:r>
@@ -5325,6 +5836,13 @@
             <a:prstDash val="solid"/>
           </a:ln>
         </p:spPr>
+        <p:txBody>
+          <a:bodyPr/>
+          <a:lstStyle/>
+          <a:p>
+            <a:endParaRPr lang="es-GT"/>
+          </a:p>
+        </p:txBody>
       </p:sp>
       <p:sp>
         <p:nvSpPr>
@@ -5347,7 +5865,7 @@
           <a:bodyPr wrap="square" rtlCol="0" anchor="ctr"/>
           <a:lstStyle/>
           <a:p>
-            <a:pPr algn="l" indent="0" marL="0">
+            <a:pPr marL="0" indent="0" algn="l">
               <a:buNone/>
             </a:pPr>
             <a:r>
@@ -5386,7 +5904,7 @@
           <a:bodyPr wrap="square" rtlCol="0" anchor="ctr"/>
           <a:lstStyle/>
           <a:p>
-            <a:pPr algn="r" indent="0" marL="0">
+            <a:pPr marL="0" indent="0" algn="r">
               <a:buNone/>
             </a:pPr>
             <a:r>
@@ -5420,6 +5938,7 @@
         <a:solidFill>
           <a:srgbClr val="FFFFFF"/>
         </a:solidFill>
+        <a:effectLst/>
       </p:bgPr>
     </p:bg>
     <p:spTree>
@@ -5457,11 +5976,11 @@
           <a:bodyPr wrap="square" rtlCol="0" anchor="ctr"/>
           <a:lstStyle/>
           <a:p>
-            <a:pPr indent="0" marL="0">
-              <a:buNone/>
-            </a:pPr>
-            <a:r>
-              <a:rPr lang="en-US" sz="1100" b="1" spc="400" kern="0" dirty="0">
+            <a:pPr marL="0" indent="0">
+              <a:buNone/>
+            </a:pPr>
+            <a:r>
+              <a:rPr lang="en-US" sz="1100" b="1" kern="0" spc="400" dirty="0">
                 <a:solidFill>
                   <a:srgbClr val="8B0000"/>
                 </a:solidFill>
@@ -5496,7 +6015,7 @@
           <a:bodyPr wrap="square" lIns="0" tIns="0" rIns="0" bIns="0" rtlCol="0" anchor="ctr"/>
           <a:lstStyle/>
           <a:p>
-            <a:pPr indent="0" marL="0">
+            <a:pPr marL="0" indent="0">
               <a:buNone/>
             </a:pPr>
             <a:r>
@@ -5538,6 +6057,13 @@
             <a:prstDash val="solid"/>
           </a:ln>
         </p:spPr>
+        <p:txBody>
+          <a:bodyPr/>
+          <a:lstStyle/>
+          <a:p>
+            <a:endParaRPr lang="es-GT"/>
+          </a:p>
+        </p:txBody>
       </p:sp>
       <p:sp>
         <p:nvSpPr>
@@ -5563,17 +6089,24 @@
             <a:prstDash val="solid"/>
           </a:ln>
         </p:spPr>
+        <p:txBody>
+          <a:bodyPr/>
+          <a:lstStyle/>
+          <a:p>
+            <a:endParaRPr lang="es-GT"/>
+          </a:p>
+        </p:txBody>
       </p:sp>
       <p:pic>
         <p:nvPicPr>
-          <p:cNvPr id="6" name="Image 0" descr="preencoded.png">    </p:cNvPr>
+          <p:cNvPr id="6" name="Image 0" descr="preencoded.png"/>
           <p:cNvPicPr>
             <a:picLocks noChangeAspect="1"/>
           </p:cNvPicPr>
           <p:nvPr/>
         </p:nvPicPr>
         <p:blipFill>
-          <a:blip r:embed="rId1"/>
+          <a:blip r:embed="rId3"/>
           <a:stretch>
             <a:fillRect/>
           </a:stretch>
@@ -5609,7 +6142,7 @@
           <a:bodyPr wrap="square" rtlCol="0" anchor="t"/>
           <a:lstStyle/>
           <a:p>
-            <a:pPr indent="0" marL="0">
+            <a:pPr marL="0" indent="0">
               <a:buNone/>
             </a:pPr>
             <a:r>
@@ -5648,7 +6181,7 @@
           <a:bodyPr wrap="square" rtlCol="0" anchor="ctr"/>
           <a:lstStyle/>
           <a:p>
-            <a:pPr indent="0" marL="0">
+            <a:pPr marL="0" indent="0">
               <a:buNone/>
             </a:pPr>
             <a:r>
@@ -5687,7 +6220,7 @@
           <a:bodyPr wrap="square" rtlCol="0" anchor="ctr"/>
           <a:lstStyle/>
           <a:p>
-            <a:pPr indent="0" marL="0">
+            <a:pPr marL="0" indent="0">
               <a:buNone/>
             </a:pPr>
             <a:r>
@@ -5729,6 +6262,13 @@
             <a:prstDash val="solid"/>
           </a:ln>
         </p:spPr>
+        <p:txBody>
+          <a:bodyPr/>
+          <a:lstStyle/>
+          <a:p>
+            <a:endParaRPr lang="es-GT"/>
+          </a:p>
+        </p:txBody>
       </p:sp>
       <p:sp>
         <p:nvSpPr>
@@ -5751,7 +6291,7 @@
           <a:bodyPr wrap="square" lIns="0" tIns="0" rIns="0" bIns="0" rtlCol="0" anchor="ctr"/>
           <a:lstStyle/>
           <a:p>
-            <a:pPr indent="0" marL="0">
+            <a:pPr marL="0" indent="0">
               <a:buNone/>
             </a:pPr>
             <a:r>
@@ -5790,7 +6330,7 @@
           <a:bodyPr wrap="square" lIns="0" tIns="0" rIns="0" bIns="0" rtlCol="0" anchor="ctr"/>
           <a:lstStyle/>
           <a:p>
-            <a:pPr indent="0" marL="0">
+            <a:pPr marL="0" indent="0">
               <a:buNone/>
             </a:pPr>
             <a:r>
@@ -5829,7 +6369,7 @@
           <a:bodyPr wrap="square" lIns="0" tIns="0" rIns="0" bIns="0" rtlCol="0" anchor="ctr"/>
           <a:lstStyle/>
           <a:p>
-            <a:pPr indent="0" marL="0">
+            <a:pPr marL="0" indent="0">
               <a:buNone/>
             </a:pPr>
             <a:r>
@@ -5871,6 +6411,13 @@
             <a:prstDash val="solid"/>
           </a:ln>
         </p:spPr>
+        <p:txBody>
+          <a:bodyPr/>
+          <a:lstStyle/>
+          <a:p>
+            <a:endParaRPr lang="es-GT"/>
+          </a:p>
+        </p:txBody>
       </p:sp>
       <p:sp>
         <p:nvSpPr>
@@ -5893,7 +6440,7 @@
           <a:bodyPr wrap="square" lIns="0" tIns="0" rIns="0" bIns="0" rtlCol="0" anchor="ctr"/>
           <a:lstStyle/>
           <a:p>
-            <a:pPr indent="0" marL="0">
+            <a:pPr marL="0" indent="0">
               <a:buNone/>
             </a:pPr>
             <a:r>
@@ -5932,7 +6479,7 @@
           <a:bodyPr wrap="square" lIns="0" tIns="0" rIns="0" bIns="0" rtlCol="0" anchor="ctr"/>
           <a:lstStyle/>
           <a:p>
-            <a:pPr indent="0" marL="0">
+            <a:pPr marL="0" indent="0">
               <a:buNone/>
             </a:pPr>
             <a:r>
@@ -5971,7 +6518,7 @@
           <a:bodyPr wrap="square" lIns="0" tIns="0" rIns="0" bIns="0" rtlCol="0" anchor="ctr"/>
           <a:lstStyle/>
           <a:p>
-            <a:pPr indent="0" marL="0">
+            <a:pPr marL="0" indent="0">
               <a:buNone/>
             </a:pPr>
             <a:r>
@@ -6013,6 +6560,13 @@
             <a:prstDash val="solid"/>
           </a:ln>
         </p:spPr>
+        <p:txBody>
+          <a:bodyPr/>
+          <a:lstStyle/>
+          <a:p>
+            <a:endParaRPr lang="es-GT"/>
+          </a:p>
+        </p:txBody>
       </p:sp>
       <p:sp>
         <p:nvSpPr>
@@ -6035,7 +6589,7 @@
           <a:bodyPr wrap="square" lIns="0" tIns="0" rIns="0" bIns="0" rtlCol="0" anchor="ctr"/>
           <a:lstStyle/>
           <a:p>
-            <a:pPr indent="0" marL="0">
+            <a:pPr marL="0" indent="0">
               <a:buNone/>
             </a:pPr>
             <a:r>
@@ -6074,7 +6628,7 @@
           <a:bodyPr wrap="square" lIns="0" tIns="0" rIns="0" bIns="0" rtlCol="0" anchor="ctr"/>
           <a:lstStyle/>
           <a:p>
-            <a:pPr indent="0" marL="0">
+            <a:pPr marL="0" indent="0">
               <a:buNone/>
             </a:pPr>
             <a:r>
@@ -6113,7 +6667,7 @@
           <a:bodyPr wrap="square" lIns="0" tIns="0" rIns="0" bIns="0" rtlCol="0" anchor="ctr"/>
           <a:lstStyle/>
           <a:p>
-            <a:pPr indent="0" marL="0">
+            <a:pPr marL="0" indent="0">
               <a:buNone/>
             </a:pPr>
             <a:r>
@@ -6155,6 +6709,13 @@
             <a:prstDash val="solid"/>
           </a:ln>
         </p:spPr>
+        <p:txBody>
+          <a:bodyPr/>
+          <a:lstStyle/>
+          <a:p>
+            <a:endParaRPr lang="es-GT"/>
+          </a:p>
+        </p:txBody>
       </p:sp>
       <p:sp>
         <p:nvSpPr>
@@ -6177,7 +6738,7 @@
           <a:bodyPr wrap="square" lIns="0" tIns="0" rIns="0" bIns="0" rtlCol="0" anchor="ctr"/>
           <a:lstStyle/>
           <a:p>
-            <a:pPr indent="0" marL="0">
+            <a:pPr marL="0" indent="0">
               <a:buNone/>
             </a:pPr>
             <a:r>
@@ -6216,7 +6777,7 @@
           <a:bodyPr wrap="square" lIns="0" tIns="0" rIns="0" bIns="0" rtlCol="0" anchor="ctr"/>
           <a:lstStyle/>
           <a:p>
-            <a:pPr indent="0" marL="0">
+            <a:pPr marL="0" indent="0">
               <a:buNone/>
             </a:pPr>
             <a:r>
@@ -6255,7 +6816,7 @@
           <a:bodyPr wrap="square" lIns="0" tIns="0" rIns="0" bIns="0" rtlCol="0" anchor="ctr"/>
           <a:lstStyle/>
           <a:p>
-            <a:pPr indent="0" marL="0">
+            <a:pPr marL="0" indent="0">
               <a:buNone/>
             </a:pPr>
             <a:r>
@@ -6297,6 +6858,13 @@
             <a:prstDash val="solid"/>
           </a:ln>
         </p:spPr>
+        <p:txBody>
+          <a:bodyPr/>
+          <a:lstStyle/>
+          <a:p>
+            <a:endParaRPr lang="es-GT"/>
+          </a:p>
+        </p:txBody>
       </p:sp>
       <p:sp>
         <p:nvSpPr>
@@ -6319,7 +6887,7 @@
           <a:bodyPr wrap="square" lIns="0" tIns="0" rIns="0" bIns="0" rtlCol="0" anchor="ctr"/>
           <a:lstStyle/>
           <a:p>
-            <a:pPr indent="0" marL="0">
+            <a:pPr marL="0" indent="0">
               <a:buNone/>
             </a:pPr>
             <a:r>
@@ -6358,7 +6926,7 @@
           <a:bodyPr wrap="square" lIns="0" tIns="0" rIns="0" bIns="0" rtlCol="0" anchor="ctr"/>
           <a:lstStyle/>
           <a:p>
-            <a:pPr indent="0" marL="0">
+            <a:pPr marL="0" indent="0">
               <a:buNone/>
             </a:pPr>
             <a:r>
@@ -6397,7 +6965,7 @@
           <a:bodyPr wrap="square" lIns="0" tIns="0" rIns="0" bIns="0" rtlCol="0" anchor="ctr"/>
           <a:lstStyle/>
           <a:p>
-            <a:pPr indent="0" marL="0">
+            <a:pPr marL="0" indent="0">
               <a:buNone/>
             </a:pPr>
             <a:r>
@@ -6439,6 +7007,13 @@
             <a:prstDash val="solid"/>
           </a:ln>
         </p:spPr>
+        <p:txBody>
+          <a:bodyPr/>
+          <a:lstStyle/>
+          <a:p>
+            <a:endParaRPr lang="es-GT"/>
+          </a:p>
+        </p:txBody>
       </p:sp>
       <p:sp>
         <p:nvSpPr>
@@ -6461,7 +7036,7 @@
           <a:bodyPr wrap="square" rtlCol="0" anchor="ctr"/>
           <a:lstStyle/>
           <a:p>
-            <a:pPr algn="l" indent="0" marL="0">
+            <a:pPr marL="0" indent="0" algn="l">
               <a:buNone/>
             </a:pPr>
             <a:r>
@@ -6500,7 +7075,7 @@
           <a:bodyPr wrap="square" rtlCol="0" anchor="ctr"/>
           <a:lstStyle/>
           <a:p>
-            <a:pPr algn="r" indent="0" marL="0">
+            <a:pPr marL="0" indent="0" algn="r">
               <a:buNone/>
             </a:pPr>
             <a:r>
@@ -6534,6 +7109,7 @@
         <a:solidFill>
           <a:srgbClr val="FFFFFF"/>
         </a:solidFill>
+        <a:effectLst/>
       </p:bgPr>
     </p:bg>
     <p:spTree>
@@ -6571,11 +7147,11 @@
           <a:bodyPr wrap="square" rtlCol="0" anchor="ctr"/>
           <a:lstStyle/>
           <a:p>
-            <a:pPr indent="0" marL="0">
-              <a:buNone/>
-            </a:pPr>
-            <a:r>
-              <a:rPr lang="en-US" sz="1100" b="1" spc="400" kern="0" dirty="0">
+            <a:pPr marL="0" indent="0">
+              <a:buNone/>
+            </a:pPr>
+            <a:r>
+              <a:rPr lang="en-US" sz="1100" b="1" kern="0" spc="400" dirty="0">
                 <a:solidFill>
                   <a:srgbClr val="8B0000"/>
                 </a:solidFill>
@@ -6610,7 +7186,7 @@
           <a:bodyPr wrap="square" lIns="0" tIns="0" rIns="0" bIns="0" rtlCol="0" anchor="ctr"/>
           <a:lstStyle/>
           <a:p>
-            <a:pPr indent="0" marL="0">
+            <a:pPr marL="0" indent="0">
               <a:buNone/>
             </a:pPr>
             <a:r>
@@ -6649,7 +7225,7 @@
           <a:bodyPr wrap="square" rtlCol="0" anchor="ctr"/>
           <a:lstStyle/>
           <a:p>
-            <a:pPr indent="0" marL="0">
+            <a:pPr marL="0" indent="0">
               <a:buNone/>
             </a:pPr>
             <a:r>
@@ -6691,6 +7267,13 @@
             <a:prstDash val="solid"/>
           </a:ln>
         </p:spPr>
+        <p:txBody>
+          <a:bodyPr/>
+          <a:lstStyle/>
+          <a:p>
+            <a:endParaRPr lang="es-GT"/>
+          </a:p>
+        </p:txBody>
       </p:sp>
       <p:sp>
         <p:nvSpPr>
@@ -6716,17 +7299,24 @@
             <a:prstDash val="solid"/>
           </a:ln>
         </p:spPr>
+        <p:txBody>
+          <a:bodyPr/>
+          <a:lstStyle/>
+          <a:p>
+            <a:endParaRPr lang="es-GT"/>
+          </a:p>
+        </p:txBody>
       </p:sp>
       <p:pic>
         <p:nvPicPr>
-          <p:cNvPr id="7" name="Image 0" descr="preencoded.png">    </p:cNvPr>
+          <p:cNvPr id="7" name="Image 0" descr="preencoded.png"/>
           <p:cNvPicPr>
             <a:picLocks noChangeAspect="1"/>
           </p:cNvPicPr>
           <p:nvPr/>
         </p:nvPicPr>
         <p:blipFill>
-          <a:blip r:embed="rId1"/>
+          <a:blip r:embed="rId3"/>
           <a:stretch>
             <a:fillRect/>
           </a:stretch>
@@ -6762,7 +7352,7 @@
           <a:bodyPr wrap="square" lIns="0" tIns="0" rIns="0" bIns="0" rtlCol="0" anchor="ctr"/>
           <a:lstStyle/>
           <a:p>
-            <a:pPr algn="ctr" indent="0" marL="0">
+            <a:pPr marL="0" indent="0" algn="ctr">
               <a:buNone/>
             </a:pPr>
             <a:r>
@@ -6801,7 +7391,7 @@
           <a:bodyPr wrap="square" lIns="0" tIns="0" rIns="0" bIns="0" rtlCol="0" anchor="ctr"/>
           <a:lstStyle/>
           <a:p>
-            <a:pPr algn="ctr" indent="0" marL="0">
+            <a:pPr marL="0" indent="0" algn="ctr">
               <a:buNone/>
             </a:pPr>
             <a:r>
@@ -6843,6 +7433,13 @@
             <a:prstDash val="solid"/>
           </a:ln>
         </p:spPr>
+        <p:txBody>
+          <a:bodyPr/>
+          <a:lstStyle/>
+          <a:p>
+            <a:endParaRPr lang="es-GT"/>
+          </a:p>
+        </p:txBody>
       </p:sp>
       <p:sp>
         <p:nvSpPr>
@@ -6868,17 +7465,24 @@
             <a:prstDash val="solid"/>
           </a:ln>
         </p:spPr>
+        <p:txBody>
+          <a:bodyPr/>
+          <a:lstStyle/>
+          <a:p>
+            <a:endParaRPr lang="es-GT"/>
+          </a:p>
+        </p:txBody>
       </p:sp>
       <p:pic>
         <p:nvPicPr>
-          <p:cNvPr id="12" name="Image 1" descr="preencoded.png">    </p:cNvPr>
+          <p:cNvPr id="12" name="Image 1" descr="preencoded.png"/>
           <p:cNvPicPr>
             <a:picLocks noChangeAspect="1"/>
           </p:cNvPicPr>
           <p:nvPr/>
         </p:nvPicPr>
         <p:blipFill>
-          <a:blip r:embed="rId2"/>
+          <a:blip r:embed="rId4"/>
           <a:stretch>
             <a:fillRect/>
           </a:stretch>
@@ -6914,7 +7518,7 @@
           <a:bodyPr wrap="square" lIns="0" tIns="0" rIns="0" bIns="0" rtlCol="0" anchor="ctr"/>
           <a:lstStyle/>
           <a:p>
-            <a:pPr algn="ctr" indent="0" marL="0">
+            <a:pPr marL="0" indent="0" algn="ctr">
               <a:buNone/>
             </a:pPr>
             <a:r>
@@ -6953,7 +7557,7 @@
           <a:bodyPr wrap="square" lIns="0" tIns="0" rIns="0" bIns="0" rtlCol="0" anchor="ctr"/>
           <a:lstStyle/>
           <a:p>
-            <a:pPr algn="ctr" indent="0" marL="0">
+            <a:pPr marL="0" indent="0" algn="ctr">
               <a:buNone/>
             </a:pPr>
             <a:r>
@@ -6995,6 +7599,13 @@
             <a:prstDash val="solid"/>
           </a:ln>
         </p:spPr>
+        <p:txBody>
+          <a:bodyPr/>
+          <a:lstStyle/>
+          <a:p>
+            <a:endParaRPr lang="es-GT"/>
+          </a:p>
+        </p:txBody>
       </p:sp>
       <p:sp>
         <p:nvSpPr>
@@ -7020,17 +7631,24 @@
             <a:prstDash val="solid"/>
           </a:ln>
         </p:spPr>
+        <p:txBody>
+          <a:bodyPr/>
+          <a:lstStyle/>
+          <a:p>
+            <a:endParaRPr lang="es-GT"/>
+          </a:p>
+        </p:txBody>
       </p:sp>
       <p:pic>
         <p:nvPicPr>
-          <p:cNvPr id="17" name="Image 2" descr="preencoded.png">    </p:cNvPr>
+          <p:cNvPr id="17" name="Image 2" descr="preencoded.png"/>
           <p:cNvPicPr>
             <a:picLocks noChangeAspect="1"/>
           </p:cNvPicPr>
           <p:nvPr/>
         </p:nvPicPr>
         <p:blipFill>
-          <a:blip r:embed="rId3"/>
+          <a:blip r:embed="rId5"/>
           <a:stretch>
             <a:fillRect/>
           </a:stretch>
@@ -7066,7 +7684,7 @@
           <a:bodyPr wrap="square" lIns="0" tIns="0" rIns="0" bIns="0" rtlCol="0" anchor="ctr"/>
           <a:lstStyle/>
           <a:p>
-            <a:pPr algn="ctr" indent="0" marL="0">
+            <a:pPr marL="0" indent="0" algn="ctr">
               <a:buNone/>
             </a:pPr>
             <a:r>
@@ -7105,7 +7723,7 @@
           <a:bodyPr wrap="square" lIns="0" tIns="0" rIns="0" bIns="0" rtlCol="0" anchor="ctr"/>
           <a:lstStyle/>
           <a:p>
-            <a:pPr algn="ctr" indent="0" marL="0">
+            <a:pPr marL="0" indent="0" algn="ctr">
               <a:buNone/>
             </a:pPr>
             <a:r>
@@ -7147,6 +7765,13 @@
             <a:prstDash val="solid"/>
           </a:ln>
         </p:spPr>
+        <p:txBody>
+          <a:bodyPr/>
+          <a:lstStyle/>
+          <a:p>
+            <a:endParaRPr lang="es-GT"/>
+          </a:p>
+        </p:txBody>
       </p:sp>
       <p:sp>
         <p:nvSpPr>
@@ -7172,17 +7797,24 @@
             <a:prstDash val="solid"/>
           </a:ln>
         </p:spPr>
+        <p:txBody>
+          <a:bodyPr/>
+          <a:lstStyle/>
+          <a:p>
+            <a:endParaRPr lang="es-GT"/>
+          </a:p>
+        </p:txBody>
       </p:sp>
       <p:pic>
         <p:nvPicPr>
-          <p:cNvPr id="22" name="Image 3" descr="preencoded.png">    </p:cNvPr>
+          <p:cNvPr id="22" name="Image 3" descr="preencoded.png"/>
           <p:cNvPicPr>
             <a:picLocks noChangeAspect="1"/>
           </p:cNvPicPr>
           <p:nvPr/>
         </p:nvPicPr>
         <p:blipFill>
-          <a:blip r:embed="rId4"/>
+          <a:blip r:embed="rId6"/>
           <a:stretch>
             <a:fillRect/>
           </a:stretch>
@@ -7218,7 +7850,7 @@
           <a:bodyPr wrap="square" lIns="0" tIns="0" rIns="0" bIns="0" rtlCol="0" anchor="ctr"/>
           <a:lstStyle/>
           <a:p>
-            <a:pPr algn="ctr" indent="0" marL="0">
+            <a:pPr marL="0" indent="0" algn="ctr">
               <a:buNone/>
             </a:pPr>
             <a:r>
@@ -7257,7 +7889,7 @@
           <a:bodyPr wrap="square" lIns="0" tIns="0" rIns="0" bIns="0" rtlCol="0" anchor="ctr"/>
           <a:lstStyle/>
           <a:p>
-            <a:pPr algn="ctr" indent="0" marL="0">
+            <a:pPr marL="0" indent="0" algn="ctr">
               <a:buNone/>
             </a:pPr>
             <a:r>
@@ -7299,6 +7931,13 @@
             <a:prstDash val="solid"/>
           </a:ln>
         </p:spPr>
+        <p:txBody>
+          <a:bodyPr/>
+          <a:lstStyle/>
+          <a:p>
+            <a:endParaRPr lang="es-GT"/>
+          </a:p>
+        </p:txBody>
       </p:sp>
       <p:sp>
         <p:nvSpPr>
@@ -7321,7 +7960,7 @@
           <a:bodyPr wrap="square" rtlCol="0" anchor="ctr"/>
           <a:lstStyle/>
           <a:p>
-            <a:pPr algn="l" indent="0" marL="0">
+            <a:pPr marL="0" indent="0" algn="l">
               <a:buNone/>
             </a:pPr>
             <a:r>
@@ -7360,7 +7999,7 @@
           <a:bodyPr wrap="square" rtlCol="0" anchor="ctr"/>
           <a:lstStyle/>
           <a:p>
-            <a:pPr algn="r" indent="0" marL="0">
+            <a:pPr marL="0" indent="0" algn="r">
               <a:buNone/>
             </a:pPr>
             <a:r>
@@ -7394,6 +8033,7 @@
         <a:solidFill>
           <a:srgbClr val="FFFFFF"/>
         </a:solidFill>
+        <a:effectLst/>
       </p:bgPr>
     </p:bg>
     <p:spTree>
@@ -7431,11 +8071,11 @@
           <a:bodyPr wrap="square" rtlCol="0" anchor="ctr"/>
           <a:lstStyle/>
           <a:p>
-            <a:pPr indent="0" marL="0">
-              <a:buNone/>
-            </a:pPr>
-            <a:r>
-              <a:rPr lang="en-US" sz="1100" b="1" spc="400" kern="0" dirty="0">
+            <a:pPr marL="0" indent="0">
+              <a:buNone/>
+            </a:pPr>
+            <a:r>
+              <a:rPr lang="en-US" sz="1100" b="1" kern="0" spc="400" dirty="0">
                 <a:solidFill>
                   <a:srgbClr val="8B0000"/>
                 </a:solidFill>
@@ -7470,7 +8110,7 @@
           <a:bodyPr wrap="square" lIns="0" tIns="0" rIns="0" bIns="0" rtlCol="0" anchor="ctr"/>
           <a:lstStyle/>
           <a:p>
-            <a:pPr indent="0" marL="0">
+            <a:pPr marL="0" indent="0">
               <a:buNone/>
             </a:pPr>
             <a:r>
@@ -7512,17 +8152,24 @@
             <a:prstDash val="solid"/>
           </a:ln>
         </p:spPr>
+        <p:txBody>
+          <a:bodyPr/>
+          <a:lstStyle/>
+          <a:p>
+            <a:endParaRPr lang="es-GT"/>
+          </a:p>
+        </p:txBody>
       </p:sp>
       <p:pic>
         <p:nvPicPr>
-          <p:cNvPr id="5" name="Image 0" descr="preencoded.png">    </p:cNvPr>
+          <p:cNvPr id="5" name="Image 0" descr="preencoded.png"/>
           <p:cNvPicPr>
             <a:picLocks noChangeAspect="1"/>
           </p:cNvPicPr>
           <p:nvPr/>
         </p:nvPicPr>
         <p:blipFill>
-          <a:blip r:embed="rId1"/>
+          <a:blip r:embed="rId3"/>
           <a:stretch>
             <a:fillRect/>
           </a:stretch>
@@ -7558,7 +8205,7 @@
           <a:bodyPr wrap="square" lIns="0" tIns="0" rIns="0" bIns="0" rtlCol="0" anchor="ctr"/>
           <a:lstStyle/>
           <a:p>
-            <a:pPr indent="0" marL="0">
+            <a:pPr marL="0" indent="0">
               <a:buNone/>
             </a:pPr>
             <a:r>
@@ -7597,7 +8244,7 @@
           <a:bodyPr wrap="square" lIns="0" tIns="0" rIns="0" bIns="0" rtlCol="0" anchor="ctr"/>
           <a:lstStyle/>
           <a:p>
-            <a:pPr indent="0" marL="0">
+            <a:pPr marL="0" indent="0">
               <a:buNone/>
             </a:pPr>
             <a:r>
@@ -7639,6 +8286,13 @@
             <a:prstDash val="solid"/>
           </a:ln>
         </p:spPr>
+        <p:txBody>
+          <a:bodyPr/>
+          <a:lstStyle/>
+          <a:p>
+            <a:endParaRPr lang="es-GT"/>
+          </a:p>
+        </p:txBody>
       </p:sp>
       <p:sp>
         <p:nvSpPr>
@@ -7664,6 +8318,13 @@
             <a:prstDash val="solid"/>
           </a:ln>
         </p:spPr>
+        <p:txBody>
+          <a:bodyPr/>
+          <a:lstStyle/>
+          <a:p>
+            <a:endParaRPr lang="es-GT"/>
+          </a:p>
+        </p:txBody>
       </p:sp>
       <p:sp>
         <p:nvSpPr>
@@ -7686,11 +8347,11 @@
           <a:bodyPr wrap="square" rtlCol="0" anchor="ctr"/>
           <a:lstStyle/>
           <a:p>
-            <a:pPr algn="ctr" indent="0" marL="0">
-              <a:buNone/>
-            </a:pPr>
-            <a:r>
-              <a:rPr lang="en-US" sz="1000" b="1" spc="200" kern="0" dirty="0">
+            <a:pPr marL="0" indent="0" algn="ctr">
+              <a:buNone/>
+            </a:pPr>
+            <a:r>
+              <a:rPr lang="en-US" sz="1000" b="1" kern="0" spc="200" dirty="0">
                 <a:solidFill>
                   <a:srgbClr val="6B7280"/>
                 </a:solidFill>
@@ -7728,17 +8389,24 @@
             <a:prstDash val="solid"/>
           </a:ln>
         </p:spPr>
+        <p:txBody>
+          <a:bodyPr/>
+          <a:lstStyle/>
+          <a:p>
+            <a:endParaRPr lang="es-GT"/>
+          </a:p>
+        </p:txBody>
       </p:sp>
       <p:pic>
         <p:nvPicPr>
-          <p:cNvPr id="12" name="Image 1" descr="preencoded.png">    </p:cNvPr>
+          <p:cNvPr id="12" name="Image 1" descr="preencoded.png"/>
           <p:cNvPicPr>
             <a:picLocks noChangeAspect="1"/>
           </p:cNvPicPr>
           <p:nvPr/>
         </p:nvPicPr>
         <p:blipFill>
-          <a:blip r:embed="rId2"/>
+          <a:blip r:embed="rId4"/>
           <a:stretch>
             <a:fillRect/>
           </a:stretch>
@@ -7774,7 +8442,7 @@
           <a:bodyPr wrap="square" lIns="0" tIns="0" rIns="0" bIns="0" rtlCol="0" anchor="ctr"/>
           <a:lstStyle/>
           <a:p>
-            <a:pPr indent="0" marL="0">
+            <a:pPr marL="0" indent="0">
               <a:buNone/>
             </a:pPr>
             <a:r>
@@ -7813,7 +8481,7 @@
           <a:bodyPr wrap="square" lIns="0" tIns="0" rIns="0" bIns="0" rtlCol="0" anchor="ctr"/>
           <a:lstStyle/>
           <a:p>
-            <a:pPr indent="0" marL="0">
+            <a:pPr marL="0" indent="0">
               <a:buNone/>
             </a:pPr>
             <a:r>
@@ -7855,6 +8523,13 @@
             <a:prstDash val="solid"/>
           </a:ln>
         </p:spPr>
+        <p:txBody>
+          <a:bodyPr/>
+          <a:lstStyle/>
+          <a:p>
+            <a:endParaRPr lang="es-GT"/>
+          </a:p>
+        </p:txBody>
       </p:sp>
       <p:sp>
         <p:nvSpPr>
@@ -7880,6 +8555,13 @@
             <a:prstDash val="solid"/>
           </a:ln>
         </p:spPr>
+        <p:txBody>
+          <a:bodyPr/>
+          <a:lstStyle/>
+          <a:p>
+            <a:endParaRPr lang="es-GT"/>
+          </a:p>
+        </p:txBody>
       </p:sp>
       <p:sp>
         <p:nvSpPr>
@@ -7902,11 +8584,11 @@
           <a:bodyPr wrap="square" rtlCol="0" anchor="ctr"/>
           <a:lstStyle/>
           <a:p>
-            <a:pPr algn="ctr" indent="0" marL="0">
-              <a:buNone/>
-            </a:pPr>
-            <a:r>
-              <a:rPr lang="en-US" sz="1000" b="1" spc="200" kern="0" dirty="0">
+            <a:pPr marL="0" indent="0" algn="ctr">
+              <a:buNone/>
+            </a:pPr>
+            <a:r>
+              <a:rPr lang="en-US" sz="1000" b="1" kern="0" spc="200" dirty="0">
                 <a:solidFill>
                   <a:srgbClr val="6B7280"/>
                 </a:solidFill>
@@ -7944,17 +8626,24 @@
             <a:prstDash val="solid"/>
           </a:ln>
         </p:spPr>
+        <p:txBody>
+          <a:bodyPr/>
+          <a:lstStyle/>
+          <a:p>
+            <a:endParaRPr lang="es-GT"/>
+          </a:p>
+        </p:txBody>
       </p:sp>
       <p:pic>
         <p:nvPicPr>
-          <p:cNvPr id="19" name="Image 2" descr="preencoded.png">    </p:cNvPr>
+          <p:cNvPr id="19" name="Image 2" descr="preencoded.png"/>
           <p:cNvPicPr>
             <a:picLocks noChangeAspect="1"/>
           </p:cNvPicPr>
           <p:nvPr/>
         </p:nvPicPr>
         <p:blipFill>
-          <a:blip r:embed="rId3"/>
+          <a:blip r:embed="rId5"/>
           <a:stretch>
             <a:fillRect/>
           </a:stretch>
@@ -7990,7 +8679,7 @@
           <a:bodyPr wrap="square" lIns="0" tIns="0" rIns="0" bIns="0" rtlCol="0" anchor="ctr"/>
           <a:lstStyle/>
           <a:p>
-            <a:pPr indent="0" marL="0">
+            <a:pPr marL="0" indent="0">
               <a:buNone/>
             </a:pPr>
             <a:r>
@@ -8029,7 +8718,7 @@
           <a:bodyPr wrap="square" lIns="0" tIns="0" rIns="0" bIns="0" rtlCol="0" anchor="ctr"/>
           <a:lstStyle/>
           <a:p>
-            <a:pPr indent="0" marL="0">
+            <a:pPr marL="0" indent="0">
               <a:buNone/>
             </a:pPr>
             <a:r>
@@ -8071,17 +8760,24 @@
             <a:prstDash val="solid"/>
           </a:ln>
         </p:spPr>
+        <p:txBody>
+          <a:bodyPr/>
+          <a:lstStyle/>
+          <a:p>
+            <a:endParaRPr lang="es-GT"/>
+          </a:p>
+        </p:txBody>
       </p:sp>
       <p:pic>
         <p:nvPicPr>
-          <p:cNvPr id="23" name="Image 3" descr="preencoded.png">    </p:cNvPr>
+          <p:cNvPr id="23" name="Image 3" descr="preencoded.png"/>
           <p:cNvPicPr>
             <a:picLocks noChangeAspect="1"/>
           </p:cNvPicPr>
           <p:nvPr/>
         </p:nvPicPr>
         <p:blipFill>
-          <a:blip r:embed="rId4"/>
+          <a:blip r:embed="rId6"/>
           <a:stretch>
             <a:fillRect/>
           </a:stretch>
@@ -8117,7 +8813,7 @@
           <a:bodyPr wrap="square" lIns="0" tIns="0" rIns="0" bIns="0" rtlCol="0" anchor="ctr"/>
           <a:lstStyle/>
           <a:p>
-            <a:pPr indent="0" marL="0">
+            <a:pPr marL="0" indent="0">
               <a:buNone/>
             </a:pPr>
             <a:r>
@@ -8156,7 +8852,7 @@
           <a:bodyPr wrap="square" lIns="0" tIns="0" rIns="0" bIns="0" rtlCol="0" anchor="ctr"/>
           <a:lstStyle/>
           <a:p>
-            <a:pPr indent="0" marL="0">
+            <a:pPr marL="0" indent="0">
               <a:buNone/>
             </a:pPr>
             <a:r>
@@ -8198,6 +8894,13 @@
             <a:prstDash val="solid"/>
           </a:ln>
         </p:spPr>
+        <p:txBody>
+          <a:bodyPr/>
+          <a:lstStyle/>
+          <a:p>
+            <a:endParaRPr lang="es-GT"/>
+          </a:p>
+        </p:txBody>
       </p:sp>
       <p:sp>
         <p:nvSpPr>
@@ -8223,6 +8926,13 @@
             <a:prstDash val="solid"/>
           </a:ln>
         </p:spPr>
+        <p:txBody>
+          <a:bodyPr/>
+          <a:lstStyle/>
+          <a:p>
+            <a:endParaRPr lang="es-GT"/>
+          </a:p>
+        </p:txBody>
       </p:sp>
       <p:sp>
         <p:nvSpPr>
@@ -8245,7 +8955,7 @@
           <a:bodyPr wrap="square" rtlCol="0" anchor="ctr"/>
           <a:lstStyle/>
           <a:p>
-            <a:pPr indent="0" marL="0">
+            <a:pPr marL="0" indent="0">
               <a:buNone/>
             </a:pPr>
             <a:r>
@@ -8287,6 +8997,13 @@
             <a:prstDash val="solid"/>
           </a:ln>
         </p:spPr>
+        <p:txBody>
+          <a:bodyPr/>
+          <a:lstStyle/>
+          <a:p>
+            <a:endParaRPr lang="es-GT"/>
+          </a:p>
+        </p:txBody>
       </p:sp>
       <p:sp>
         <p:nvSpPr>
@@ -8309,7 +9026,7 @@
           <a:bodyPr wrap="square" rtlCol="0" anchor="ctr"/>
           <a:lstStyle/>
           <a:p>
-            <a:pPr algn="l" indent="0" marL="0">
+            <a:pPr marL="0" indent="0" algn="l">
               <a:buNone/>
             </a:pPr>
             <a:r>
@@ -8348,7 +9065,7 @@
           <a:bodyPr wrap="square" rtlCol="0" anchor="ctr"/>
           <a:lstStyle/>
           <a:p>
-            <a:pPr algn="r" indent="0" marL="0">
+            <a:pPr marL="0" indent="0" algn="r">
               <a:buNone/>
             </a:pPr>
             <a:r>
@@ -8382,6 +9099,7 @@
         <a:solidFill>
           <a:srgbClr val="FFFFFF"/>
         </a:solidFill>
+        <a:effectLst/>
       </p:bgPr>
     </p:bg>
     <p:spTree>
@@ -8419,11 +9137,11 @@
           <a:bodyPr wrap="square" rtlCol="0" anchor="ctr"/>
           <a:lstStyle/>
           <a:p>
-            <a:pPr indent="0" marL="0">
-              <a:buNone/>
-            </a:pPr>
-            <a:r>
-              <a:rPr lang="en-US" sz="1100" b="1" spc="400" kern="0" dirty="0">
+            <a:pPr marL="0" indent="0">
+              <a:buNone/>
+            </a:pPr>
+            <a:r>
+              <a:rPr lang="en-US" sz="1100" b="1" kern="0" spc="400" dirty="0">
                 <a:solidFill>
                   <a:srgbClr val="8B0000"/>
                 </a:solidFill>
@@ -8458,7 +9176,7 @@
           <a:bodyPr wrap="square" lIns="0" tIns="0" rIns="0" bIns="0" rtlCol="0" anchor="ctr"/>
           <a:lstStyle/>
           <a:p>
-            <a:pPr indent="0" marL="0">
+            <a:pPr marL="0" indent="0">
               <a:buNone/>
             </a:pPr>
             <a:r>
@@ -8492,16 +9210,34 @@
         </p:nvGraphicFramePr>
         <p:xfrm>
           <a:off x="548640" y="1828800"/>
-          <a:ext cx="11064240" cy="914400"/>
+          <a:ext cx="11064240" cy="3566160"/>
         </p:xfrm>
         <a:graphic>
           <a:graphicData uri="http://schemas.openxmlformats.org/drawingml/2006/table">
             <a:tbl>
               <a:tblPr/>
               <a:tblGrid>
-                <a:gridCol w="2377440"/>
-                <a:gridCol w="2286000"/>
-                <a:gridCol w="6400800"/>
+                <a:gridCol w="2377440">
+                  <a:extLst>
+                    <a:ext uri="{9D8B030D-6E8A-4147-A177-3AD203B41FA5}">
+                      <a16:colId xmlns:a16="http://schemas.microsoft.com/office/drawing/2014/main" val="20000"/>
+                    </a:ext>
+                  </a:extLst>
+                </a:gridCol>
+                <a:gridCol w="2286000">
+                  <a:extLst>
+                    <a:ext uri="{9D8B030D-6E8A-4147-A177-3AD203B41FA5}">
+                      <a16:colId xmlns:a16="http://schemas.microsoft.com/office/drawing/2014/main" val="20001"/>
+                    </a:ext>
+                  </a:extLst>
+                </a:gridCol>
+                <a:gridCol w="6400800">
+                  <a:extLst>
+                    <a:ext uri="{9D8B030D-6E8A-4147-A177-3AD203B41FA5}">
+                      <a16:colId xmlns:a16="http://schemas.microsoft.com/office/drawing/2014/main" val="20002"/>
+                    </a:ext>
+                  </a:extLst>
+                </a:gridCol>
               </a:tblGrid>
               <a:tr h="594360">
                 <a:tc>
@@ -8509,7 +9245,7 @@
                     <a:bodyPr/>
                     <a:lstStyle/>
                     <a:p>
-                      <a:pPr algn="l" indent="0" marL="0">
+                      <a:pPr marL="0" indent="0" algn="l">
                         <a:buNone/>
                       </a:pPr>
                       <a:r>
@@ -8530,7 +9266,7 @@
                       </a:endParaRPr>
                     </a:p>
                   </a:txBody>
-                  <a:tcPr marL="91440" marR="91440" marT="45720" marB="45720" anchor="ctr">
+                  <a:tcPr anchor="ctr">
                     <a:lnL w="6350" cap="flat" cmpd="sng" algn="ctr">
                       <a:solidFill>
                         <a:srgbClr val="E5E7EB"/>
@@ -8577,7 +9313,7 @@
                     <a:bodyPr/>
                     <a:lstStyle/>
                     <a:p>
-                      <a:pPr algn="l" indent="0" marL="0">
+                      <a:pPr marL="0" indent="0" algn="l">
                         <a:buNone/>
                       </a:pPr>
                       <a:r>
@@ -8598,7 +9334,7 @@
                       </a:endParaRPr>
                     </a:p>
                   </a:txBody>
-                  <a:tcPr marL="91440" marR="91440" marT="45720" marB="45720" anchor="ctr">
+                  <a:tcPr anchor="ctr">
                     <a:lnL w="6350" cap="flat" cmpd="sng" algn="ctr">
                       <a:solidFill>
                         <a:srgbClr val="E5E7EB"/>
@@ -8645,7 +9381,7 @@
                     <a:bodyPr/>
                     <a:lstStyle/>
                     <a:p>
-                      <a:pPr algn="l" indent="0" marL="0">
+                      <a:pPr marL="0" indent="0" algn="l">
                         <a:buNone/>
                       </a:pPr>
                       <a:r>
@@ -8666,7 +9402,7 @@
                       </a:endParaRPr>
                     </a:p>
                   </a:txBody>
-                  <a:tcPr marL="91440" marR="91440" marT="45720" marB="45720" anchor="ctr">
+                  <a:tcPr anchor="ctr">
                     <a:lnL w="6350" cap="flat" cmpd="sng" algn="ctr">
                       <a:solidFill>
                         <a:srgbClr val="E5E7EB"/>
@@ -8708,6 +9444,11 @@
                     </a:solidFill>
                   </a:tcPr>
                 </a:tc>
+                <a:extLst>
+                  <a:ext uri="{0D108BD9-81ED-4DB2-BD59-A6C34878D82A}">
+                    <a16:rowId xmlns:a16="http://schemas.microsoft.com/office/drawing/2014/main" val="10000"/>
+                  </a:ext>
+                </a:extLst>
               </a:tr>
               <a:tr h="594360">
                 <a:tc>
@@ -8715,7 +9456,7 @@
                     <a:bodyPr/>
                     <a:lstStyle/>
                     <a:p>
-                      <a:pPr indent="0" marL="0">
+                      <a:pPr marL="0" indent="0">
                         <a:buNone/>
                       </a:pPr>
                       <a:r>
@@ -8736,7 +9477,7 @@
                       </a:endParaRPr>
                     </a:p>
                   </a:txBody>
-                  <a:tcPr marL="91440" marR="91440" marT="45720" marB="45720" anchor="ctr">
+                  <a:tcPr anchor="ctr">
                     <a:lnL w="6350" cap="flat" cmpd="sng" algn="ctr">
                       <a:solidFill>
                         <a:srgbClr val="E5E7EB"/>
@@ -8783,7 +9524,7 @@
                     <a:bodyPr/>
                     <a:lstStyle/>
                     <a:p>
-                      <a:pPr indent="0" marL="0">
+                      <a:pPr marL="0" indent="0">
                         <a:buNone/>
                       </a:pPr>
                       <a:r>
@@ -8804,7 +9545,7 @@
                       </a:endParaRPr>
                     </a:p>
                   </a:txBody>
-                  <a:tcPr marL="91440" marR="91440" marT="45720" marB="45720" anchor="ctr">
+                  <a:tcPr anchor="ctr">
                     <a:lnL w="6350" cap="flat" cmpd="sng" algn="ctr">
                       <a:solidFill>
                         <a:srgbClr val="E5E7EB"/>
@@ -8851,7 +9592,7 @@
                     <a:bodyPr/>
                     <a:lstStyle/>
                     <a:p>
-                      <a:pPr indent="0" marL="0">
+                      <a:pPr marL="0" indent="0">
                         <a:buNone/>
                       </a:pPr>
                       <a:r>
@@ -8872,7 +9613,7 @@
                       </a:endParaRPr>
                     </a:p>
                   </a:txBody>
-                  <a:tcPr marL="91440" marR="91440" marT="45720" marB="45720" anchor="ctr">
+                  <a:tcPr anchor="ctr">
                     <a:lnL w="6350" cap="flat" cmpd="sng" algn="ctr">
                       <a:solidFill>
                         <a:srgbClr val="E5E7EB"/>
@@ -8914,6 +9655,11 @@
                     </a:solidFill>
                   </a:tcPr>
                 </a:tc>
+                <a:extLst>
+                  <a:ext uri="{0D108BD9-81ED-4DB2-BD59-A6C34878D82A}">
+                    <a16:rowId xmlns:a16="http://schemas.microsoft.com/office/drawing/2014/main" val="10001"/>
+                  </a:ext>
+                </a:extLst>
               </a:tr>
               <a:tr h="594360">
                 <a:tc>
@@ -8921,7 +9667,7 @@
                     <a:bodyPr/>
                     <a:lstStyle/>
                     <a:p>
-                      <a:pPr indent="0" marL="0">
+                      <a:pPr marL="0" indent="0">
                         <a:buNone/>
                       </a:pPr>
                       <a:r>
@@ -8942,7 +9688,7 @@
                       </a:endParaRPr>
                     </a:p>
                   </a:txBody>
-                  <a:tcPr marL="91440" marR="91440" marT="45720" marB="45720" anchor="ctr">
+                  <a:tcPr anchor="ctr">
                     <a:lnL w="6350" cap="flat" cmpd="sng" algn="ctr">
                       <a:solidFill>
                         <a:srgbClr val="E5E7EB"/>
@@ -8986,7 +9732,7 @@
                     <a:bodyPr/>
                     <a:lstStyle/>
                     <a:p>
-                      <a:pPr indent="0" marL="0">
+                      <a:pPr marL="0" indent="0">
                         <a:buNone/>
                       </a:pPr>
                       <a:r>
@@ -9007,7 +9753,7 @@
                       </a:endParaRPr>
                     </a:p>
                   </a:txBody>
-                  <a:tcPr marL="91440" marR="91440" marT="45720" marB="45720" anchor="ctr">
+                  <a:tcPr anchor="ctr">
                     <a:lnL w="6350" cap="flat" cmpd="sng" algn="ctr">
                       <a:solidFill>
                         <a:srgbClr val="E5E7EB"/>
@@ -9051,7 +9797,7 @@
                     <a:bodyPr/>
                     <a:lstStyle/>
                     <a:p>
-                      <a:pPr indent="0" marL="0">
+                      <a:pPr marL="0" indent="0">
                         <a:buNone/>
                       </a:pPr>
                       <a:r>
@@ -9072,7 +9818,7 @@
                       </a:endParaRPr>
                     </a:p>
                   </a:txBody>
-                  <a:tcPr marL="91440" marR="91440" marT="45720" marB="45720" anchor="ctr">
+                  <a:tcPr anchor="ctr">
                     <a:lnL w="6350" cap="flat" cmpd="sng" algn="ctr">
                       <a:solidFill>
                         <a:srgbClr val="E5E7EB"/>
@@ -9111,6 +9857,11 @@
                     </a:lnB>
                   </a:tcPr>
                 </a:tc>
+                <a:extLst>
+                  <a:ext uri="{0D108BD9-81ED-4DB2-BD59-A6C34878D82A}">
+                    <a16:rowId xmlns:a16="http://schemas.microsoft.com/office/drawing/2014/main" val="10002"/>
+                  </a:ext>
+                </a:extLst>
               </a:tr>
               <a:tr h="594360">
                 <a:tc>
@@ -9118,7 +9869,7 @@
                     <a:bodyPr/>
                     <a:lstStyle/>
                     <a:p>
-                      <a:pPr indent="0" marL="0">
+                      <a:pPr marL="0" indent="0">
                         <a:buNone/>
                       </a:pPr>
                       <a:r>
@@ -9139,7 +9890,7 @@
                       </a:endParaRPr>
                     </a:p>
                   </a:txBody>
-                  <a:tcPr marL="91440" marR="91440" marT="45720" marB="45720" anchor="ctr">
+                  <a:tcPr anchor="ctr">
                     <a:lnL w="6350" cap="flat" cmpd="sng" algn="ctr">
                       <a:solidFill>
                         <a:srgbClr val="E5E7EB"/>
@@ -9186,7 +9937,7 @@
                     <a:bodyPr/>
                     <a:lstStyle/>
                     <a:p>
-                      <a:pPr indent="0" marL="0">
+                      <a:pPr marL="0" indent="0">
                         <a:buNone/>
                       </a:pPr>
                       <a:r>
@@ -9207,7 +9958,7 @@
                       </a:endParaRPr>
                     </a:p>
                   </a:txBody>
-                  <a:tcPr marL="91440" marR="91440" marT="45720" marB="45720" anchor="ctr">
+                  <a:tcPr anchor="ctr">
                     <a:lnL w="6350" cap="flat" cmpd="sng" algn="ctr">
                       <a:solidFill>
                         <a:srgbClr val="E5E7EB"/>
@@ -9254,7 +10005,7 @@
                     <a:bodyPr/>
                     <a:lstStyle/>
                     <a:p>
-                      <a:pPr indent="0" marL="0">
+                      <a:pPr marL="0" indent="0">
                         <a:buNone/>
                       </a:pPr>
                       <a:r>
@@ -9275,7 +10026,7 @@
                       </a:endParaRPr>
                     </a:p>
                   </a:txBody>
-                  <a:tcPr marL="91440" marR="91440" marT="45720" marB="45720" anchor="ctr">
+                  <a:tcPr anchor="ctr">
                     <a:lnL w="6350" cap="flat" cmpd="sng" algn="ctr">
                       <a:solidFill>
                         <a:srgbClr val="E5E7EB"/>
@@ -9317,6 +10068,11 @@
                     </a:solidFill>
                   </a:tcPr>
                 </a:tc>
+                <a:extLst>
+                  <a:ext uri="{0D108BD9-81ED-4DB2-BD59-A6C34878D82A}">
+                    <a16:rowId xmlns:a16="http://schemas.microsoft.com/office/drawing/2014/main" val="10003"/>
+                  </a:ext>
+                </a:extLst>
               </a:tr>
               <a:tr h="594360">
                 <a:tc>
@@ -9324,7 +10080,7 @@
                     <a:bodyPr/>
                     <a:lstStyle/>
                     <a:p>
-                      <a:pPr indent="0" marL="0">
+                      <a:pPr marL="0" indent="0">
                         <a:buNone/>
                       </a:pPr>
                       <a:r>
@@ -9345,7 +10101,7 @@
                       </a:endParaRPr>
                     </a:p>
                   </a:txBody>
-                  <a:tcPr marL="91440" marR="91440" marT="45720" marB="45720" anchor="ctr">
+                  <a:tcPr anchor="ctr">
                     <a:lnL w="6350" cap="flat" cmpd="sng" algn="ctr">
                       <a:solidFill>
                         <a:srgbClr val="E5E7EB"/>
@@ -9389,7 +10145,7 @@
                     <a:bodyPr/>
                     <a:lstStyle/>
                     <a:p>
-                      <a:pPr indent="0" marL="0">
+                      <a:pPr marL="0" indent="0">
                         <a:buNone/>
                       </a:pPr>
                       <a:r>
@@ -9410,7 +10166,7 @@
                       </a:endParaRPr>
                     </a:p>
                   </a:txBody>
-                  <a:tcPr marL="91440" marR="91440" marT="45720" marB="45720" anchor="ctr">
+                  <a:tcPr anchor="ctr">
                     <a:lnL w="6350" cap="flat" cmpd="sng" algn="ctr">
                       <a:solidFill>
                         <a:srgbClr val="E5E7EB"/>
@@ -9454,7 +10210,7 @@
                     <a:bodyPr/>
                     <a:lstStyle/>
                     <a:p>
-                      <a:pPr indent="0" marL="0">
+                      <a:pPr marL="0" indent="0">
                         <a:buNone/>
                       </a:pPr>
                       <a:r>
@@ -9475,7 +10231,7 @@
                       </a:endParaRPr>
                     </a:p>
                   </a:txBody>
-                  <a:tcPr marL="91440" marR="91440" marT="45720" marB="45720" anchor="ctr">
+                  <a:tcPr anchor="ctr">
                     <a:lnL w="6350" cap="flat" cmpd="sng" algn="ctr">
                       <a:solidFill>
                         <a:srgbClr val="E5E7EB"/>
@@ -9514,6 +10270,11 @@
                     </a:lnB>
                   </a:tcPr>
                 </a:tc>
+                <a:extLst>
+                  <a:ext uri="{0D108BD9-81ED-4DB2-BD59-A6C34878D82A}">
+                    <a16:rowId xmlns:a16="http://schemas.microsoft.com/office/drawing/2014/main" val="10004"/>
+                  </a:ext>
+                </a:extLst>
               </a:tr>
               <a:tr h="594360">
                 <a:tc>
@@ -9521,7 +10282,7 @@
                     <a:bodyPr/>
                     <a:lstStyle/>
                     <a:p>
-                      <a:pPr indent="0" marL="0">
+                      <a:pPr marL="0" indent="0">
                         <a:buNone/>
                       </a:pPr>
                       <a:r>
@@ -9542,7 +10303,7 @@
                       </a:endParaRPr>
                     </a:p>
                   </a:txBody>
-                  <a:tcPr marL="91440" marR="91440" marT="45720" marB="45720" anchor="ctr">
+                  <a:tcPr anchor="ctr">
                     <a:lnL w="6350" cap="flat" cmpd="sng" algn="ctr">
                       <a:solidFill>
                         <a:srgbClr val="E5E7EB"/>
@@ -9589,7 +10350,7 @@
                     <a:bodyPr/>
                     <a:lstStyle/>
                     <a:p>
-                      <a:pPr indent="0" marL="0">
+                      <a:pPr marL="0" indent="0">
                         <a:buNone/>
                       </a:pPr>
                       <a:r>
@@ -9610,7 +10371,7 @@
                       </a:endParaRPr>
                     </a:p>
                   </a:txBody>
-                  <a:tcPr marL="91440" marR="91440" marT="45720" marB="45720" anchor="ctr">
+                  <a:tcPr anchor="ctr">
                     <a:lnL w="6350" cap="flat" cmpd="sng" algn="ctr">
                       <a:solidFill>
                         <a:srgbClr val="E5E7EB"/>
@@ -9657,7 +10418,7 @@
                     <a:bodyPr/>
                     <a:lstStyle/>
                     <a:p>
-                      <a:pPr indent="0" marL="0">
+                      <a:pPr marL="0" indent="0">
                         <a:buNone/>
                       </a:pPr>
                       <a:r>
@@ -9678,7 +10439,7 @@
                       </a:endParaRPr>
                     </a:p>
                   </a:txBody>
-                  <a:tcPr marL="91440" marR="91440" marT="45720" marB="45720" anchor="ctr">
+                  <a:tcPr anchor="ctr">
                     <a:lnL w="6350" cap="flat" cmpd="sng" algn="ctr">
                       <a:solidFill>
                         <a:srgbClr val="E5E7EB"/>
@@ -9720,6 +10481,11 @@
                     </a:solidFill>
                   </a:tcPr>
                 </a:tc>
+                <a:extLst>
+                  <a:ext uri="{0D108BD9-81ED-4DB2-BD59-A6C34878D82A}">
+                    <a16:rowId xmlns:a16="http://schemas.microsoft.com/office/drawing/2014/main" val="10005"/>
+                  </a:ext>
+                </a:extLst>
               </a:tr>
             </a:tbl>
           </a:graphicData>
@@ -9746,7 +10512,7 @@
           <a:bodyPr wrap="square" rtlCol="0" anchor="ctr"/>
           <a:lstStyle/>
           <a:p>
-            <a:pPr indent="0" marL="0">
+            <a:pPr marL="0" indent="0">
               <a:buNone/>
             </a:pPr>
             <a:r>
@@ -9788,10 +10554,17 @@
             <a:prstDash val="solid"/>
           </a:ln>
         </p:spPr>
-      </p:sp>
-      <p:sp>
-        <p:nvSpPr>
-          <p:cNvPr id="7" name="Text 4"/>
+        <p:txBody>
+          <a:bodyPr/>
+          <a:lstStyle/>
+          <a:p>
+            <a:endParaRPr lang="es-GT"/>
+          </a:p>
+        </p:txBody>
+      </p:sp>
+      <p:sp>
+        <p:nvSpPr>
+          <p:cNvPr id="4" name="Text 4"/>
           <p:cNvSpPr/>
           <p:nvPr/>
         </p:nvSpPr>
@@ -9810,7 +10583,7 @@
           <a:bodyPr wrap="square" rtlCol="0" anchor="ctr"/>
           <a:lstStyle/>
           <a:p>
-            <a:pPr algn="l" indent="0" marL="0">
+            <a:pPr marL="0" indent="0" algn="l">
               <a:buNone/>
             </a:pPr>
             <a:r>
@@ -9849,7 +10622,7 @@
           <a:bodyPr wrap="square" rtlCol="0" anchor="ctr"/>
           <a:lstStyle/>
           <a:p>
-            <a:pPr algn="r" indent="0" marL="0">
+            <a:pPr marL="0" indent="0" algn="r">
               <a:buNone/>
             </a:pPr>
             <a:r>
@@ -9883,6 +10656,7 @@
         <a:solidFill>
           <a:srgbClr val="FFFFFF"/>
         </a:solidFill>
+        <a:effectLst/>
       </p:bgPr>
     </p:bg>
     <p:spTree>
@@ -9920,11 +10694,11 @@
           <a:bodyPr wrap="square" rtlCol="0" anchor="ctr"/>
           <a:lstStyle/>
           <a:p>
-            <a:pPr indent="0" marL="0">
-              <a:buNone/>
-            </a:pPr>
-            <a:r>
-              <a:rPr lang="en-US" sz="1100" b="1" spc="400" kern="0" dirty="0">
+            <a:pPr marL="0" indent="0">
+              <a:buNone/>
+            </a:pPr>
+            <a:r>
+              <a:rPr lang="en-US" sz="1100" b="1" kern="0" spc="400" dirty="0">
                 <a:solidFill>
                   <a:srgbClr val="8B0000"/>
                 </a:solidFill>
@@ -9959,7 +10733,7 @@
           <a:bodyPr wrap="square" lIns="0" tIns="0" rIns="0" bIns="0" rtlCol="0" anchor="ctr"/>
           <a:lstStyle/>
           <a:p>
-            <a:pPr indent="0" marL="0">
+            <a:pPr marL="0" indent="0">
               <a:buNone/>
             </a:pPr>
             <a:r>
@@ -9993,16 +10767,34 @@
         </p:nvGraphicFramePr>
         <p:xfrm>
           <a:off x="548640" y="1828800"/>
-          <a:ext cx="11064240" cy="914400"/>
+          <a:ext cx="11064240" cy="3200400"/>
         </p:xfrm>
         <a:graphic>
           <a:graphicData uri="http://schemas.openxmlformats.org/drawingml/2006/table">
             <a:tbl>
               <a:tblPr/>
               <a:tblGrid>
-                <a:gridCol w="2377440"/>
-                <a:gridCol w="2286000"/>
-                <a:gridCol w="6400800"/>
+                <a:gridCol w="2377440">
+                  <a:extLst>
+                    <a:ext uri="{9D8B030D-6E8A-4147-A177-3AD203B41FA5}">
+                      <a16:colId xmlns:a16="http://schemas.microsoft.com/office/drawing/2014/main" val="20000"/>
+                    </a:ext>
+                  </a:extLst>
+                </a:gridCol>
+                <a:gridCol w="2286000">
+                  <a:extLst>
+                    <a:ext uri="{9D8B030D-6E8A-4147-A177-3AD203B41FA5}">
+                      <a16:colId xmlns:a16="http://schemas.microsoft.com/office/drawing/2014/main" val="20001"/>
+                    </a:ext>
+                  </a:extLst>
+                </a:gridCol>
+                <a:gridCol w="6400800">
+                  <a:extLst>
+                    <a:ext uri="{9D8B030D-6E8A-4147-A177-3AD203B41FA5}">
+                      <a16:colId xmlns:a16="http://schemas.microsoft.com/office/drawing/2014/main" val="20002"/>
+                    </a:ext>
+                  </a:extLst>
+                </a:gridCol>
               </a:tblGrid>
               <a:tr h="640080">
                 <a:tc>
@@ -10010,7 +10802,7 @@
                     <a:bodyPr/>
                     <a:lstStyle/>
                     <a:p>
-                      <a:pPr indent="0" marL="0">
+                      <a:pPr marL="0" indent="0">
                         <a:buNone/>
                       </a:pPr>
                       <a:r>
@@ -10031,7 +10823,7 @@
                       </a:endParaRPr>
                     </a:p>
                   </a:txBody>
-                  <a:tcPr marL="91440" marR="91440" marT="45720" marB="45720" anchor="ctr">
+                  <a:tcPr anchor="ctr">
                     <a:lnL w="6350" cap="flat" cmpd="sng" algn="ctr">
                       <a:solidFill>
                         <a:srgbClr val="E5E7EB"/>
@@ -10078,7 +10870,7 @@
                     <a:bodyPr/>
                     <a:lstStyle/>
                     <a:p>
-                      <a:pPr indent="0" marL="0">
+                      <a:pPr marL="0" indent="0">
                         <a:buNone/>
                       </a:pPr>
                       <a:r>
@@ -10099,7 +10891,7 @@
                       </a:endParaRPr>
                     </a:p>
                   </a:txBody>
-                  <a:tcPr marL="91440" marR="91440" marT="45720" marB="45720" anchor="ctr">
+                  <a:tcPr anchor="ctr">
                     <a:lnL w="6350" cap="flat" cmpd="sng" algn="ctr">
                       <a:solidFill>
                         <a:srgbClr val="E5E7EB"/>
@@ -10146,7 +10938,7 @@
                     <a:bodyPr/>
                     <a:lstStyle/>
                     <a:p>
-                      <a:pPr indent="0" marL="0">
+                      <a:pPr marL="0" indent="0">
                         <a:buNone/>
                       </a:pPr>
                       <a:r>
@@ -10167,7 +10959,7 @@
                       </a:endParaRPr>
                     </a:p>
                   </a:txBody>
-                  <a:tcPr marL="91440" marR="91440" marT="45720" marB="45720" anchor="ctr">
+                  <a:tcPr anchor="ctr">
                     <a:lnL w="6350" cap="flat" cmpd="sng" algn="ctr">
                       <a:solidFill>
                         <a:srgbClr val="E5E7EB"/>
@@ -10209,6 +11001,11 @@
                     </a:solidFill>
                   </a:tcPr>
                 </a:tc>
+                <a:extLst>
+                  <a:ext uri="{0D108BD9-81ED-4DB2-BD59-A6C34878D82A}">
+                    <a16:rowId xmlns:a16="http://schemas.microsoft.com/office/drawing/2014/main" val="10000"/>
+                  </a:ext>
+                </a:extLst>
               </a:tr>
               <a:tr h="640080">
                 <a:tc>
@@ -10216,7 +11013,7 @@
                     <a:bodyPr/>
                     <a:lstStyle/>
                     <a:p>
-                      <a:pPr indent="0" marL="0">
+                      <a:pPr marL="0" indent="0">
                         <a:buNone/>
                       </a:pPr>
                       <a:r>
@@ -10237,7 +11034,7 @@
                       </a:endParaRPr>
                     </a:p>
                   </a:txBody>
-                  <a:tcPr marL="91440" marR="91440" marT="45720" marB="45720" anchor="ctr">
+                  <a:tcPr anchor="ctr">
                     <a:lnL w="6350" cap="flat" cmpd="sng" algn="ctr">
                       <a:solidFill>
                         <a:srgbClr val="E5E7EB"/>
@@ -10284,7 +11081,7 @@
                     <a:bodyPr/>
                     <a:lstStyle/>
                     <a:p>
-                      <a:pPr indent="0" marL="0">
+                      <a:pPr marL="0" indent="0">
                         <a:buNone/>
                       </a:pPr>
                       <a:r>
@@ -10305,7 +11102,7 @@
                       </a:endParaRPr>
                     </a:p>
                   </a:txBody>
-                  <a:tcPr marL="91440" marR="91440" marT="45720" marB="45720" anchor="ctr">
+                  <a:tcPr anchor="ctr">
                     <a:lnL w="6350" cap="flat" cmpd="sng" algn="ctr">
                       <a:solidFill>
                         <a:srgbClr val="E5E7EB"/>
@@ -10352,7 +11149,7 @@
                     <a:bodyPr/>
                     <a:lstStyle/>
                     <a:p>
-                      <a:pPr indent="0" marL="0">
+                      <a:pPr marL="0" indent="0">
                         <a:buNone/>
                       </a:pPr>
                       <a:r>
@@ -10373,7 +11170,7 @@
                       </a:endParaRPr>
                     </a:p>
                   </a:txBody>
-                  <a:tcPr marL="91440" marR="91440" marT="45720" marB="45720" anchor="ctr">
+                  <a:tcPr anchor="ctr">
                     <a:lnL w="6350" cap="flat" cmpd="sng" algn="ctr">
                       <a:solidFill>
                         <a:srgbClr val="E5E7EB"/>
@@ -10415,6 +11212,11 @@
                     </a:solidFill>
                   </a:tcPr>
                 </a:tc>
+                <a:extLst>
+                  <a:ext uri="{0D108BD9-81ED-4DB2-BD59-A6C34878D82A}">
+                    <a16:rowId xmlns:a16="http://schemas.microsoft.com/office/drawing/2014/main" val="10001"/>
+                  </a:ext>
+                </a:extLst>
               </a:tr>
               <a:tr h="640080">
                 <a:tc>
@@ -10422,7 +11224,7 @@
                     <a:bodyPr/>
                     <a:lstStyle/>
                     <a:p>
-                      <a:pPr indent="0" marL="0">
+                      <a:pPr marL="0" indent="0">
                         <a:buNone/>
                       </a:pPr>
                       <a:r>
@@ -10443,7 +11245,7 @@
                       </a:endParaRPr>
                     </a:p>
                   </a:txBody>
-                  <a:tcPr marL="91440" marR="91440" marT="45720" marB="45720" anchor="ctr">
+                  <a:tcPr anchor="ctr">
                     <a:lnL w="6350" cap="flat" cmpd="sng" algn="ctr">
                       <a:solidFill>
                         <a:srgbClr val="E5E7EB"/>
@@ -10487,7 +11289,7 @@
                     <a:bodyPr/>
                     <a:lstStyle/>
                     <a:p>
-                      <a:pPr indent="0" marL="0">
+                      <a:pPr marL="0" indent="0">
                         <a:buNone/>
                       </a:pPr>
                       <a:r>
@@ -10508,7 +11310,7 @@
                       </a:endParaRPr>
                     </a:p>
                   </a:txBody>
-                  <a:tcPr marL="91440" marR="91440" marT="45720" marB="45720" anchor="ctr">
+                  <a:tcPr anchor="ctr">
                     <a:lnL w="6350" cap="flat" cmpd="sng" algn="ctr">
                       <a:solidFill>
                         <a:srgbClr val="E5E7EB"/>
@@ -10552,7 +11354,7 @@
                     <a:bodyPr/>
                     <a:lstStyle/>
                     <a:p>
-                      <a:pPr indent="0" marL="0">
+                      <a:pPr marL="0" indent="0">
                         <a:buNone/>
                       </a:pPr>
                       <a:r>
@@ -10573,7 +11375,7 @@
                       </a:endParaRPr>
                     </a:p>
                   </a:txBody>
-                  <a:tcPr marL="91440" marR="91440" marT="45720" marB="45720" anchor="ctr">
+                  <a:tcPr anchor="ctr">
                     <a:lnL w="6350" cap="flat" cmpd="sng" algn="ctr">
                       <a:solidFill>
                         <a:srgbClr val="E5E7EB"/>
@@ -10612,6 +11414,11 @@
                     </a:lnB>
                   </a:tcPr>
                 </a:tc>
+                <a:extLst>
+                  <a:ext uri="{0D108BD9-81ED-4DB2-BD59-A6C34878D82A}">
+                    <a16:rowId xmlns:a16="http://schemas.microsoft.com/office/drawing/2014/main" val="10002"/>
+                  </a:ext>
+                </a:extLst>
               </a:tr>
               <a:tr h="640080">
                 <a:tc>
@@ -10619,7 +11426,7 @@
                     <a:bodyPr/>
                     <a:lstStyle/>
                     <a:p>
-                      <a:pPr indent="0" marL="0">
+                      <a:pPr marL="0" indent="0">
                         <a:buNone/>
                       </a:pPr>
                       <a:r>
@@ -10640,7 +11447,7 @@
                       </a:endParaRPr>
                     </a:p>
                   </a:txBody>
-                  <a:tcPr marL="91440" marR="91440" marT="45720" marB="45720" anchor="ctr">
+                  <a:tcPr anchor="ctr">
                     <a:lnL w="6350" cap="flat" cmpd="sng" algn="ctr">
                       <a:solidFill>
                         <a:srgbClr val="E5E7EB"/>
@@ -10687,7 +11494,7 @@
                     <a:bodyPr/>
                     <a:lstStyle/>
                     <a:p>
-                      <a:pPr indent="0" marL="0">
+                      <a:pPr marL="0" indent="0">
                         <a:buNone/>
                       </a:pPr>
                       <a:r>
@@ -10708,7 +11515,7 @@
                       </a:endParaRPr>
                     </a:p>
                   </a:txBody>
-                  <a:tcPr marL="91440" marR="91440" marT="45720" marB="45720" anchor="ctr">
+                  <a:tcPr anchor="ctr">
                     <a:lnL w="6350" cap="flat" cmpd="sng" algn="ctr">
                       <a:solidFill>
                         <a:srgbClr val="E5E7EB"/>
@@ -10755,7 +11562,7 @@
                     <a:bodyPr/>
                     <a:lstStyle/>
                     <a:p>
-                      <a:pPr indent="0" marL="0">
+                      <a:pPr marL="0" indent="0">
                         <a:buNone/>
                       </a:pPr>
                       <a:r>
@@ -10776,7 +11583,7 @@
                       </a:endParaRPr>
                     </a:p>
                   </a:txBody>
-                  <a:tcPr marL="91440" marR="91440" marT="45720" marB="45720" anchor="ctr">
+                  <a:tcPr anchor="ctr">
                     <a:lnL w="6350" cap="flat" cmpd="sng" algn="ctr">
                       <a:solidFill>
                         <a:srgbClr val="E5E7EB"/>
@@ -10818,6 +11625,11 @@
                     </a:solidFill>
                   </a:tcPr>
                 </a:tc>
+                <a:extLst>
+                  <a:ext uri="{0D108BD9-81ED-4DB2-BD59-A6C34878D82A}">
+                    <a16:rowId xmlns:a16="http://schemas.microsoft.com/office/drawing/2014/main" val="10003"/>
+                  </a:ext>
+                </a:extLst>
               </a:tr>
               <a:tr h="640080">
                 <a:tc>
@@ -10825,7 +11637,7 @@
                     <a:bodyPr/>
                     <a:lstStyle/>
                     <a:p>
-                      <a:pPr indent="0" marL="0">
+                      <a:pPr marL="0" indent="0">
                         <a:buNone/>
                       </a:pPr>
                       <a:r>
@@ -10846,7 +11658,7 @@
                       </a:endParaRPr>
                     </a:p>
                   </a:txBody>
-                  <a:tcPr marL="91440" marR="91440" marT="45720" marB="45720" anchor="ctr">
+                  <a:tcPr anchor="ctr">
                     <a:lnL w="6350" cap="flat" cmpd="sng" algn="ctr">
                       <a:solidFill>
                         <a:srgbClr val="E5E7EB"/>
@@ -10890,7 +11702,7 @@
                     <a:bodyPr/>
                     <a:lstStyle/>
                     <a:p>
-                      <a:pPr indent="0" marL="0">
+                      <a:pPr marL="0" indent="0">
                         <a:buNone/>
                       </a:pPr>
                       <a:r>
@@ -10911,7 +11723,7 @@
                       </a:endParaRPr>
                     </a:p>
                   </a:txBody>
-                  <a:tcPr marL="91440" marR="91440" marT="45720" marB="45720" anchor="ctr">
+                  <a:tcPr anchor="ctr">
                     <a:lnL w="6350" cap="flat" cmpd="sng" algn="ctr">
                       <a:solidFill>
                         <a:srgbClr val="E5E7EB"/>
@@ -10955,7 +11767,7 @@
                     <a:bodyPr/>
                     <a:lstStyle/>
                     <a:p>
-                      <a:pPr indent="0" marL="0">
+                      <a:pPr marL="0" indent="0">
                         <a:buNone/>
                       </a:pPr>
                       <a:r>
@@ -10976,7 +11788,7 @@
                       </a:endParaRPr>
                     </a:p>
                   </a:txBody>
-                  <a:tcPr marL="91440" marR="91440" marT="45720" marB="45720" anchor="ctr">
+                  <a:tcPr anchor="ctr">
                     <a:lnL w="6350" cap="flat" cmpd="sng" algn="ctr">
                       <a:solidFill>
                         <a:srgbClr val="E5E7EB"/>
@@ -11015,6 +11827,11 @@
                     </a:lnB>
                   </a:tcPr>
                 </a:tc>
+                <a:extLst>
+                  <a:ext uri="{0D108BD9-81ED-4DB2-BD59-A6C34878D82A}">
+                    <a16:rowId xmlns:a16="http://schemas.microsoft.com/office/drawing/2014/main" val="10004"/>
+                  </a:ext>
+                </a:extLst>
               </a:tr>
             </a:tbl>
           </a:graphicData>
@@ -11044,6 +11861,13 @@
             <a:prstDash val="solid"/>
           </a:ln>
         </p:spPr>
+        <p:txBody>
+          <a:bodyPr/>
+          <a:lstStyle/>
+          <a:p>
+            <a:endParaRPr lang="es-GT"/>
+          </a:p>
+        </p:txBody>
       </p:sp>
       <p:sp>
         <p:nvSpPr>
@@ -11066,7 +11890,7 @@
           <a:bodyPr wrap="square" lIns="0" tIns="0" rIns="0" bIns="0" rtlCol="0" anchor="ctr"/>
           <a:lstStyle/>
           <a:p>
-            <a:pPr indent="0" marL="0">
+            <a:pPr marL="0" indent="0">
               <a:buNone/>
             </a:pPr>
             <a:r>
@@ -11105,7 +11929,7 @@
           <a:bodyPr wrap="square" lIns="0" tIns="0" rIns="0" bIns="0" rtlCol="0" anchor="ctr"/>
           <a:lstStyle/>
           <a:p>
-            <a:pPr indent="0" marL="0">
+            <a:pPr marL="0" indent="0">
               <a:buNone/>
             </a:pPr>
             <a:r>
@@ -11125,7 +11949,7 @@
       </p:sp>
       <p:sp>
         <p:nvSpPr>
-          <p:cNvPr id="8" name="Shape 5"/>
+          <p:cNvPr id="4" name="Shape 5"/>
           <p:cNvSpPr/>
           <p:nvPr/>
         </p:nvSpPr>
@@ -11147,6 +11971,13 @@
             <a:prstDash val="solid"/>
           </a:ln>
         </p:spPr>
+        <p:txBody>
+          <a:bodyPr/>
+          <a:lstStyle/>
+          <a:p>
+            <a:endParaRPr lang="es-GT"/>
+          </a:p>
+        </p:txBody>
       </p:sp>
       <p:sp>
         <p:nvSpPr>
@@ -11169,7 +12000,7 @@
           <a:bodyPr wrap="square" rtlCol="0" anchor="ctr"/>
           <a:lstStyle/>
           <a:p>
-            <a:pPr algn="l" indent="0" marL="0">
+            <a:pPr marL="0" indent="0" algn="l">
               <a:buNone/>
             </a:pPr>
             <a:r>
@@ -11208,7 +12039,7 @@
           <a:bodyPr wrap="square" rtlCol="0" anchor="ctr"/>
           <a:lstStyle/>
           <a:p>
-            <a:pPr algn="r" indent="0" marL="0">
+            <a:pPr marL="0" indent="0" algn="r">
               <a:buNone/>
             </a:pPr>
             <a:r>
@@ -11242,6 +12073,7 @@
         <a:solidFill>
           <a:srgbClr val="FFFFFF"/>
         </a:solidFill>
+        <a:effectLst/>
       </p:bgPr>
     </p:bg>
     <p:spTree>
@@ -11279,11 +12111,11 @@
           <a:bodyPr wrap="square" rtlCol="0" anchor="ctr"/>
           <a:lstStyle/>
           <a:p>
-            <a:pPr indent="0" marL="0">
-              <a:buNone/>
-            </a:pPr>
-            <a:r>
-              <a:rPr lang="en-US" sz="1100" b="1" spc="400" kern="0" dirty="0">
+            <a:pPr marL="0" indent="0">
+              <a:buNone/>
+            </a:pPr>
+            <a:r>
+              <a:rPr lang="en-US" sz="1100" b="1" kern="0" spc="400" dirty="0">
                 <a:solidFill>
                   <a:srgbClr val="8B0000"/>
                 </a:solidFill>
@@ -11318,7 +12150,7 @@
           <a:bodyPr wrap="square" lIns="0" tIns="0" rIns="0" bIns="0" rtlCol="0" anchor="ctr"/>
           <a:lstStyle/>
           <a:p>
-            <a:pPr indent="0" marL="0">
+            <a:pPr marL="0" indent="0">
               <a:buNone/>
             </a:pPr>
             <a:r>
@@ -11357,7 +12189,7 @@
           <a:bodyPr wrap="square" rtlCol="0" anchor="ctr"/>
           <a:lstStyle/>
           <a:p>
-            <a:pPr indent="0" marL="0">
+            <a:pPr marL="0" indent="0">
               <a:buNone/>
             </a:pPr>
             <a:r>
@@ -11399,6 +12231,13 @@
             <a:prstDash val="solid"/>
           </a:ln>
         </p:spPr>
+        <p:txBody>
+          <a:bodyPr/>
+          <a:lstStyle/>
+          <a:p>
+            <a:endParaRPr lang="es-GT"/>
+          </a:p>
+        </p:txBody>
       </p:sp>
       <p:sp>
         <p:nvSpPr>
@@ -11424,6 +12263,13 @@
             <a:prstDash val="solid"/>
           </a:ln>
         </p:spPr>
+        <p:txBody>
+          <a:bodyPr/>
+          <a:lstStyle/>
+          <a:p>
+            <a:endParaRPr lang="es-GT"/>
+          </a:p>
+        </p:txBody>
       </p:sp>
       <p:sp>
         <p:nvSpPr>
@@ -11446,7 +12292,7 @@
           <a:bodyPr wrap="square" lIns="0" tIns="0" rIns="0" bIns="0" rtlCol="0" anchor="ctr"/>
           <a:lstStyle/>
           <a:p>
-            <a:pPr indent="0" marL="0">
+            <a:pPr marL="0" indent="0">
               <a:buNone/>
             </a:pPr>
             <a:r>
@@ -11485,7 +12331,7 @@
           <a:bodyPr wrap="square" lIns="0" tIns="0" rIns="0" bIns="0" rtlCol="0" anchor="ctr"/>
           <a:lstStyle/>
           <a:p>
-            <a:pPr indent="0" marL="0">
+            <a:pPr marL="0" indent="0">
               <a:buNone/>
             </a:pPr>
             <a:r>
@@ -11527,6 +12373,13 @@
             <a:prstDash val="solid"/>
           </a:ln>
         </p:spPr>
+        <p:txBody>
+          <a:bodyPr/>
+          <a:lstStyle/>
+          <a:p>
+            <a:endParaRPr lang="es-GT"/>
+          </a:p>
+        </p:txBody>
       </p:sp>
       <p:sp>
         <p:nvSpPr>
@@ -11552,6 +12405,13 @@
             <a:prstDash val="solid"/>
           </a:ln>
         </p:spPr>
+        <p:txBody>
+          <a:bodyPr/>
+          <a:lstStyle/>
+          <a:p>
+            <a:endParaRPr lang="es-GT"/>
+          </a:p>
+        </p:txBody>
       </p:sp>
       <p:sp>
         <p:nvSpPr>
@@ -11574,7 +12434,7 @@
           <a:bodyPr wrap="square" lIns="0" tIns="0" rIns="0" bIns="0" rtlCol="0" anchor="ctr"/>
           <a:lstStyle/>
           <a:p>
-            <a:pPr indent="0" marL="0">
+            <a:pPr marL="0" indent="0">
               <a:buNone/>
             </a:pPr>
             <a:r>
@@ -11613,7 +12473,7 @@
           <a:bodyPr wrap="square" lIns="0" tIns="0" rIns="0" bIns="0" rtlCol="0" anchor="ctr"/>
           <a:lstStyle/>
           <a:p>
-            <a:pPr indent="0" marL="0">
+            <a:pPr marL="0" indent="0">
               <a:buNone/>
             </a:pPr>
             <a:r>
@@ -11655,6 +12515,13 @@
             <a:prstDash val="solid"/>
           </a:ln>
         </p:spPr>
+        <p:txBody>
+          <a:bodyPr/>
+          <a:lstStyle/>
+          <a:p>
+            <a:endParaRPr lang="es-GT"/>
+          </a:p>
+        </p:txBody>
       </p:sp>
       <p:sp>
         <p:nvSpPr>
@@ -11680,6 +12547,13 @@
             <a:prstDash val="solid"/>
           </a:ln>
         </p:spPr>
+        <p:txBody>
+          <a:bodyPr/>
+          <a:lstStyle/>
+          <a:p>
+            <a:endParaRPr lang="es-GT"/>
+          </a:p>
+        </p:txBody>
       </p:sp>
       <p:sp>
         <p:nvSpPr>
@@ -11702,7 +12576,7 @@
           <a:bodyPr wrap="square" lIns="0" tIns="0" rIns="0" bIns="0" rtlCol="0" anchor="ctr"/>
           <a:lstStyle/>
           <a:p>
-            <a:pPr indent="0" marL="0">
+            <a:pPr marL="0" indent="0">
               <a:buNone/>
             </a:pPr>
             <a:r>
@@ -11741,7 +12615,7 @@
           <a:bodyPr wrap="square" lIns="0" tIns="0" rIns="0" bIns="0" rtlCol="0" anchor="ctr"/>
           <a:lstStyle/>
           <a:p>
-            <a:pPr indent="0" marL="0">
+            <a:pPr marL="0" indent="0">
               <a:buNone/>
             </a:pPr>
             <a:r>
@@ -11783,6 +12657,13 @@
             <a:prstDash val="solid"/>
           </a:ln>
         </p:spPr>
+        <p:txBody>
+          <a:bodyPr/>
+          <a:lstStyle/>
+          <a:p>
+            <a:endParaRPr lang="es-GT"/>
+          </a:p>
+        </p:txBody>
       </p:sp>
       <p:sp>
         <p:nvSpPr>
@@ -11808,6 +12689,13 @@
             <a:prstDash val="solid"/>
           </a:ln>
         </p:spPr>
+        <p:txBody>
+          <a:bodyPr/>
+          <a:lstStyle/>
+          <a:p>
+            <a:endParaRPr lang="es-GT"/>
+          </a:p>
+        </p:txBody>
       </p:sp>
       <p:sp>
         <p:nvSpPr>
@@ -11830,7 +12718,7 @@
           <a:bodyPr wrap="square" lIns="0" tIns="0" rIns="0" bIns="0" rtlCol="0" anchor="ctr"/>
           <a:lstStyle/>
           <a:p>
-            <a:pPr indent="0" marL="0">
+            <a:pPr marL="0" indent="0">
               <a:buNone/>
             </a:pPr>
             <a:r>
@@ -11869,7 +12757,7 @@
           <a:bodyPr wrap="square" lIns="0" tIns="0" rIns="0" bIns="0" rtlCol="0" anchor="ctr"/>
           <a:lstStyle/>
           <a:p>
-            <a:pPr indent="0" marL="0">
+            <a:pPr marL="0" indent="0">
               <a:buNone/>
             </a:pPr>
             <a:r>
@@ -11911,6 +12799,13 @@
             <a:prstDash val="solid"/>
           </a:ln>
         </p:spPr>
+        <p:txBody>
+          <a:bodyPr/>
+          <a:lstStyle/>
+          <a:p>
+            <a:endParaRPr lang="es-GT"/>
+          </a:p>
+        </p:txBody>
       </p:sp>
       <p:sp>
         <p:nvSpPr>
@@ -11936,6 +12831,13 @@
             <a:prstDash val="solid"/>
           </a:ln>
         </p:spPr>
+        <p:txBody>
+          <a:bodyPr/>
+          <a:lstStyle/>
+          <a:p>
+            <a:endParaRPr lang="es-GT"/>
+          </a:p>
+        </p:txBody>
       </p:sp>
       <p:sp>
         <p:nvSpPr>
@@ -11958,7 +12860,7 @@
           <a:bodyPr wrap="square" lIns="0" tIns="0" rIns="0" bIns="0" rtlCol="0" anchor="ctr"/>
           <a:lstStyle/>
           <a:p>
-            <a:pPr indent="0" marL="0">
+            <a:pPr marL="0" indent="0">
               <a:buNone/>
             </a:pPr>
             <a:r>
@@ -11997,7 +12899,7 @@
           <a:bodyPr wrap="square" lIns="0" tIns="0" rIns="0" bIns="0" rtlCol="0" anchor="ctr"/>
           <a:lstStyle/>
           <a:p>
-            <a:pPr indent="0" marL="0">
+            <a:pPr marL="0" indent="0">
               <a:buNone/>
             </a:pPr>
             <a:r>
@@ -12039,6 +12941,13 @@
             <a:prstDash val="solid"/>
           </a:ln>
         </p:spPr>
+        <p:txBody>
+          <a:bodyPr/>
+          <a:lstStyle/>
+          <a:p>
+            <a:endParaRPr lang="es-GT"/>
+          </a:p>
+        </p:txBody>
       </p:sp>
       <p:sp>
         <p:nvSpPr>
@@ -12064,6 +12973,13 @@
             <a:prstDash val="solid"/>
           </a:ln>
         </p:spPr>
+        <p:txBody>
+          <a:bodyPr/>
+          <a:lstStyle/>
+          <a:p>
+            <a:endParaRPr lang="es-GT"/>
+          </a:p>
+        </p:txBody>
       </p:sp>
       <p:sp>
         <p:nvSpPr>
@@ -12086,7 +13002,7 @@
           <a:bodyPr wrap="square" lIns="0" tIns="0" rIns="0" bIns="0" rtlCol="0" anchor="ctr"/>
           <a:lstStyle/>
           <a:p>
-            <a:pPr indent="0" marL="0">
+            <a:pPr marL="0" indent="0">
               <a:buNone/>
             </a:pPr>
             <a:r>
@@ -12125,7 +13041,7 @@
           <a:bodyPr wrap="square" lIns="0" tIns="0" rIns="0" bIns="0" rtlCol="0" anchor="ctr"/>
           <a:lstStyle/>
           <a:p>
-            <a:pPr indent="0" marL="0">
+            <a:pPr marL="0" indent="0">
               <a:buNone/>
             </a:pPr>
             <a:r>
@@ -12167,6 +13083,13 @@
             <a:prstDash val="solid"/>
           </a:ln>
         </p:spPr>
+        <p:txBody>
+          <a:bodyPr/>
+          <a:lstStyle/>
+          <a:p>
+            <a:endParaRPr lang="es-GT"/>
+          </a:p>
+        </p:txBody>
       </p:sp>
       <p:sp>
         <p:nvSpPr>
@@ -12192,6 +13115,13 @@
             <a:prstDash val="solid"/>
           </a:ln>
         </p:spPr>
+        <p:txBody>
+          <a:bodyPr/>
+          <a:lstStyle/>
+          <a:p>
+            <a:endParaRPr lang="es-GT"/>
+          </a:p>
+        </p:txBody>
       </p:sp>
       <p:sp>
         <p:nvSpPr>
@@ -12214,7 +13144,7 @@
           <a:bodyPr wrap="square" lIns="0" tIns="0" rIns="0" bIns="0" rtlCol="0" anchor="ctr"/>
           <a:lstStyle/>
           <a:p>
-            <a:pPr indent="0" marL="0">
+            <a:pPr marL="0" indent="0">
               <a:buNone/>
             </a:pPr>
             <a:r>
@@ -12253,7 +13183,7 @@
           <a:bodyPr wrap="square" lIns="0" tIns="0" rIns="0" bIns="0" rtlCol="0" anchor="ctr"/>
           <a:lstStyle/>
           <a:p>
-            <a:pPr indent="0" marL="0">
+            <a:pPr marL="0" indent="0">
               <a:buNone/>
             </a:pPr>
             <a:r>
@@ -12292,7 +13222,7 @@
           <a:bodyPr wrap="square" rtlCol="0" anchor="ctr"/>
           <a:lstStyle/>
           <a:p>
-            <a:pPr indent="0" marL="0">
+            <a:pPr marL="0" indent="0">
               <a:buNone/>
             </a:pPr>
             <a:r>
@@ -12334,6 +13264,13 @@
             <a:prstDash val="solid"/>
           </a:ln>
         </p:spPr>
+        <p:txBody>
+          <a:bodyPr/>
+          <a:lstStyle/>
+          <a:p>
+            <a:endParaRPr lang="es-GT"/>
+          </a:p>
+        </p:txBody>
       </p:sp>
       <p:sp>
         <p:nvSpPr>
@@ -12356,7 +13293,7 @@
           <a:bodyPr wrap="square" rtlCol="0" anchor="ctr"/>
           <a:lstStyle/>
           <a:p>
-            <a:pPr algn="l" indent="0" marL="0">
+            <a:pPr marL="0" indent="0" algn="l">
               <a:buNone/>
             </a:pPr>
             <a:r>
@@ -12395,7 +13332,7 @@
           <a:bodyPr wrap="square" rtlCol="0" anchor="ctr"/>
           <a:lstStyle/>
           <a:p>
-            <a:pPr algn="r" indent="0" marL="0">
+            <a:pPr marL="0" indent="0" algn="r">
               <a:buNone/>
             </a:pPr>
             <a:r>
@@ -12429,6 +13366,7 @@
         <a:solidFill>
           <a:srgbClr val="FFFFFF"/>
         </a:solidFill>
+        <a:effectLst/>
       </p:bgPr>
     </p:bg>
     <p:spTree>
@@ -12466,11 +13404,11 @@
           <a:bodyPr wrap="square" rtlCol="0" anchor="ctr"/>
           <a:lstStyle/>
           <a:p>
-            <a:pPr indent="0" marL="0">
-              <a:buNone/>
-            </a:pPr>
-            <a:r>
-              <a:rPr lang="en-US" sz="1100" b="1" spc="400" kern="0" dirty="0">
+            <a:pPr marL="0" indent="0">
+              <a:buNone/>
+            </a:pPr>
+            <a:r>
+              <a:rPr lang="en-US" sz="1100" b="1" kern="0" spc="400" dirty="0">
                 <a:solidFill>
                   <a:srgbClr val="8B0000"/>
                 </a:solidFill>
@@ -12505,7 +13443,7 @@
           <a:bodyPr wrap="square" lIns="0" tIns="0" rIns="0" bIns="0" rtlCol="0" anchor="ctr"/>
           <a:lstStyle/>
           <a:p>
-            <a:pPr indent="0" marL="0">
+            <a:pPr marL="0" indent="0">
               <a:buNone/>
             </a:pPr>
             <a:r>
@@ -12547,6 +13485,13 @@
             <a:prstDash val="solid"/>
           </a:ln>
         </p:spPr>
+        <p:txBody>
+          <a:bodyPr/>
+          <a:lstStyle/>
+          <a:p>
+            <a:endParaRPr lang="es-GT"/>
+          </a:p>
+        </p:txBody>
       </p:sp>
       <p:sp>
         <p:nvSpPr>
@@ -12572,6 +13517,13 @@
             <a:prstDash val="solid"/>
           </a:ln>
         </p:spPr>
+        <p:txBody>
+          <a:bodyPr/>
+          <a:lstStyle/>
+          <a:p>
+            <a:endParaRPr lang="es-GT"/>
+          </a:p>
+        </p:txBody>
       </p:sp>
       <p:sp>
         <p:nvSpPr>
@@ -12594,7 +13546,7 @@
           <a:bodyPr wrap="square" lIns="0" tIns="0" rIns="0" bIns="0" rtlCol="0" anchor="ctr"/>
           <a:lstStyle/>
           <a:p>
-            <a:pPr algn="ctr" indent="0" marL="0">
+            <a:pPr marL="0" indent="0" algn="ctr">
               <a:buNone/>
             </a:pPr>
             <a:r>
@@ -12633,7 +13585,7 @@
           <a:bodyPr wrap="square" lIns="0" tIns="0" rIns="0" bIns="0" rtlCol="0" anchor="ctr"/>
           <a:lstStyle/>
           <a:p>
-            <a:pPr indent="0" marL="0">
+            <a:pPr marL="0" indent="0">
               <a:buNone/>
             </a:pPr>
             <a:r>
@@ -12672,7 +13624,7 @@
           <a:bodyPr wrap="square" lIns="0" tIns="0" rIns="0" bIns="0" rtlCol="0" anchor="ctr"/>
           <a:lstStyle/>
           <a:p>
-            <a:pPr indent="0" marL="0">
+            <a:pPr marL="0" indent="0">
               <a:buNone/>
             </a:pPr>
             <a:r>
@@ -12714,6 +13666,13 @@
             <a:prstDash val="solid"/>
           </a:ln>
         </p:spPr>
+        <p:txBody>
+          <a:bodyPr/>
+          <a:lstStyle/>
+          <a:p>
+            <a:endParaRPr lang="es-GT"/>
+          </a:p>
+        </p:txBody>
       </p:sp>
       <p:sp>
         <p:nvSpPr>
@@ -12739,6 +13698,13 @@
             <a:prstDash val="solid"/>
           </a:ln>
         </p:spPr>
+        <p:txBody>
+          <a:bodyPr/>
+          <a:lstStyle/>
+          <a:p>
+            <a:endParaRPr lang="es-GT"/>
+          </a:p>
+        </p:txBody>
       </p:sp>
       <p:sp>
         <p:nvSpPr>
@@ -12761,7 +13727,7 @@
           <a:bodyPr wrap="square" lIns="0" tIns="0" rIns="0" bIns="0" rtlCol="0" anchor="ctr"/>
           <a:lstStyle/>
           <a:p>
-            <a:pPr algn="ctr" indent="0" marL="0">
+            <a:pPr marL="0" indent="0" algn="ctr">
               <a:buNone/>
             </a:pPr>
             <a:r>
@@ -12800,7 +13766,7 @@
           <a:bodyPr wrap="square" lIns="0" tIns="0" rIns="0" bIns="0" rtlCol="0" anchor="ctr"/>
           <a:lstStyle/>
           <a:p>
-            <a:pPr indent="0" marL="0">
+            <a:pPr marL="0" indent="0">
               <a:buNone/>
             </a:pPr>
             <a:r>
@@ -12839,7 +13805,7 @@
           <a:bodyPr wrap="square" lIns="0" tIns="0" rIns="0" bIns="0" rtlCol="0" anchor="ctr"/>
           <a:lstStyle/>
           <a:p>
-            <a:pPr indent="0" marL="0">
+            <a:pPr marL="0" indent="0">
               <a:buNone/>
             </a:pPr>
             <a:r>
@@ -12881,6 +13847,13 @@
             <a:prstDash val="solid"/>
           </a:ln>
         </p:spPr>
+        <p:txBody>
+          <a:bodyPr/>
+          <a:lstStyle/>
+          <a:p>
+            <a:endParaRPr lang="es-GT"/>
+          </a:p>
+        </p:txBody>
       </p:sp>
       <p:sp>
         <p:nvSpPr>
@@ -12906,6 +13879,13 @@
             <a:prstDash val="solid"/>
           </a:ln>
         </p:spPr>
+        <p:txBody>
+          <a:bodyPr/>
+          <a:lstStyle/>
+          <a:p>
+            <a:endParaRPr lang="es-GT"/>
+          </a:p>
+        </p:txBody>
       </p:sp>
       <p:sp>
         <p:nvSpPr>
@@ -12928,7 +13908,7 @@
           <a:bodyPr wrap="square" lIns="0" tIns="0" rIns="0" bIns="0" rtlCol="0" anchor="ctr"/>
           <a:lstStyle/>
           <a:p>
-            <a:pPr algn="ctr" indent="0" marL="0">
+            <a:pPr marL="0" indent="0" algn="ctr">
               <a:buNone/>
             </a:pPr>
             <a:r>
@@ -12967,7 +13947,7 @@
           <a:bodyPr wrap="square" lIns="0" tIns="0" rIns="0" bIns="0" rtlCol="0" anchor="ctr"/>
           <a:lstStyle/>
           <a:p>
-            <a:pPr indent="0" marL="0">
+            <a:pPr marL="0" indent="0">
               <a:buNone/>
             </a:pPr>
             <a:r>
@@ -13006,7 +13986,7 @@
           <a:bodyPr wrap="square" lIns="0" tIns="0" rIns="0" bIns="0" rtlCol="0" anchor="ctr"/>
           <a:lstStyle/>
           <a:p>
-            <a:pPr indent="0" marL="0">
+            <a:pPr marL="0" indent="0">
               <a:buNone/>
             </a:pPr>
             <a:r>
@@ -13048,6 +14028,13 @@
             <a:prstDash val="solid"/>
           </a:ln>
         </p:spPr>
+        <p:txBody>
+          <a:bodyPr/>
+          <a:lstStyle/>
+          <a:p>
+            <a:endParaRPr lang="es-GT"/>
+          </a:p>
+        </p:txBody>
       </p:sp>
       <p:sp>
         <p:nvSpPr>
@@ -13073,6 +14060,13 @@
             <a:prstDash val="solid"/>
           </a:ln>
         </p:spPr>
+        <p:txBody>
+          <a:bodyPr/>
+          <a:lstStyle/>
+          <a:p>
+            <a:endParaRPr lang="es-GT"/>
+          </a:p>
+        </p:txBody>
       </p:sp>
       <p:sp>
         <p:nvSpPr>
@@ -13095,7 +14089,7 @@
           <a:bodyPr wrap="square" lIns="0" tIns="0" rIns="0" bIns="0" rtlCol="0" anchor="ctr"/>
           <a:lstStyle/>
           <a:p>
-            <a:pPr algn="ctr" indent="0" marL="0">
+            <a:pPr marL="0" indent="0" algn="ctr">
               <a:buNone/>
             </a:pPr>
             <a:r>
@@ -13134,7 +14128,7 @@
           <a:bodyPr wrap="square" lIns="0" tIns="0" rIns="0" bIns="0" rtlCol="0" anchor="ctr"/>
           <a:lstStyle/>
           <a:p>
-            <a:pPr indent="0" marL="0">
+            <a:pPr marL="0" indent="0">
               <a:buNone/>
             </a:pPr>
             <a:r>
@@ -13173,7 +14167,7 @@
           <a:bodyPr wrap="square" lIns="0" tIns="0" rIns="0" bIns="0" rtlCol="0" anchor="ctr"/>
           <a:lstStyle/>
           <a:p>
-            <a:pPr indent="0" marL="0">
+            <a:pPr marL="0" indent="0">
               <a:buNone/>
             </a:pPr>
             <a:r>
@@ -13215,6 +14209,13 @@
             <a:prstDash val="solid"/>
           </a:ln>
         </p:spPr>
+        <p:txBody>
+          <a:bodyPr/>
+          <a:lstStyle/>
+          <a:p>
+            <a:endParaRPr lang="es-GT"/>
+          </a:p>
+        </p:txBody>
       </p:sp>
       <p:sp>
         <p:nvSpPr>
@@ -13240,6 +14241,13 @@
             <a:prstDash val="solid"/>
           </a:ln>
         </p:spPr>
+        <p:txBody>
+          <a:bodyPr/>
+          <a:lstStyle/>
+          <a:p>
+            <a:endParaRPr lang="es-GT"/>
+          </a:p>
+        </p:txBody>
       </p:sp>
       <p:sp>
         <p:nvSpPr>
@@ -13262,7 +14270,7 @@
           <a:bodyPr wrap="square" lIns="0" tIns="0" rIns="0" bIns="0" rtlCol="0" anchor="ctr"/>
           <a:lstStyle/>
           <a:p>
-            <a:pPr algn="ctr" indent="0" marL="0">
+            <a:pPr marL="0" indent="0" algn="ctr">
               <a:buNone/>
             </a:pPr>
             <a:r>
@@ -13301,7 +14309,7 @@
           <a:bodyPr wrap="square" lIns="0" tIns="0" rIns="0" bIns="0" rtlCol="0" anchor="ctr"/>
           <a:lstStyle/>
           <a:p>
-            <a:pPr indent="0" marL="0">
+            <a:pPr marL="0" indent="0">
               <a:buNone/>
             </a:pPr>
             <a:r>
@@ -13340,7 +14348,7 @@
           <a:bodyPr wrap="square" lIns="0" tIns="0" rIns="0" bIns="0" rtlCol="0" anchor="ctr"/>
           <a:lstStyle/>
           <a:p>
-            <a:pPr indent="0" marL="0">
+            <a:pPr marL="0" indent="0">
               <a:buNone/>
             </a:pPr>
             <a:r>
@@ -13382,6 +14390,13 @@
             <a:prstDash val="solid"/>
           </a:ln>
         </p:spPr>
+        <p:txBody>
+          <a:bodyPr/>
+          <a:lstStyle/>
+          <a:p>
+            <a:endParaRPr lang="es-GT"/>
+          </a:p>
+        </p:txBody>
       </p:sp>
       <p:sp>
         <p:nvSpPr>
@@ -13407,6 +14422,13 @@
             <a:prstDash val="solid"/>
           </a:ln>
         </p:spPr>
+        <p:txBody>
+          <a:bodyPr/>
+          <a:lstStyle/>
+          <a:p>
+            <a:endParaRPr lang="es-GT"/>
+          </a:p>
+        </p:txBody>
       </p:sp>
       <p:sp>
         <p:nvSpPr>
@@ -13429,7 +14451,7 @@
           <a:bodyPr wrap="square" lIns="0" tIns="0" rIns="0" bIns="0" rtlCol="0" anchor="ctr"/>
           <a:lstStyle/>
           <a:p>
-            <a:pPr algn="ctr" indent="0" marL="0">
+            <a:pPr marL="0" indent="0" algn="ctr">
               <a:buNone/>
             </a:pPr>
             <a:r>
@@ -13468,7 +14490,7 @@
           <a:bodyPr wrap="square" lIns="0" tIns="0" rIns="0" bIns="0" rtlCol="0" anchor="ctr"/>
           <a:lstStyle/>
           <a:p>
-            <a:pPr indent="0" marL="0">
+            <a:pPr marL="0" indent="0">
               <a:buNone/>
             </a:pPr>
             <a:r>
@@ -13507,7 +14529,7 @@
           <a:bodyPr wrap="square" lIns="0" tIns="0" rIns="0" bIns="0" rtlCol="0" anchor="ctr"/>
           <a:lstStyle/>
           <a:p>
-            <a:pPr indent="0" marL="0">
+            <a:pPr marL="0" indent="0">
               <a:buNone/>
             </a:pPr>
             <a:r>
@@ -13546,7 +14568,7 @@
           <a:bodyPr wrap="square" rtlCol="0" anchor="ctr"/>
           <a:lstStyle/>
           <a:p>
-            <a:pPr indent="0" marL="0">
+            <a:pPr marL="0" indent="0">
               <a:buNone/>
             </a:pPr>
             <a:r>
@@ -13588,6 +14610,13 @@
             <a:prstDash val="solid"/>
           </a:ln>
         </p:spPr>
+        <p:txBody>
+          <a:bodyPr/>
+          <a:lstStyle/>
+          <a:p>
+            <a:endParaRPr lang="es-GT"/>
+          </a:p>
+        </p:txBody>
       </p:sp>
       <p:sp>
         <p:nvSpPr>
@@ -13610,7 +14639,7 @@
           <a:bodyPr wrap="square" rtlCol="0" anchor="ctr"/>
           <a:lstStyle/>
           <a:p>
-            <a:pPr algn="l" indent="0" marL="0">
+            <a:pPr marL="0" indent="0" algn="l">
               <a:buNone/>
             </a:pPr>
             <a:r>
@@ -13649,7 +14678,7 @@
           <a:bodyPr wrap="square" rtlCol="0" anchor="ctr"/>
           <a:lstStyle/>
           <a:p>
-            <a:pPr algn="r" indent="0" marL="0">
+            <a:pPr marL="0" indent="0" algn="r">
               <a:buNone/>
             </a:pPr>
             <a:r>
@@ -13968,4 +14997,341 @@
     </a:ext>
   </a:extLst>
 </a:theme>
+</file>
+
+<file path=ppt/theme/theme2.xml><?xml version="1.0" encoding="utf-8"?>
+<a:theme xmlns:a="http://schemas.openxmlformats.org/drawingml/2006/main" name="Tema de Office">
+  <a:themeElements>
+    <a:clrScheme name="Office">
+      <a:dk1>
+        <a:sysClr val="windowText" lastClr="000000"/>
+      </a:dk1>
+      <a:lt1>
+        <a:sysClr val="window" lastClr="FFFFFF"/>
+      </a:lt1>
+      <a:dk2>
+        <a:srgbClr val="0E2841"/>
+      </a:dk2>
+      <a:lt2>
+        <a:srgbClr val="E8E8E8"/>
+      </a:lt2>
+      <a:accent1>
+        <a:srgbClr val="156082"/>
+      </a:accent1>
+      <a:accent2>
+        <a:srgbClr val="E97132"/>
+      </a:accent2>
+      <a:accent3>
+        <a:srgbClr val="196B24"/>
+      </a:accent3>
+      <a:accent4>
+        <a:srgbClr val="0F9ED5"/>
+      </a:accent4>
+      <a:accent5>
+        <a:srgbClr val="A02B93"/>
+      </a:accent5>
+      <a:accent6>
+        <a:srgbClr val="4EA72E"/>
+      </a:accent6>
+      <a:hlink>
+        <a:srgbClr val="467886"/>
+      </a:hlink>
+      <a:folHlink>
+        <a:srgbClr val="96607D"/>
+      </a:folHlink>
+    </a:clrScheme>
+    <a:fontScheme name="Office">
+      <a:majorFont>
+        <a:latin typeface="Aptos Display" panose="02110004020202020204"/>
+        <a:ea typeface=""/>
+        <a:cs typeface=""/>
+        <a:font script="Jpan" typeface="游ゴシック Light"/>
+        <a:font script="Hang" typeface="맑은 고딕"/>
+        <a:font script="Hans" typeface="等线 Light"/>
+        <a:font script="Hant" typeface="新細明體"/>
+        <a:font script="Arab" typeface="Times New Roman"/>
+        <a:font script="Hebr" typeface="Times New Roman"/>
+        <a:font script="Thai" typeface="Angsana New"/>
+        <a:font script="Ethi" typeface="Nyala"/>
+        <a:font script="Beng" typeface="Vrinda"/>
+        <a:font script="Gujr" typeface="Shruti"/>
+        <a:font script="Khmr" typeface="MoolBoran"/>
+        <a:font script="Knda" typeface="Tunga"/>
+        <a:font script="Guru" typeface="Raavi"/>
+        <a:font script="Cans" typeface="Euphemia"/>
+        <a:font script="Cher" typeface="Plantagenet Cherokee"/>
+        <a:font script="Yiii" typeface="Microsoft Yi Baiti"/>
+        <a:font script="Tibt" typeface="Microsoft Himalaya"/>
+        <a:font script="Thaa" typeface="MV Boli"/>
+        <a:font script="Deva" typeface="Mangal"/>
+        <a:font script="Telu" typeface="Gautami"/>
+        <a:font script="Taml" typeface="Latha"/>
+        <a:font script="Syrc" typeface="Estrangelo Edessa"/>
+        <a:font script="Orya" typeface="Kalinga"/>
+        <a:font script="Mlym" typeface="Kartika"/>
+        <a:font script="Laoo" typeface="DokChampa"/>
+        <a:font script="Sinh" typeface="Iskoola Pota"/>
+        <a:font script="Mong" typeface="Mongolian Baiti"/>
+        <a:font script="Viet" typeface="Times New Roman"/>
+        <a:font script="Uigh" typeface="Microsoft Uighur"/>
+        <a:font script="Geor" typeface="Sylfaen"/>
+        <a:font script="Armn" typeface="Arial"/>
+        <a:font script="Bugi" typeface="Leelawadee UI"/>
+        <a:font script="Bopo" typeface="Microsoft JhengHei"/>
+        <a:font script="Java" typeface="Javanese Text"/>
+        <a:font script="Lisu" typeface="Segoe UI"/>
+        <a:font script="Mymr" typeface="Myanmar Text"/>
+        <a:font script="Nkoo" typeface="Ebrima"/>
+        <a:font script="Olck" typeface="Nirmala UI"/>
+        <a:font script="Osma" typeface="Ebrima"/>
+        <a:font script="Phag" typeface="Phagspa"/>
+        <a:font script="Syrn" typeface="Estrangelo Edessa"/>
+        <a:font script="Syrj" typeface="Estrangelo Edessa"/>
+        <a:font script="Syre" typeface="Estrangelo Edessa"/>
+        <a:font script="Sora" typeface="Nirmala UI"/>
+        <a:font script="Tale" typeface="Microsoft Tai Le"/>
+        <a:font script="Talu" typeface="Microsoft New Tai Lue"/>
+        <a:font script="Tfng" typeface="Ebrima"/>
+      </a:majorFont>
+      <a:minorFont>
+        <a:latin typeface="Aptos" panose="02110004020202020204"/>
+        <a:ea typeface=""/>
+        <a:cs typeface=""/>
+        <a:font script="Jpan" typeface="游ゴシック"/>
+        <a:font script="Hang" typeface="맑은 고딕"/>
+        <a:font script="Hans" typeface="等线"/>
+        <a:font script="Hant" typeface="新細明體"/>
+        <a:font script="Arab" typeface="Arial"/>
+        <a:font script="Hebr" typeface="Arial"/>
+        <a:font script="Thai" typeface="Cordia New"/>
+        <a:font script="Ethi" typeface="Nyala"/>
+        <a:font script="Beng" typeface="Vrinda"/>
+        <a:font script="Gujr" typeface="Shruti"/>
+        <a:font script="Khmr" typeface="DaunPenh"/>
+        <a:font script="Knda" typeface="Tunga"/>
+        <a:font script="Guru" typeface="Raavi"/>
+        <a:font script="Cans" typeface="Euphemia"/>
+        <a:font script="Cher" typeface="Plantagenet Cherokee"/>
+        <a:font script="Yiii" typeface="Microsoft Yi Baiti"/>
+        <a:font script="Tibt" typeface="Microsoft Himalaya"/>
+        <a:font script="Thaa" typeface="MV Boli"/>
+        <a:font script="Deva" typeface="Mangal"/>
+        <a:font script="Telu" typeface="Gautami"/>
+        <a:font script="Taml" typeface="Latha"/>
+        <a:font script="Syrc" typeface="Estrangelo Edessa"/>
+        <a:font script="Orya" typeface="Kalinga"/>
+        <a:font script="Mlym" typeface="Kartika"/>
+        <a:font script="Laoo" typeface="DokChampa"/>
+        <a:font script="Sinh" typeface="Iskoola Pota"/>
+        <a:font script="Mong" typeface="Mongolian Baiti"/>
+        <a:font script="Viet" typeface="Arial"/>
+        <a:font script="Uigh" typeface="Microsoft Uighur"/>
+        <a:font script="Geor" typeface="Sylfaen"/>
+        <a:font script="Armn" typeface="Arial"/>
+        <a:font script="Bugi" typeface="Leelawadee UI"/>
+        <a:font script="Bopo" typeface="Microsoft JhengHei"/>
+        <a:font script="Java" typeface="Javanese Text"/>
+        <a:font script="Lisu" typeface="Segoe UI"/>
+        <a:font script="Mymr" typeface="Myanmar Text"/>
+        <a:font script="Nkoo" typeface="Ebrima"/>
+        <a:font script="Olck" typeface="Nirmala UI"/>
+        <a:font script="Osma" typeface="Ebrima"/>
+        <a:font script="Phag" typeface="Phagspa"/>
+        <a:font script="Syrn" typeface="Estrangelo Edessa"/>
+        <a:font script="Syrj" typeface="Estrangelo Edessa"/>
+        <a:font script="Syre" typeface="Estrangelo Edessa"/>
+        <a:font script="Sora" typeface="Nirmala UI"/>
+        <a:font script="Tale" typeface="Microsoft Tai Le"/>
+        <a:font script="Talu" typeface="Microsoft New Tai Lue"/>
+        <a:font script="Tfng" typeface="Ebrima"/>
+      </a:minorFont>
+    </a:fontScheme>
+    <a:fmtScheme name="Office">
+      <a:fillStyleLst>
+        <a:solidFill>
+          <a:schemeClr val="phClr"/>
+        </a:solidFill>
+        <a:gradFill rotWithShape="1">
+          <a:gsLst>
+            <a:gs pos="0">
+              <a:schemeClr val="phClr">
+                <a:lumMod val="110000"/>
+                <a:satMod val="105000"/>
+                <a:tint val="67000"/>
+              </a:schemeClr>
+            </a:gs>
+            <a:gs pos="50000">
+              <a:schemeClr val="phClr">
+                <a:lumMod val="105000"/>
+                <a:satMod val="103000"/>
+                <a:tint val="73000"/>
+              </a:schemeClr>
+            </a:gs>
+            <a:gs pos="100000">
+              <a:schemeClr val="phClr">
+                <a:lumMod val="105000"/>
+                <a:satMod val="109000"/>
+                <a:tint val="81000"/>
+              </a:schemeClr>
+            </a:gs>
+          </a:gsLst>
+          <a:lin ang="5400000" scaled="0"/>
+        </a:gradFill>
+        <a:gradFill rotWithShape="1">
+          <a:gsLst>
+            <a:gs pos="0">
+              <a:schemeClr val="phClr">
+                <a:satMod val="103000"/>
+                <a:lumMod val="102000"/>
+                <a:tint val="94000"/>
+              </a:schemeClr>
+            </a:gs>
+            <a:gs pos="50000">
+              <a:schemeClr val="phClr">
+                <a:satMod val="110000"/>
+                <a:lumMod val="100000"/>
+                <a:shade val="100000"/>
+              </a:schemeClr>
+            </a:gs>
+            <a:gs pos="100000">
+              <a:schemeClr val="phClr">
+                <a:lumMod val="99000"/>
+                <a:satMod val="120000"/>
+                <a:shade val="78000"/>
+              </a:schemeClr>
+            </a:gs>
+          </a:gsLst>
+          <a:lin ang="5400000" scaled="0"/>
+        </a:gradFill>
+      </a:fillStyleLst>
+      <a:lnStyleLst>
+        <a:ln w="12700" cap="flat" cmpd="sng" algn="ctr">
+          <a:solidFill>
+            <a:schemeClr val="phClr"/>
+          </a:solidFill>
+          <a:prstDash val="solid"/>
+          <a:miter lim="800000"/>
+        </a:ln>
+        <a:ln w="19050" cap="flat" cmpd="sng" algn="ctr">
+          <a:solidFill>
+            <a:schemeClr val="phClr"/>
+          </a:solidFill>
+          <a:prstDash val="solid"/>
+          <a:miter lim="800000"/>
+        </a:ln>
+        <a:ln w="25400" cap="flat" cmpd="sng" algn="ctr">
+          <a:solidFill>
+            <a:schemeClr val="phClr"/>
+          </a:solidFill>
+          <a:prstDash val="solid"/>
+          <a:miter lim="800000"/>
+        </a:ln>
+      </a:lnStyleLst>
+      <a:effectStyleLst>
+        <a:effectStyle>
+          <a:effectLst/>
+        </a:effectStyle>
+        <a:effectStyle>
+          <a:effectLst/>
+        </a:effectStyle>
+        <a:effectStyle>
+          <a:effectLst>
+            <a:outerShdw blurRad="57150" dist="19050" dir="5400000" algn="ctr" rotWithShape="0">
+              <a:srgbClr val="000000">
+                <a:alpha val="63000"/>
+              </a:srgbClr>
+            </a:outerShdw>
+          </a:effectLst>
+        </a:effectStyle>
+      </a:effectStyleLst>
+      <a:bgFillStyleLst>
+        <a:solidFill>
+          <a:schemeClr val="phClr"/>
+        </a:solidFill>
+        <a:solidFill>
+          <a:schemeClr val="phClr">
+            <a:tint val="95000"/>
+            <a:satMod val="170000"/>
+          </a:schemeClr>
+        </a:solidFill>
+        <a:gradFill rotWithShape="1">
+          <a:gsLst>
+            <a:gs pos="0">
+              <a:schemeClr val="phClr">
+                <a:tint val="93000"/>
+                <a:satMod val="150000"/>
+                <a:shade val="98000"/>
+                <a:lumMod val="102000"/>
+              </a:schemeClr>
+            </a:gs>
+            <a:gs pos="50000">
+              <a:schemeClr val="phClr">
+                <a:tint val="98000"/>
+                <a:satMod val="130000"/>
+                <a:shade val="90000"/>
+                <a:lumMod val="103000"/>
+              </a:schemeClr>
+            </a:gs>
+            <a:gs pos="100000">
+              <a:schemeClr val="phClr">
+                <a:shade val="63000"/>
+                <a:satMod val="120000"/>
+              </a:schemeClr>
+            </a:gs>
+          </a:gsLst>
+          <a:lin ang="5400000" scaled="0"/>
+        </a:gradFill>
+      </a:bgFillStyleLst>
+    </a:fmtScheme>
+  </a:themeElements>
+  <a:objectDefaults>
+    <a:lnDef>
+      <a:spPr/>
+      <a:bodyPr/>
+      <a:lstStyle/>
+      <a:style>
+        <a:lnRef idx="2">
+          <a:schemeClr val="accent1"/>
+        </a:lnRef>
+        <a:fillRef idx="0">
+          <a:schemeClr val="accent1"/>
+        </a:fillRef>
+        <a:effectRef idx="1">
+          <a:schemeClr val="accent1"/>
+        </a:effectRef>
+        <a:fontRef idx="minor">
+          <a:schemeClr val="tx1"/>
+        </a:fontRef>
+      </a:style>
+    </a:lnDef>
+  </a:objectDefaults>
+  <a:extraClrSchemeLst/>
+  <a:extLst>
+    <a:ext uri="{05A4C25C-085E-4340-85A3-A5531E510DB2}">
+      <thm15:themeFamily xmlns:thm15="http://schemas.microsoft.com/office/thememl/2012/main" name="Office Theme" id="{2E142A2C-CD16-42D6-873A-C26D2A0506FA}" vid="{1BDDFF52-6CD6-40A5-AB3C-68EB2F1E4D0A}"/>
+    </a:ext>
+  </a:extLst>
+</a:theme>
+</file>
+
+<file path=ppt/webextensions/taskpanes.xml><?xml version="1.0" encoding="utf-8"?>
+<wetp:taskpanes xmlns:wetp="http://schemas.microsoft.com/office/webextensions/taskpanes/2010/11">
+  <wetp:taskpane dockstate="right" visibility="0" width="350" row="0">
+    <wetp:webextensionref xmlns:r="http://schemas.openxmlformats.org/officeDocument/2006/relationships" r:id="rId1"/>
+  </wetp:taskpane>
+</wetp:taskpanes>
+</file>
+
+<file path=ppt/webextensions/webextension1.xml><?xml version="1.0" encoding="utf-8"?>
+<we:webextension xmlns:we="http://schemas.microsoft.com/office/webextensions/webextension/2010/11" id="{68E2230D-21A3-4CFC-B0A6-6BB5FE383EB8}">
+  <we:reference id="wa200010001" version="1.0.0.1" store="en-US" storeType="OMEX"/>
+  <we:alternateReferences>
+    <we:reference id="WA200010001" version="1.0.0.1" store="" storeType="OMEX"/>
+  </we:alternateReferences>
+  <we:properties>
+    <we:property name="claude.fileId" value="&quot;6ea7967e-4c41-4309-bfaf-33ec15be9b7f&quot;"/>
+  </we:properties>
+  <we:bindings/>
+  <we:snapshot xmlns:r="http://schemas.openxmlformats.org/officeDocument/2006/relationships"/>
+</we:webextension>
 </file>